--- a/content/decks/media-studies/media-studies-s1-lesson-04-sound.pptx
+++ b/content/decks/media-studies/media-studies-s1-lesson-04-sound.pptx
@@ -5366,7 +5366,7 @@
       </p:grpSpPr>
       <p:pic>
         <p:nvPicPr>
-          <p:cNvPr id="2" name="Image 0" descr="/Users/dogan/Documents/Vaults/Courses/wiki/classes/media-studies/decks/_build/img/crops/caravaggio-musicians_a664.jpg">    </p:cNvPr>
+          <p:cNvPr id="2" name="Image 0" descr="/Users/dogan/Documents/Vaults/Courses/wiki/classes/media-studies/decks/_build/img/crops/foley-room_a664.jpg">    </p:cNvPr>
           <p:cNvPicPr>
             <a:picLocks noChangeAspect="1"/>
           </p:cNvPicPr>
@@ -5475,7 +5475,7 @@
               <a:buNone/>
             </a:pPr>
             <a:r>
-              <a:rPr lang="en-US" sz="3800" dirty="0">
+              <a:rPr lang="en-US" sz="3600" dirty="0">
                 <a:solidFill>
                   <a:srgbClr val="24313F"/>
                 </a:solidFill>
@@ -5483,9 +5483,9 @@
                 <a:ea typeface="Georgia" pitchFamily="34" charset="-122"/>
                 <a:cs typeface="Georgia" pitchFamily="34" charset="-120"/>
               </a:rPr>
-              <a:t>A painting of a rehearsal</a:t>
-            </a:r>
-            <a:endParaRPr lang="en-US" sz="3800" dirty="0"/>
+              <a:t>The room where sound is built</a:t>
+            </a:r>
+            <a:endParaRPr lang="en-US" sz="3600" dirty="0"/>
           </a:p>
         </p:txBody>
       </p:sp>
@@ -5525,7 +5525,7 @@
                 <a:ea typeface="Georgia" pitchFamily="34" charset="-122"/>
                 <a:cs typeface="Georgia" pitchFamily="34" charset="-120"/>
               </a:rPr>
-              <a:t>Nobody is performing. The lute is being tuned, the score is being read, a player looks out at us mid-thought. Caravaggio painted the part of music that happens before the music: preparation, attention, the room.</a:t>
+              <a:t>A foley artist, mid-drop. Almost nothing you hear in a finished scene was recorded when the camera rolled: footsteps, cloth, a glass set down, a door eased shut are all performed later, object by object, in a room like this one.</a:t>
             </a:r>
             <a:endParaRPr lang="en-US" sz="1700" dirty="0"/>
           </a:p>
@@ -5554,7 +5554,7 @@
                 <a:ea typeface="Georgia" pitchFamily="34" charset="-122"/>
                 <a:cs typeface="Georgia" pitchFamily="34" charset="-120"/>
               </a:rPr>
-              <a:t>That is the part of a soundtrack students never hear. Ambient sound, the bed under the scene, the breath before the line. It is doing continuous work on your mood, which is exactly why it is easy to overlook and worth naming.</a:t>
+              <a:t>That is the part of a soundtrack students never hear as a decision. Ambient sound, the bed under the scene, the breath before the line: every one of them was chosen and placed, which is exactly why it is easy to overlook and worth naming.</a:t>
             </a:r>
             <a:endParaRPr lang="en-US" sz="1700" dirty="0"/>
           </a:p>
@@ -5595,7 +5595,7 @@
                 <a:ea typeface="Arial" pitchFamily="34" charset="-122"/>
                 <a:cs typeface="Arial" pitchFamily="34" charset="-120"/>
               </a:rPr>
-              <a:t>Caravaggio, The Musicians, 1595</a:t>
+              <a:t>A foley room at work. Vancouver Film School, CC BY 2.0</a:t>
             </a:r>
             <a:endParaRPr lang="en-US" sz="950" dirty="0"/>
           </a:p>

--- a/content/decks/media-studies/media-studies-s1-lesson-04-sound.pptx
+++ b/content/decks/media-studies/media-studies-s1-lesson-04-sound.pptx
@@ -17,9 +17,11 @@
     <p:sldId id="265" r:id="rId11"/>
     <p:sldId id="266" r:id="rId12"/>
     <p:sldId id="267" r:id="rId13"/>
+    <p:sldId id="268" r:id="rId14"/>
+    <p:sldId id="269" r:id="rId15"/>
   </p:sldIdLst>
   <p:notesMasterIdLst>
-    <p:notesMasterId r:id="rId14"/>
+    <p:notesMasterId r:id="rId16"/>
   </p:notesMasterIdLst>
   <p:sldSz cx="12192000" cy="6858000"/>
   <p:notesSz cx="6858000" cy="12192000"/>
@@ -601,7 +603,7 @@
           <a:p>
             <a:r>
               <a:rPr lang="en-US" dirty="0"/>
-              <a:t/>
+              <a:t>Also demonstrate the failure: twenty seconds of dialogue recorded near an open door, played back on a speaker, so the room hears what an uncontrolled space costs. Cambridge's own definition normalised here from an en dash to commas; all of its words are kept.</a:t>
             </a:r>
             <a:endParaRPr lang="en-US" dirty="0"/>
           </a:p>
@@ -689,7 +691,7 @@
           <a:p>
             <a:r>
               <a:rPr lang="en-US" dirty="0"/>
-              <a:t/>
+              <a:t>The monitoring habit is policed at every shoot from CS4 onward. The photograph shows the division of labor a two-person student crew should copy.</a:t>
             </a:r>
             <a:endParaRPr lang="en-US" dirty="0"/>
           </a:p>
@@ -777,7 +779,7 @@
           <a:p>
             <a:r>
               <a:rPr lang="en-US" dirty="0"/>
-              <a:t/>
+              <a:t>The gate photograph is Deck U2.1 slide 2's own soundscape image, the coursebook's design-the-soundscape task: fog, a figure, one lamp. What do we hear, from where, and what carries over the cut?</a:t>
             </a:r>
             <a:endParaRPr lang="en-US" dirty="0"/>
           </a:p>
@@ -801,6 +803,182 @@
             <a:fld id="{F7021451-1387-4CA6-816F-3879F97B5CBC}" type="slidenum">
               <a:rPr lang="en-US"/>
               <a:t>12</a:t>
+            </a:fld>
+            <a:endParaRPr lang="en-US"/>
+          </a:p>
+        </p:txBody>
+      </p:sp>
+    </p:spTree>
+    <p:extLst>
+      <p:ext uri="{BB962C8B-B14F-4D97-AF65-F5344CB8AC3E}">
+        <p14:creationId xmlns:p14="http://schemas.microsoft.com/office/powerpoint/2010/main" val="1024086991"/>
+      </p:ext>
+    </p:extLst>
+  </p:cSld>
+  <p:clrMapOvr>
+    <a:masterClrMapping/>
+  </p:clrMapOvr>
+</p:notes>
+</file>
+
+<file path=ppt/notesSlides/notesSlide13.xml><?xml version="1.0" encoding="utf-8"?>
+<p:notes xmlns:a="http://schemas.openxmlformats.org/drawingml/2006/main" xmlns:r="http://schemas.openxmlformats.org/officeDocument/2006/relationships" xmlns:p="http://schemas.openxmlformats.org/presentationml/2006/main">
+  <p:cSld>
+    <p:spTree>
+      <p:nvGrpSpPr>
+        <p:cNvPr id="1" name=""/>
+        <p:cNvGrpSpPr/>
+        <p:nvPr/>
+      </p:nvGrpSpPr>
+      <p:grpSpPr>
+        <a:xfrm>
+          <a:off x="0" y="0"/>
+          <a:ext cx="0" cy="0"/>
+          <a:chOff x="0" y="0"/>
+          <a:chExt cx="0" cy="0"/>
+        </a:xfrm>
+      </p:grpSpPr>
+      <p:sp>
+        <p:nvSpPr>
+          <p:cNvPr id="2" name="Slide Image Placeholder 1"/>
+          <p:cNvSpPr>
+            <a:spLocks noGrp="1" noRot="1" noChangeAspect="1"/>
+          </p:cNvSpPr>
+          <p:nvPr>
+            <p:ph type="sldImg"/>
+          </p:nvPr>
+        </p:nvSpPr>
+        <p:spPr/>
+      </p:sp>
+      <p:sp>
+        <p:nvSpPr>
+          <p:cNvPr id="3" name="Notes Placeholder 2"/>
+          <p:cNvSpPr>
+            <a:spLocks noGrp="1"/>
+          </p:cNvSpPr>
+          <p:nvPr>
+            <p:ph type="body" idx="1"/>
+          </p:nvPr>
+        </p:nvSpPr>
+        <p:spPr/>
+        <p:txBody>
+          <a:bodyPr/>
+          <a:lstStyle/>
+          <a:p>
+            <a:r>
+              <a:rPr lang="en-US" dirty="0"/>
+              <a:t/>
+            </a:r>
+            <a:endParaRPr lang="en-US" dirty="0"/>
+          </a:p>
+        </p:txBody>
+      </p:sp>
+      <p:sp>
+        <p:nvSpPr>
+          <p:cNvPr id="4" name="Slide Number Placeholder 3"/>
+          <p:cNvSpPr>
+            <a:spLocks noGrp="1"/>
+          </p:cNvSpPr>
+          <p:nvPr>
+            <p:ph type="sldNum" sz="quarter" idx="10"/>
+          </p:nvPr>
+        </p:nvSpPr>
+        <p:spPr/>
+        <p:txBody>
+          <a:bodyPr/>
+          <a:lstStyle/>
+          <a:p>
+            <a:fld id="{F7021451-1387-4CA6-816F-3879F97B5CBC}" type="slidenum">
+              <a:rPr lang="en-US"/>
+              <a:t>13</a:t>
+            </a:fld>
+            <a:endParaRPr lang="en-US"/>
+          </a:p>
+        </p:txBody>
+      </p:sp>
+    </p:spTree>
+    <p:extLst>
+      <p:ext uri="{BB962C8B-B14F-4D97-AF65-F5344CB8AC3E}">
+        <p14:creationId xmlns:p14="http://schemas.microsoft.com/office/powerpoint/2010/main" val="1024086991"/>
+      </p:ext>
+    </p:extLst>
+  </p:cSld>
+  <p:clrMapOvr>
+    <a:masterClrMapping/>
+  </p:clrMapOvr>
+</p:notes>
+</file>
+
+<file path=ppt/notesSlides/notesSlide14.xml><?xml version="1.0" encoding="utf-8"?>
+<p:notes xmlns:a="http://schemas.openxmlformats.org/drawingml/2006/main" xmlns:r="http://schemas.openxmlformats.org/officeDocument/2006/relationships" xmlns:p="http://schemas.openxmlformats.org/presentationml/2006/main">
+  <p:cSld>
+    <p:spTree>
+      <p:nvGrpSpPr>
+        <p:cNvPr id="1" name=""/>
+        <p:cNvGrpSpPr/>
+        <p:nvPr/>
+      </p:nvGrpSpPr>
+      <p:grpSpPr>
+        <a:xfrm>
+          <a:off x="0" y="0"/>
+          <a:ext cx="0" cy="0"/>
+          <a:chOff x="0" y="0"/>
+          <a:chExt cx="0" cy="0"/>
+        </a:xfrm>
+      </p:grpSpPr>
+      <p:sp>
+        <p:nvSpPr>
+          <p:cNvPr id="2" name="Slide Image Placeholder 1"/>
+          <p:cNvSpPr>
+            <a:spLocks noGrp="1" noRot="1" noChangeAspect="1"/>
+          </p:cNvSpPr>
+          <p:nvPr>
+            <p:ph type="sldImg"/>
+          </p:nvPr>
+        </p:nvSpPr>
+        <p:spPr/>
+      </p:sp>
+      <p:sp>
+        <p:nvSpPr>
+          <p:cNvPr id="3" name="Notes Placeholder 2"/>
+          <p:cNvSpPr>
+            <a:spLocks noGrp="1"/>
+          </p:cNvSpPr>
+          <p:nvPr>
+            <p:ph type="body" idx="1"/>
+          </p:nvPr>
+        </p:nvSpPr>
+        <p:spPr/>
+        <p:txBody>
+          <a:bodyPr/>
+          <a:lstStyle/>
+          <a:p>
+            <a:r>
+              <a:rPr lang="en-US" dirty="0"/>
+              <a:t/>
+            </a:r>
+            <a:endParaRPr lang="en-US" dirty="0"/>
+          </a:p>
+        </p:txBody>
+      </p:sp>
+      <p:sp>
+        <p:nvSpPr>
+          <p:cNvPr id="4" name="Slide Number Placeholder 3"/>
+          <p:cNvSpPr>
+            <a:spLocks noGrp="1"/>
+          </p:cNvSpPr>
+          <p:nvPr>
+            <p:ph type="sldNum" sz="quarter" idx="10"/>
+          </p:nvPr>
+        </p:nvSpPr>
+        <p:spPr/>
+        <p:txBody>
+          <a:bodyPr/>
+          <a:lstStyle/>
+          <a:p>
+            <a:fld id="{F7021451-1387-4CA6-816F-3879F97B5CBC}" type="slidenum">
+              <a:rPr lang="en-US"/>
+              <a:t>14</a:t>
             </a:fld>
             <a:endParaRPr lang="en-US"/>
           </a:p>
@@ -953,7 +1131,7 @@
           <a:p>
             <a:r>
               <a:rPr lang="en-US" dirty="0"/>
-              <a:t/>
+              <a:t>PROPOSED content: the chosen sequence must be dense in ambient sound and score with no decodable dialogue; note the text and timecodes here before teaching. D2 opens with Lexicon Bingo as retrieval and the three-minute blind listen; the D1 homework is three sounds collected from your own environment, recorded on a phone.</a:t>
             </a:r>
             <a:endParaRPr lang="en-US" dirty="0"/>
           </a:p>
@@ -1129,7 +1307,7 @@
           <a:p>
             <a:r>
               <a:rPr lang="en-US" dirty="0"/>
-              <a:t>Land each term on a moment from the sequence they just heard blind, not on an abstract definition.</a:t>
+              <a:t>Land each term on a moment from the sequence they just heard blind, not on an abstract definition. Sound effects restored to the list 2026-08-24: it is on the syllabus list and WS 2.2.</a:t>
             </a:r>
             <a:endParaRPr lang="en-US" dirty="0"/>
           </a:p>
@@ -1217,7 +1395,7 @@
           <a:p>
             <a:r>
               <a:rPr lang="en-US" dirty="0"/>
-              <a:t/>
+              <a:t>Coursebook 2.3 names the Jaws shark theme as the classic sound-motif example, and the film already anchors the camera deck, so the set coheres. Ask: what would your opening's motif be, and what would it be welded to?</a:t>
             </a:r>
             <a:endParaRPr lang="en-US" dirty="0"/>
           </a:p>
@@ -1305,7 +1483,7 @@
           <a:p>
             <a:r>
               <a:rPr lang="en-US" dirty="0"/>
-              <a:t/>
+              <a:t>The one image the 2026-08-12 pass added; it stays. The stations slide later makes the room's work the students' own.</a:t>
             </a:r>
             <a:endParaRPr lang="en-US" dirty="0"/>
           </a:p>
@@ -1393,7 +1571,7 @@
           <a:p>
             <a:r>
               <a:rPr lang="en-US" dirty="0"/>
-              <a:t>Keep the source sequence and both beds exam-eligible. A Chinese-drama comparison is a legitimate spoken aside afterwards, per the exam-example rule.</a:t>
+              <a:t>The waveform runs under both boxes and straight through the cut: that continuity is the whole concept. If a screened pair is wanted, any cold open with a carried song does it; keep it exam-eligible.</a:t>
             </a:r>
             <a:endParaRPr lang="en-US" dirty="0"/>
           </a:p>
@@ -1481,7 +1659,7 @@
           <a:p>
             <a:r>
               <a:rPr lang="en-US" dirty="0"/>
-              <a:t>Also demonstrate the failure: twenty seconds of dialogue recorded near an open door, played back on a speaker, so the room hears what an uncontrolled space costs. Cambridge's own definition normalised here from an en dash to commas; all of its words are kept.</a:t>
+              <a:t>Keep the source sequence and both beds exam-eligible. A Chinese-drama comparison is a legitimate spoken aside afterwards, per the exam-example rule. The canonical archive example is the Scary Mary recut of Mary Poppins, family-safe if screened.</a:t>
             </a:r>
             <a:endParaRPr lang="en-US" dirty="0"/>
           </a:p>
@@ -2140,7 +2318,7 @@
                 <a:ea typeface="Arial" pitchFamily="34" charset="-122"/>
                 <a:cs typeface="Arial" pitchFamily="34" charset="-120"/>
               </a:rPr>
-              <a:t>DELIVERABLE · CS4</a:t>
+              <a:t>FOLEY · TWENTY-FIVE MINUTES</a:t>
             </a:r>
             <a:endParaRPr lang="en-US" sz="1100" dirty="0"/>
           </a:p>
@@ -2179,7 +2357,7 @@
                 <a:ea typeface="Arial" pitchFamily="34" charset="-122"/>
                 <a:cs typeface="Arial" pitchFamily="34" charset="-120"/>
               </a:rPr>
-              <a:t>FRIDAY, THIRTY MINUTES</a:t>
+              <a:t>PHONES RECORDING, HEADPHONES ON</a:t>
             </a:r>
             <a:endParaRPr lang="en-US" sz="1100" dirty="0"/>
           </a:p>
@@ -2216,8 +2394,8 @@
         </p:nvSpPr>
         <p:spPr>
           <a:xfrm>
-            <a:off x="822960" y="1143000"/>
-            <a:ext cx="10543032" cy="822960"/>
+            <a:off x="822960" y="932688"/>
+            <a:ext cx="10543032" cy="640080"/>
           </a:xfrm>
           <a:prstGeom prst="rect">
             <a:avLst/>
@@ -2233,7 +2411,7 @@
               <a:buNone/>
             </a:pPr>
             <a:r>
-              <a:rPr lang="en-US" sz="3600" dirty="0">
+              <a:rPr lang="en-US" sz="3200" dirty="0">
                 <a:solidFill>
                   <a:srgbClr val="24313F"/>
                 </a:solidFill>
@@ -2241,21 +2419,417 @@
                 <a:ea typeface="Georgia" pitchFamily="34" charset="-122"/>
                 <a:cs typeface="Georgia" pitchFamily="34" charset="-120"/>
               </a:rPr>
-              <a:t>Thirty seconds of your own opening</a:t>
-            </a:r>
-            <a:endParaRPr lang="en-US" sz="3600" dirty="0"/>
-          </a:p>
-        </p:txBody>
-      </p:sp>
-      <p:sp>
-        <p:nvSpPr>
-          <p:cNvPr id="6" name="Shape 4"/>
-          <p:cNvSpPr/>
-          <p:nvPr/>
-        </p:nvSpPr>
-        <p:spPr>
-          <a:xfrm>
-            <a:off x="822960" y="2240280"/>
+              <a:t>It does not have to be the real thing</a:t>
+            </a:r>
+            <a:endParaRPr lang="en-US" sz="3200" dirty="0"/>
+          </a:p>
+        </p:txBody>
+      </p:sp>
+      <p:sp>
+        <p:nvSpPr>
+          <p:cNvPr id="6" name="Text 4"/>
+          <p:cNvSpPr/>
+          <p:nvPr/>
+        </p:nvSpPr>
+        <p:spPr>
+          <a:xfrm>
+            <a:off x="822960" y="1691640"/>
+            <a:ext cx="10241280" cy="822960"/>
+          </a:xfrm>
+          <a:prstGeom prst="rect">
+            <a:avLst/>
+          </a:prstGeom>
+          <a:noFill/>
+          <a:ln/>
+        </p:spPr>
+        <p:txBody>
+          <a:bodyPr wrap="square" lIns="0" tIns="0" rIns="0" bIns="0" rtlCol="0" anchor="t"/>
+          <a:lstStyle/>
+          <a:p>
+            <a:pPr indent="0" marL="0">
+              <a:lnSpc>
+                <a:spcPts val="2500"/>
+              </a:lnSpc>
+              <a:buNone/>
+            </a:pPr>
+            <a:r>
+              <a:rPr lang="en-US" sz="1800" i="1" dirty="0">
+                <a:solidFill>
+                  <a:srgbClr val="4A6B5D"/>
+                </a:solidFill>
+                <a:latin typeface="Georgia" pitchFamily="34" charset="0"/>
+                <a:ea typeface="Georgia" pitchFamily="34" charset="-122"/>
+                <a:cs typeface="Georgia" pitchFamily="34" charset="-120"/>
+              </a:rPr>
+              <a:t>Cambridge defines it precisely: incidental sound effects which are created artificially to enhance the drama, but which are diegetic, that is, they exist within the world of the film.</a:t>
+            </a:r>
+            <a:endParaRPr lang="en-US" sz="1800" dirty="0"/>
+          </a:p>
+        </p:txBody>
+      </p:sp>
+      <p:sp>
+        <p:nvSpPr>
+          <p:cNvPr id="7" name="Shape 5"/>
+          <p:cNvSpPr/>
+          <p:nvPr/>
+        </p:nvSpPr>
+        <p:spPr>
+          <a:xfrm>
+            <a:off x="822960" y="2743200"/>
+            <a:ext cx="3291840" cy="658368"/>
+          </a:xfrm>
+          <a:prstGeom prst="rect">
+            <a:avLst/>
+          </a:prstGeom>
+          <a:solidFill>
+            <a:srgbClr val="E8EFE7"/>
+          </a:solidFill>
+          <a:ln/>
+        </p:spPr>
+      </p:sp>
+      <p:sp>
+        <p:nvSpPr>
+          <p:cNvPr id="8" name="Text 6"/>
+          <p:cNvSpPr/>
+          <p:nvPr/>
+        </p:nvSpPr>
+        <p:spPr>
+          <a:xfrm>
+            <a:off x="1024128" y="2743200"/>
+            <a:ext cx="2926080" cy="658368"/>
+          </a:xfrm>
+          <a:prstGeom prst="rect">
+            <a:avLst/>
+          </a:prstGeom>
+          <a:noFill/>
+          <a:ln/>
+        </p:spPr>
+        <p:txBody>
+          <a:bodyPr wrap="square" lIns="0" tIns="0" rIns="0" bIns="0" rtlCol="0" anchor="ctr"/>
+          <a:lstStyle/>
+          <a:p>
+            <a:pPr indent="0" marL="0">
+              <a:buNone/>
+            </a:pPr>
+            <a:r>
+              <a:rPr lang="en-US" sz="1550" dirty="0">
+                <a:solidFill>
+                  <a:srgbClr val="24313F"/>
+                </a:solidFill>
+                <a:latin typeface="Georgia" pitchFamily="34" charset="0"/>
+                <a:ea typeface="Georgia" pitchFamily="34" charset="-122"/>
+                <a:cs typeface="Georgia" pitchFamily="34" charset="-120"/>
+              </a:rPr>
+              <a:t>Footsteps, three surfaces</a:t>
+            </a:r>
+            <a:endParaRPr lang="en-US" sz="1550" dirty="0"/>
+          </a:p>
+        </p:txBody>
+      </p:sp>
+      <p:sp>
+        <p:nvSpPr>
+          <p:cNvPr id="9" name="Shape 7"/>
+          <p:cNvSpPr/>
+          <p:nvPr/>
+        </p:nvSpPr>
+        <p:spPr>
+          <a:xfrm>
+            <a:off x="4389120" y="2743200"/>
+            <a:ext cx="3291840" cy="658368"/>
+          </a:xfrm>
+          <a:prstGeom prst="rect">
+            <a:avLst/>
+          </a:prstGeom>
+          <a:solidFill>
+            <a:srgbClr val="E8EFE7"/>
+          </a:solidFill>
+          <a:ln/>
+        </p:spPr>
+      </p:sp>
+      <p:sp>
+        <p:nvSpPr>
+          <p:cNvPr id="10" name="Text 8"/>
+          <p:cNvSpPr/>
+          <p:nvPr/>
+        </p:nvSpPr>
+        <p:spPr>
+          <a:xfrm>
+            <a:off x="4590288" y="2743200"/>
+            <a:ext cx="2926080" cy="658368"/>
+          </a:xfrm>
+          <a:prstGeom prst="rect">
+            <a:avLst/>
+          </a:prstGeom>
+          <a:noFill/>
+          <a:ln/>
+        </p:spPr>
+        <p:txBody>
+          <a:bodyPr wrap="square" lIns="0" tIns="0" rIns="0" bIns="0" rtlCol="0" anchor="ctr"/>
+          <a:lstStyle/>
+          <a:p>
+            <a:pPr indent="0" marL="0">
+              <a:buNone/>
+            </a:pPr>
+            <a:r>
+              <a:rPr lang="en-US" sz="1550" dirty="0">
+                <a:solidFill>
+                  <a:srgbClr val="24313F"/>
+                </a:solidFill>
+                <a:latin typeface="Georgia" pitchFamily="34" charset="0"/>
+                <a:ea typeface="Georgia" pitchFamily="34" charset="-122"/>
+                <a:cs typeface="Georgia" pitchFamily="34" charset="-120"/>
+              </a:rPr>
+              <a:t>A door, opened slowly and fast</a:t>
+            </a:r>
+            <a:endParaRPr lang="en-US" sz="1550" dirty="0"/>
+          </a:p>
+        </p:txBody>
+      </p:sp>
+      <p:sp>
+        <p:nvSpPr>
+          <p:cNvPr id="11" name="Shape 9"/>
+          <p:cNvSpPr/>
+          <p:nvPr/>
+        </p:nvSpPr>
+        <p:spPr>
+          <a:xfrm>
+            <a:off x="7955280" y="2743200"/>
+            <a:ext cx="3291840" cy="658368"/>
+          </a:xfrm>
+          <a:prstGeom prst="rect">
+            <a:avLst/>
+          </a:prstGeom>
+          <a:solidFill>
+            <a:srgbClr val="E8EFE7"/>
+          </a:solidFill>
+          <a:ln/>
+        </p:spPr>
+      </p:sp>
+      <p:sp>
+        <p:nvSpPr>
+          <p:cNvPr id="12" name="Text 10"/>
+          <p:cNvSpPr/>
+          <p:nvPr/>
+        </p:nvSpPr>
+        <p:spPr>
+          <a:xfrm>
+            <a:off x="8156448" y="2743200"/>
+            <a:ext cx="2926080" cy="658368"/>
+          </a:xfrm>
+          <a:prstGeom prst="rect">
+            <a:avLst/>
+          </a:prstGeom>
+          <a:noFill/>
+          <a:ln/>
+        </p:spPr>
+        <p:txBody>
+          <a:bodyPr wrap="square" lIns="0" tIns="0" rIns="0" bIns="0" rtlCol="0" anchor="ctr"/>
+          <a:lstStyle/>
+          <a:p>
+            <a:pPr indent="0" marL="0">
+              <a:buNone/>
+            </a:pPr>
+            <a:r>
+              <a:rPr lang="en-US" sz="1550" dirty="0">
+                <a:solidFill>
+                  <a:srgbClr val="24313F"/>
+                </a:solidFill>
+                <a:latin typeface="Georgia" pitchFamily="34" charset="0"/>
+                <a:ea typeface="Georgia" pitchFamily="34" charset="-122"/>
+                <a:cs typeface="Georgia" pitchFamily="34" charset="-120"/>
+              </a:rPr>
+              <a:t>Cloth movement, close to the mic</a:t>
+            </a:r>
+            <a:endParaRPr lang="en-US" sz="1550" dirty="0"/>
+          </a:p>
+        </p:txBody>
+      </p:sp>
+      <p:sp>
+        <p:nvSpPr>
+          <p:cNvPr id="13" name="Shape 11"/>
+          <p:cNvSpPr/>
+          <p:nvPr/>
+        </p:nvSpPr>
+        <p:spPr>
+          <a:xfrm>
+            <a:off x="822960" y="3611880"/>
+            <a:ext cx="3291840" cy="658368"/>
+          </a:xfrm>
+          <a:prstGeom prst="rect">
+            <a:avLst/>
+          </a:prstGeom>
+          <a:solidFill>
+            <a:srgbClr val="E8EFE7"/>
+          </a:solidFill>
+          <a:ln/>
+        </p:spPr>
+      </p:sp>
+      <p:sp>
+        <p:nvSpPr>
+          <p:cNvPr id="14" name="Text 12"/>
+          <p:cNvSpPr/>
+          <p:nvPr/>
+        </p:nvSpPr>
+        <p:spPr>
+          <a:xfrm>
+            <a:off x="1024128" y="3611880"/>
+            <a:ext cx="2926080" cy="658368"/>
+          </a:xfrm>
+          <a:prstGeom prst="rect">
+            <a:avLst/>
+          </a:prstGeom>
+          <a:noFill/>
+          <a:ln/>
+        </p:spPr>
+        <p:txBody>
+          <a:bodyPr wrap="square" lIns="0" tIns="0" rIns="0" bIns="0" rtlCol="0" anchor="ctr"/>
+          <a:lstStyle/>
+          <a:p>
+            <a:pPr indent="0" marL="0">
+              <a:buNone/>
+            </a:pPr>
+            <a:r>
+              <a:rPr lang="en-US" sz="1550" dirty="0">
+                <a:solidFill>
+                  <a:srgbClr val="24313F"/>
+                </a:solidFill>
+                <a:latin typeface="Georgia" pitchFamily="34" charset="0"/>
+                <a:ea typeface="Georgia" pitchFamily="34" charset="-122"/>
+                <a:cs typeface="Georgia" pitchFamily="34" charset="-120"/>
+              </a:rPr>
+              <a:t>A punch</a:t>
+            </a:r>
+            <a:endParaRPr lang="en-US" sz="1550" dirty="0"/>
+          </a:p>
+        </p:txBody>
+      </p:sp>
+      <p:sp>
+        <p:nvSpPr>
+          <p:cNvPr id="15" name="Shape 13"/>
+          <p:cNvSpPr/>
+          <p:nvPr/>
+        </p:nvSpPr>
+        <p:spPr>
+          <a:xfrm>
+            <a:off x="4389120" y="3611880"/>
+            <a:ext cx="3291840" cy="658368"/>
+          </a:xfrm>
+          <a:prstGeom prst="rect">
+            <a:avLst/>
+          </a:prstGeom>
+          <a:solidFill>
+            <a:srgbClr val="E8EFE7"/>
+          </a:solidFill>
+          <a:ln/>
+        </p:spPr>
+      </p:sp>
+      <p:sp>
+        <p:nvSpPr>
+          <p:cNvPr id="16" name="Text 14"/>
+          <p:cNvSpPr/>
+          <p:nvPr/>
+        </p:nvSpPr>
+        <p:spPr>
+          <a:xfrm>
+            <a:off x="4590288" y="3611880"/>
+            <a:ext cx="2926080" cy="658368"/>
+          </a:xfrm>
+          <a:prstGeom prst="rect">
+            <a:avLst/>
+          </a:prstGeom>
+          <a:noFill/>
+          <a:ln/>
+        </p:spPr>
+        <p:txBody>
+          <a:bodyPr wrap="square" lIns="0" tIns="0" rIns="0" bIns="0" rtlCol="0" anchor="ctr"/>
+          <a:lstStyle/>
+          <a:p>
+            <a:pPr indent="0" marL="0">
+              <a:buNone/>
+            </a:pPr>
+            <a:r>
+              <a:rPr lang="en-US" sz="1550" dirty="0">
+                <a:solidFill>
+                  <a:srgbClr val="24313F"/>
+                </a:solidFill>
+                <a:latin typeface="Georgia" pitchFamily="34" charset="0"/>
+                <a:ea typeface="Georgia" pitchFamily="34" charset="-122"/>
+                <a:cs typeface="Georgia" pitchFamily="34" charset="-120"/>
+              </a:rPr>
+              <a:t>Liquid poured</a:t>
+            </a:r>
+            <a:endParaRPr lang="en-US" sz="1550" dirty="0"/>
+          </a:p>
+        </p:txBody>
+      </p:sp>
+      <p:sp>
+        <p:nvSpPr>
+          <p:cNvPr id="17" name="Shape 15"/>
+          <p:cNvSpPr/>
+          <p:nvPr/>
+        </p:nvSpPr>
+        <p:spPr>
+          <a:xfrm>
+            <a:off x="7955280" y="3611880"/>
+            <a:ext cx="3291840" cy="658368"/>
+          </a:xfrm>
+          <a:prstGeom prst="rect">
+            <a:avLst/>
+          </a:prstGeom>
+          <a:solidFill>
+            <a:srgbClr val="E8EFE7"/>
+          </a:solidFill>
+          <a:ln/>
+        </p:spPr>
+      </p:sp>
+      <p:sp>
+        <p:nvSpPr>
+          <p:cNvPr id="18" name="Text 16"/>
+          <p:cNvSpPr/>
+          <p:nvPr/>
+        </p:nvSpPr>
+        <p:spPr>
+          <a:xfrm>
+            <a:off x="8156448" y="3611880"/>
+            <a:ext cx="2926080" cy="658368"/>
+          </a:xfrm>
+          <a:prstGeom prst="rect">
+            <a:avLst/>
+          </a:prstGeom>
+          <a:noFill/>
+          <a:ln/>
+        </p:spPr>
+        <p:txBody>
+          <a:bodyPr wrap="square" lIns="0" tIns="0" rIns="0" bIns="0" rtlCol="0" anchor="ctr"/>
+          <a:lstStyle/>
+          <a:p>
+            <a:pPr indent="0" marL="0">
+              <a:buNone/>
+            </a:pPr>
+            <a:r>
+              <a:rPr lang="en-US" sz="1550" dirty="0">
+                <a:solidFill>
+                  <a:srgbClr val="24313F"/>
+                </a:solidFill>
+                <a:latin typeface="Georgia" pitchFamily="34" charset="0"/>
+                <a:ea typeface="Georgia" pitchFamily="34" charset="-122"/>
+                <a:cs typeface="Georgia" pitchFamily="34" charset="-120"/>
+              </a:rPr>
+              <a:t>Breath, gasp, hesitation</a:t>
+            </a:r>
+            <a:endParaRPr lang="en-US" sz="1550" dirty="0"/>
+          </a:p>
+        </p:txBody>
+      </p:sp>
+      <p:sp>
+        <p:nvSpPr>
+          <p:cNvPr id="19" name="Shape 17"/>
+          <p:cNvSpPr/>
+          <p:nvPr/>
+        </p:nvSpPr>
+        <p:spPr>
+          <a:xfrm>
+            <a:off x="822960" y="4709160"/>
             <a:ext cx="914400" cy="0"/>
           </a:xfrm>
           <a:prstGeom prst="line">
@@ -2272,324 +2846,49 @@
       </p:sp>
       <p:sp>
         <p:nvSpPr>
-          <p:cNvPr id="7" name="Text 5"/>
-          <p:cNvSpPr/>
-          <p:nvPr/>
-        </p:nvSpPr>
-        <p:spPr>
-          <a:xfrm>
-            <a:off x="822960" y="2468880"/>
-            <a:ext cx="10058400" cy="457200"/>
-          </a:xfrm>
-          <a:prstGeom prst="rect">
-            <a:avLst/>
-          </a:prstGeom>
-          <a:noFill/>
-          <a:ln/>
-        </p:spPr>
-        <p:txBody>
-          <a:bodyPr wrap="square" lIns="0" tIns="0" rIns="0" bIns="0" rtlCol="0" anchor="ctr"/>
+          <p:cNvPr id="20" name="Text 18"/>
+          <p:cNvSpPr/>
+          <p:nvPr/>
+        </p:nvSpPr>
+        <p:spPr>
+          <a:xfrm>
+            <a:off x="822960" y="4892040"/>
+            <a:ext cx="10424160" cy="640080"/>
+          </a:xfrm>
+          <a:prstGeom prst="rect">
+            <a:avLst/>
+          </a:prstGeom>
+          <a:noFill/>
+          <a:ln/>
+        </p:spPr>
+        <p:txBody>
+          <a:bodyPr wrap="square" lIns="0" tIns="0" rIns="0" bIns="0" rtlCol="0" anchor="t"/>
           <a:lstStyle/>
           <a:p>
             <a:pPr indent="0" marL="0">
-              <a:buNone/>
-            </a:pPr>
-            <a:r>
-              <a:rPr lang="en-US" sz="1800" dirty="0">
-                <a:solidFill>
-                  <a:srgbClr val="24313F"/>
+              <a:lnSpc>
+                <a:spcPts val="2200"/>
+              </a:lnSpc>
+              <a:buNone/>
+            </a:pPr>
+            <a:r>
+              <a:rPr lang="en-US" sz="1700" i="1" dirty="0">
+                <a:solidFill>
+                  <a:srgbClr val="4A6B5D"/>
                 </a:solidFill>
                 <a:latin typeface="Georgia" pitchFamily="34" charset="0"/>
                 <a:ea typeface="Georgia" pitchFamily="34" charset="-122"/>
                 <a:cs typeface="Georgia" pitchFamily="34" charset="-120"/>
               </a:rPr>
-              <a:t>Built from your own recordings, the foley takes, and one non-diegetic element. Four things must be in it:</a:t>
-            </a:r>
-            <a:endParaRPr lang="en-US" sz="1800" dirty="0"/>
-          </a:p>
-        </p:txBody>
-      </p:sp>
-      <p:sp>
-        <p:nvSpPr>
-          <p:cNvPr id="8" name="Shape 6"/>
-          <p:cNvSpPr/>
-          <p:nvPr/>
-        </p:nvSpPr>
-        <p:spPr>
-          <a:xfrm>
-            <a:off x="822960" y="3063240"/>
-            <a:ext cx="310896" cy="310896"/>
-          </a:xfrm>
-          <a:prstGeom prst="rect">
-            <a:avLst/>
-          </a:prstGeom>
-          <a:solidFill>
-            <a:srgbClr val="A3C1AD"/>
-          </a:solidFill>
-          <a:ln/>
-        </p:spPr>
-      </p:sp>
-      <p:sp>
-        <p:nvSpPr>
-          <p:cNvPr id="9" name="Text 7"/>
-          <p:cNvSpPr/>
-          <p:nvPr/>
-        </p:nvSpPr>
-        <p:spPr>
-          <a:xfrm>
-            <a:off x="1371600" y="3017520"/>
-            <a:ext cx="9601200" cy="402336"/>
-          </a:xfrm>
-          <a:prstGeom prst="rect">
-            <a:avLst/>
-          </a:prstGeom>
-          <a:noFill/>
-          <a:ln/>
-        </p:spPr>
-        <p:txBody>
-          <a:bodyPr wrap="square" lIns="0" tIns="0" rIns="0" bIns="0" rtlCol="0" anchor="ctr"/>
-          <a:lstStyle/>
-          <a:p>
-            <a:pPr indent="0" marL="0">
-              <a:buNone/>
-            </a:pPr>
-            <a:r>
-              <a:rPr lang="en-US" sz="1750" dirty="0">
-                <a:solidFill>
-                  <a:srgbClr val="24313F"/>
-                </a:solidFill>
-                <a:latin typeface="Georgia" pitchFamily="34" charset="0"/>
-                <a:ea typeface="Georgia" pitchFamily="34" charset="-122"/>
-                <a:cs typeface="Georgia" pitchFamily="34" charset="-120"/>
-              </a:rPr>
-              <a:t>One clearly diegetic sound</a:t>
-            </a:r>
-            <a:endParaRPr lang="en-US" sz="1750" dirty="0"/>
-          </a:p>
-        </p:txBody>
-      </p:sp>
-      <p:sp>
-        <p:nvSpPr>
-          <p:cNvPr id="10" name="Shape 8"/>
-          <p:cNvSpPr/>
-          <p:nvPr/>
-        </p:nvSpPr>
-        <p:spPr>
-          <a:xfrm>
-            <a:off x="822960" y="3630168"/>
-            <a:ext cx="310896" cy="310896"/>
-          </a:xfrm>
-          <a:prstGeom prst="rect">
-            <a:avLst/>
-          </a:prstGeom>
-          <a:solidFill>
-            <a:srgbClr val="A3C1AD"/>
-          </a:solidFill>
-          <a:ln/>
-        </p:spPr>
-      </p:sp>
-      <p:sp>
-        <p:nvSpPr>
-          <p:cNvPr id="11" name="Text 9"/>
-          <p:cNvSpPr/>
-          <p:nvPr/>
-        </p:nvSpPr>
-        <p:spPr>
-          <a:xfrm>
-            <a:off x="1371600" y="3584448"/>
-            <a:ext cx="9601200" cy="402336"/>
-          </a:xfrm>
-          <a:prstGeom prst="rect">
-            <a:avLst/>
-          </a:prstGeom>
-          <a:noFill/>
-          <a:ln/>
-        </p:spPr>
-        <p:txBody>
-          <a:bodyPr wrap="square" lIns="0" tIns="0" rIns="0" bIns="0" rtlCol="0" anchor="ctr"/>
-          <a:lstStyle/>
-          <a:p>
-            <a:pPr indent="0" marL="0">
-              <a:buNone/>
-            </a:pPr>
-            <a:r>
-              <a:rPr lang="en-US" sz="1750" dirty="0">
-                <a:solidFill>
-                  <a:srgbClr val="24313F"/>
-                </a:solidFill>
-                <a:latin typeface="Georgia" pitchFamily="34" charset="0"/>
-                <a:ea typeface="Georgia" pitchFamily="34" charset="-122"/>
-                <a:cs typeface="Georgia" pitchFamily="34" charset="-120"/>
-              </a:rPr>
-              <a:t>One clearly non-diegetic</a:t>
-            </a:r>
-            <a:endParaRPr lang="en-US" sz="1750" dirty="0"/>
-          </a:p>
-        </p:txBody>
-      </p:sp>
-      <p:sp>
-        <p:nvSpPr>
-          <p:cNvPr id="12" name="Shape 10"/>
-          <p:cNvSpPr/>
-          <p:nvPr/>
-        </p:nvSpPr>
-        <p:spPr>
-          <a:xfrm>
-            <a:off x="822960" y="4197096"/>
-            <a:ext cx="310896" cy="310896"/>
-          </a:xfrm>
-          <a:prstGeom prst="rect">
-            <a:avLst/>
-          </a:prstGeom>
-          <a:solidFill>
-            <a:srgbClr val="A3C1AD"/>
-          </a:solidFill>
-          <a:ln/>
-        </p:spPr>
-      </p:sp>
-      <p:sp>
-        <p:nvSpPr>
-          <p:cNvPr id="13" name="Text 11"/>
-          <p:cNvSpPr/>
-          <p:nvPr/>
-        </p:nvSpPr>
-        <p:spPr>
-          <a:xfrm>
-            <a:off x="1371600" y="4151376"/>
-            <a:ext cx="9601200" cy="402336"/>
-          </a:xfrm>
-          <a:prstGeom prst="rect">
-            <a:avLst/>
-          </a:prstGeom>
-          <a:noFill/>
-          <a:ln/>
-        </p:spPr>
-        <p:txBody>
-          <a:bodyPr wrap="square" lIns="0" tIns="0" rIns="0" bIns="0" rtlCol="0" anchor="ctr"/>
-          <a:lstStyle/>
-          <a:p>
-            <a:pPr indent="0" marL="0">
-              <a:buNone/>
-            </a:pPr>
-            <a:r>
-              <a:rPr lang="en-US" sz="1750" dirty="0">
-                <a:solidFill>
-                  <a:srgbClr val="24313F"/>
-                </a:solidFill>
-                <a:latin typeface="Georgia" pitchFamily="34" charset="0"/>
-                <a:ea typeface="Georgia" pitchFamily="34" charset="-122"/>
-                <a:cs typeface="Georgia" pitchFamily="34" charset="-120"/>
-              </a:rPr>
-              <a:t>One with a near or far perspective</a:t>
-            </a:r>
-            <a:endParaRPr lang="en-US" sz="1750" dirty="0"/>
-          </a:p>
-        </p:txBody>
-      </p:sp>
-      <p:sp>
-        <p:nvSpPr>
-          <p:cNvPr id="14" name="Shape 12"/>
-          <p:cNvSpPr/>
-          <p:nvPr/>
-        </p:nvSpPr>
-        <p:spPr>
-          <a:xfrm>
-            <a:off x="822960" y="4764024"/>
-            <a:ext cx="310896" cy="310896"/>
-          </a:xfrm>
-          <a:prstGeom prst="rect">
-            <a:avLst/>
-          </a:prstGeom>
-          <a:solidFill>
-            <a:srgbClr val="A3C1AD"/>
-          </a:solidFill>
-          <a:ln/>
-        </p:spPr>
-      </p:sp>
-      <p:sp>
-        <p:nvSpPr>
-          <p:cNvPr id="15" name="Text 13"/>
-          <p:cNvSpPr/>
-          <p:nvPr/>
-        </p:nvSpPr>
-        <p:spPr>
-          <a:xfrm>
-            <a:off x="1371600" y="4718304"/>
-            <a:ext cx="9601200" cy="402336"/>
-          </a:xfrm>
-          <a:prstGeom prst="rect">
-            <a:avLst/>
-          </a:prstGeom>
-          <a:noFill/>
-          <a:ln/>
-        </p:spPr>
-        <p:txBody>
-          <a:bodyPr wrap="square" lIns="0" tIns="0" rIns="0" bIns="0" rtlCol="0" anchor="ctr"/>
-          <a:lstStyle/>
-          <a:p>
-            <a:pPr indent="0" marL="0">
-              <a:buNone/>
-            </a:pPr>
-            <a:r>
-              <a:rPr lang="en-US" sz="1750" dirty="0">
-                <a:solidFill>
-                  <a:srgbClr val="24313F"/>
-                </a:solidFill>
-                <a:latin typeface="Georgia" pitchFamily="34" charset="0"/>
-                <a:ea typeface="Georgia" pitchFamily="34" charset="-122"/>
-                <a:cs typeface="Georgia" pitchFamily="34" charset="-120"/>
-              </a:rPr>
-              <a:t>One carrying across an implied cut, as a bridge</a:t>
-            </a:r>
-            <a:endParaRPr lang="en-US" sz="1750" dirty="0"/>
-          </a:p>
-        </p:txBody>
-      </p:sp>
-      <p:sp>
-        <p:nvSpPr>
-          <p:cNvPr id="16" name="Text 14"/>
-          <p:cNvSpPr/>
-          <p:nvPr/>
-        </p:nvSpPr>
-        <p:spPr>
-          <a:xfrm>
-            <a:off x="822960" y="5440680"/>
-            <a:ext cx="10424160" cy="548640"/>
-          </a:xfrm>
-          <a:prstGeom prst="rect">
-            <a:avLst/>
-          </a:prstGeom>
-          <a:noFill/>
-          <a:ln/>
-        </p:spPr>
-        <p:txBody>
-          <a:bodyPr wrap="square" lIns="0" tIns="0" rIns="0" bIns="0" rtlCol="0" anchor="t"/>
-          <a:lstStyle/>
-          <a:p>
-            <a:pPr indent="0" marL="0">
-              <a:lnSpc>
-                <a:spcPts val="1800"/>
-              </a:lnSpc>
-              <a:buNone/>
-            </a:pPr>
-            <a:r>
-              <a:rPr lang="en-US" sz="1250" dirty="0">
-                <a:solidFill>
-                  <a:srgbClr val="7A7F72"/>
-                </a:solidFill>
-                <a:latin typeface="Arial" pitchFamily="34" charset="0"/>
-                <a:ea typeface="Arial" pitchFamily="34" charset="-122"/>
-                <a:cs typeface="Arial" pitchFamily="34" charset="-120"/>
-              </a:rPr>
-              <a:t>Posted and dated on the blog with a rationale naming every choice by its term and saying what it is meant to do to the listener. Marked on terminology and intention, not on polish.</a:t>
-            </a:r>
-            <a:endParaRPr lang="en-US" sz="1250" dirty="0"/>
-          </a:p>
-        </p:txBody>
-      </p:sp>
-      <p:sp>
-        <p:nvSpPr>
-          <p:cNvPr id="17" name="Shape 15"/>
+              <a:t>The habit taught here and policed at every shoot afterwards: headphones on for every take, and the mic as close as the frame allows. Unusable audio cannot be fixed later.</a:t>
+            </a:r>
+            <a:endParaRPr lang="en-US" sz="1700" dirty="0"/>
+          </a:p>
+        </p:txBody>
+      </p:sp>
+      <p:sp>
+        <p:nvSpPr>
+          <p:cNvPr id="21" name="Shape 19"/>
           <p:cNvSpPr/>
           <p:nvPr/>
         </p:nvSpPr>
@@ -2612,7 +2911,7 @@
       </p:sp>
       <p:sp>
         <p:nvSpPr>
-          <p:cNvPr id="18" name="Text 16"/>
+          <p:cNvPr id="22" name="Text 20"/>
           <p:cNvSpPr/>
           <p:nvPr/>
         </p:nvSpPr>
@@ -2651,7 +2950,7 @@
       </p:sp>
       <p:sp>
         <p:nvSpPr>
-          <p:cNvPr id="19" name="Text 17"/>
+          <p:cNvPr id="23" name="Text 21"/>
           <p:cNvSpPr/>
           <p:nvPr/>
         </p:nvSpPr>
@@ -2753,7 +3052,7 @@
                 <a:ea typeface="Arial" pitchFamily="34" charset="-122"/>
                 <a:cs typeface="Arial" pitchFamily="34" charset="-120"/>
               </a:rPr>
-              <a:t>WHY SOUND PAYS MORE THAN THE REST</a:t>
+              <a:t>LOCATION SOUND</a:t>
             </a:r>
             <a:endParaRPr lang="en-US" sz="1100" dirty="0"/>
           </a:p>
@@ -2792,7 +3091,7 @@
                 <a:ea typeface="Arial" pitchFamily="34" charset="-122"/>
                 <a:cs typeface="Arial" pitchFamily="34" charset="-120"/>
               </a:rPr>
-              <a:t>NEGLECT IS AN OPPORTUNITY</a:t>
+              <a:t>THE HABIT THAT SAVES THE SHOOT</a:t>
             </a:r>
             <a:endParaRPr lang="en-US" sz="1100" dirty="0"/>
           </a:p>
@@ -2823,182 +3122,21 @@
       </p:sp>
       <p:sp>
         <p:nvSpPr>
-          <p:cNvPr id="5" name="Text 3"/>
+          <p:cNvPr id="5" name="Shape 3"/>
           <p:cNvSpPr/>
           <p:nvPr/>
         </p:nvSpPr>
         <p:spPr>
           <a:xfrm>
             <a:off x="822960" y="1097280"/>
-            <a:ext cx="10543032" cy="822960"/>
-          </a:xfrm>
-          <a:prstGeom prst="rect">
-            <a:avLst/>
-          </a:prstGeom>
-          <a:noFill/>
-          <a:ln/>
-        </p:spPr>
-        <p:txBody>
-          <a:bodyPr wrap="square" lIns="0" tIns="0" rIns="0" bIns="0" rtlCol="0" anchor="ctr"/>
-          <a:lstStyle/>
-          <a:p>
-            <a:pPr indent="0" marL="0">
-              <a:buNone/>
-            </a:pPr>
-            <a:r>
-              <a:rPr lang="en-US" sz="3600" dirty="0">
-                <a:solidFill>
-                  <a:srgbClr val="24313F"/>
-                </a:solidFill>
-                <a:latin typeface="Georgia" pitchFamily="34" charset="0"/>
-                <a:ea typeface="Georgia" pitchFamily="34" charset="-122"/>
-                <a:cs typeface="Georgia" pitchFamily="34" charset="-120"/>
-              </a:rPr>
-              <a:t>The cheapest advantage in the course</a:t>
-            </a:r>
-            <a:endParaRPr lang="en-US" sz="3600" dirty="0"/>
-          </a:p>
-        </p:txBody>
-      </p:sp>
-      <p:sp>
-        <p:nvSpPr>
-          <p:cNvPr id="6" name="Shape 4"/>
-          <p:cNvSpPr/>
-          <p:nvPr/>
-        </p:nvSpPr>
-        <p:spPr>
-          <a:xfrm>
-            <a:off x="822960" y="2194560"/>
-            <a:ext cx="914400" cy="0"/>
-          </a:xfrm>
-          <a:prstGeom prst="line">
-            <a:avLst/>
-          </a:prstGeom>
-          <a:noFill/>
-          <a:ln w="31750">
-            <a:solidFill>
-              <a:srgbClr val="8C3A38"/>
-            </a:solidFill>
-            <a:prstDash val="solid"/>
-          </a:ln>
-        </p:spPr>
-      </p:sp>
-      <p:sp>
-        <p:nvSpPr>
-          <p:cNvPr id="7" name="Text 5"/>
-          <p:cNvSpPr/>
-          <p:nvPr/>
-        </p:nvSpPr>
-        <p:spPr>
-          <a:xfrm>
-            <a:off x="822960" y="2468880"/>
-            <a:ext cx="10058400" cy="1737360"/>
-          </a:xfrm>
-          <a:prstGeom prst="rect">
-            <a:avLst/>
-          </a:prstGeom>
-          <a:noFill/>
-          <a:ln/>
-        </p:spPr>
-        <p:txBody>
-          <a:bodyPr wrap="square" lIns="0" tIns="0" rIns="0" bIns="0" rtlCol="0" anchor="t"/>
-          <a:lstStyle/>
-          <a:p>
-            <a:pPr indent="0" marL="0">
-              <a:lnSpc>
-                <a:spcPts val="2700"/>
-              </a:lnSpc>
-              <a:buNone/>
-            </a:pPr>
-            <a:r>
-              <a:rPr lang="en-US" sz="1900" dirty="0">
-                <a:solidFill>
-                  <a:srgbClr val="24313F"/>
-                </a:solidFill>
-                <a:latin typeface="Georgia" pitchFamily="34" charset="0"/>
-                <a:ea typeface="Georgia" pitchFamily="34" charset="-122"/>
-                <a:cs typeface="Georgia" pitchFamily="34" charset="-120"/>
-              </a:rPr>
-              <a:t>Cambridge says candidates neglect sound. That is a statement about the field you are marked against. A script that reads camera brilliantly and never mentions sound has a coverage gap the examiner sees immediately. A script that names a sound bridge, or a shift in sound perspective, has almost always outperformed the scripts beside it.</a:t>
-            </a:r>
-            <a:endParaRPr lang="en-US" sz="1900" dirty="0"/>
-          </a:p>
-        </p:txBody>
-      </p:sp>
-      <p:sp>
-        <p:nvSpPr>
-          <p:cNvPr id="8" name="Shape 6"/>
-          <p:cNvSpPr/>
-          <p:nvPr/>
-        </p:nvSpPr>
-        <p:spPr>
-          <a:xfrm>
-            <a:off x="822960" y="4434840"/>
-            <a:ext cx="10543032" cy="914400"/>
+            <a:ext cx="6583680" cy="4480560"/>
           </a:xfrm>
           <a:prstGeom prst="rect">
             <a:avLst/>
           </a:prstGeom>
           <a:solidFill>
-            <a:srgbClr val="E8EFE7"/>
+            <a:srgbClr val="FAF8F1"/>
           </a:solidFill>
-          <a:ln/>
-        </p:spPr>
-      </p:sp>
-      <p:sp>
-        <p:nvSpPr>
-          <p:cNvPr id="9" name="Text 7"/>
-          <p:cNvSpPr/>
-          <p:nvPr/>
-        </p:nvSpPr>
-        <p:spPr>
-          <a:xfrm>
-            <a:off x="1097280" y="4526280"/>
-            <a:ext cx="9994392" cy="731520"/>
-          </a:xfrm>
-          <a:prstGeom prst="rect">
-            <a:avLst/>
-          </a:prstGeom>
-          <a:noFill/>
-          <a:ln/>
-        </p:spPr>
-        <p:txBody>
-          <a:bodyPr wrap="square" lIns="0" tIns="0" rIns="0" bIns="0" rtlCol="0" anchor="ctr"/>
-          <a:lstStyle/>
-          <a:p>
-            <a:pPr indent="0" marL="0">
-              <a:buNone/>
-            </a:pPr>
-            <a:r>
-              <a:rPr lang="en-US" sz="1650" i="1" dirty="0">
-                <a:solidFill>
-                  <a:srgbClr val="4A6B5D"/>
-                </a:solidFill>
-                <a:latin typeface="Georgia" pitchFamily="34" charset="0"/>
-                <a:ea typeface="Georgia" pitchFamily="34" charset="-122"/>
-                <a:cs typeface="Georgia" pitchFamily="34" charset="-120"/>
-              </a:rPr>
-              <a:t>Carries forward: the Component 3 music-promotion and documentary briefs in Grade 12 live or die on sound, and every C3 video task carries a mix.</a:t>
-            </a:r>
-            <a:endParaRPr lang="en-US" sz="1650" dirty="0"/>
-          </a:p>
-        </p:txBody>
-      </p:sp>
-      <p:sp>
-        <p:nvSpPr>
-          <p:cNvPr id="10" name="Shape 8"/>
-          <p:cNvSpPr/>
-          <p:nvPr/>
-        </p:nvSpPr>
-        <p:spPr>
-          <a:xfrm>
-            <a:off x="822960" y="6382512"/>
-            <a:ext cx="10543032" cy="0"/>
-          </a:xfrm>
-          <a:prstGeom prst="line">
-            <a:avLst/>
-          </a:prstGeom>
-          <a:noFill/>
           <a:ln w="9525">
             <a:solidFill>
               <a:srgbClr val="D9D4C4"/>
@@ -3007,16 +3145,40 @@
           </a:ln>
         </p:spPr>
       </p:sp>
-      <p:sp>
-        <p:nvSpPr>
-          <p:cNvPr id="11" name="Text 9"/>
-          <p:cNvSpPr/>
-          <p:nvPr/>
-        </p:nvSpPr>
-        <p:spPr>
-          <a:xfrm>
-            <a:off x="822960" y="6419088"/>
-            <a:ext cx="7315200" cy="274320"/>
+      <p:pic>
+        <p:nvPicPr>
+          <p:cNvPr id="6" name="Image 0" descr="/Users/dogan/Documents/Vaults/Courses/wiki/classes/media-studies/decks/_build/img/boom-operator.jpg">    </p:cNvPr>
+          <p:cNvPicPr>
+            <a:picLocks noChangeAspect="1"/>
+          </p:cNvPicPr>
+          <p:nvPr/>
+        </p:nvPicPr>
+        <p:blipFill>
+          <a:blip r:embed="rId1"/>
+          <a:stretch>
+            <a:fillRect/>
+          </a:stretch>
+        </p:blipFill>
+        <p:spPr>
+          <a:xfrm>
+            <a:off x="1298448" y="1225296"/>
+            <a:ext cx="5632704" cy="4224528"/>
+          </a:xfrm>
+          <a:prstGeom prst="rect">
+            <a:avLst/>
+          </a:prstGeom>
+        </p:spPr>
+      </p:pic>
+      <p:sp>
+        <p:nvSpPr>
+          <p:cNvPr id="7" name="Text 4"/>
+          <p:cNvSpPr/>
+          <p:nvPr/>
+        </p:nvSpPr>
+        <p:spPr>
+          <a:xfrm>
+            <a:off x="822960" y="5623560"/>
+            <a:ext cx="6583680" cy="274320"/>
           </a:xfrm>
           <a:prstGeom prst="rect">
             <a:avLst/>
@@ -3028,11 +3190,11 @@
           <a:bodyPr wrap="square" lIns="0" tIns="0" rIns="0" bIns="0" rtlCol="0" anchor="ctr"/>
           <a:lstStyle/>
           <a:p>
-            <a:pPr indent="0" marL="0">
-              <a:buNone/>
-            </a:pPr>
-            <a:r>
-              <a:rPr lang="en-US" sz="900" spc="150" kern="0" dirty="0">
+            <a:pPr algn="ctr" indent="0" marL="0">
+              <a:buNone/>
+            </a:pPr>
+            <a:r>
+              <a:rPr lang="en-US" sz="950" dirty="0">
                 <a:solidFill>
                   <a:srgbClr val="7A7F72"/>
                 </a:solidFill>
@@ -3040,6 +3202,195 @@
                 <a:ea typeface="Arial" pitchFamily="34" charset="-122"/>
                 <a:cs typeface="Arial" pitchFamily="34" charset="-120"/>
               </a:rPr>
+              <a:t>Two crew, one job each: the frame, and the sound. Photograph: Tri Vo, Unsplash</a:t>
+            </a:r>
+            <a:endParaRPr lang="en-US" sz="950" dirty="0"/>
+          </a:p>
+        </p:txBody>
+      </p:sp>
+      <p:sp>
+        <p:nvSpPr>
+          <p:cNvPr id="8" name="Text 5"/>
+          <p:cNvSpPr/>
+          <p:nvPr/>
+        </p:nvSpPr>
+        <p:spPr>
+          <a:xfrm>
+            <a:off x="7726680" y="1325880"/>
+            <a:ext cx="3657600" cy="1280160"/>
+          </a:xfrm>
+          <a:prstGeom prst="rect">
+            <a:avLst/>
+          </a:prstGeom>
+          <a:noFill/>
+          <a:ln/>
+        </p:spPr>
+        <p:txBody>
+          <a:bodyPr wrap="square" lIns="0" tIns="0" rIns="0" bIns="0" rtlCol="0" anchor="t"/>
+          <a:lstStyle/>
+          <a:p>
+            <a:pPr indent="0" marL="0">
+              <a:lnSpc>
+                <a:spcPts val="3400"/>
+              </a:lnSpc>
+              <a:buNone/>
+            </a:pPr>
+            <a:r>
+              <a:rPr lang="en-US" sz="2800" dirty="0">
+                <a:solidFill>
+                  <a:srgbClr val="24313F"/>
+                </a:solidFill>
+                <a:latin typeface="Georgia" pitchFamily="34" charset="0"/>
+                <a:ea typeface="Georgia" pitchFamily="34" charset="-122"/>
+                <a:cs typeface="Georgia" pitchFamily="34" charset="-120"/>
+              </a:rPr>
+              <a:t>Headphones on,</a:t>
+            </a:r>
+            <a:endParaRPr lang="en-US" sz="2800" dirty="0"/>
+          </a:p>
+          <a:p>
+            <a:pPr indent="0" marL="0">
+              <a:lnSpc>
+                <a:spcPts val="3400"/>
+              </a:lnSpc>
+              <a:buNone/>
+            </a:pPr>
+            <a:r>
+              <a:rPr lang="en-US" sz="2800" dirty="0">
+                <a:solidFill>
+                  <a:srgbClr val="24313F"/>
+                </a:solidFill>
+                <a:latin typeface="Georgia" pitchFamily="34" charset="0"/>
+                <a:ea typeface="Georgia" pitchFamily="34" charset="-122"/>
+                <a:cs typeface="Georgia" pitchFamily="34" charset="-120"/>
+              </a:rPr>
+              <a:t>mic close</a:t>
+            </a:r>
+            <a:endParaRPr lang="en-US" sz="2800" dirty="0"/>
+          </a:p>
+        </p:txBody>
+      </p:sp>
+      <p:sp>
+        <p:nvSpPr>
+          <p:cNvPr id="9" name="Shape 6"/>
+          <p:cNvSpPr/>
+          <p:nvPr/>
+        </p:nvSpPr>
+        <p:spPr>
+          <a:xfrm>
+            <a:off x="7726680" y="2697480"/>
+            <a:ext cx="3611880" cy="0"/>
+          </a:xfrm>
+          <a:prstGeom prst="line">
+            <a:avLst/>
+          </a:prstGeom>
+          <a:noFill/>
+          <a:ln w="9525">
+            <a:solidFill>
+              <a:srgbClr val="D9D4C4"/>
+            </a:solidFill>
+            <a:prstDash val="solid"/>
+          </a:ln>
+        </p:spPr>
+      </p:sp>
+      <p:sp>
+        <p:nvSpPr>
+          <p:cNvPr id="10" name="Text 7"/>
+          <p:cNvSpPr/>
+          <p:nvPr/>
+        </p:nvSpPr>
+        <p:spPr>
+          <a:xfrm>
+            <a:off x="7726680" y="2880360"/>
+            <a:ext cx="3657600" cy="2926080"/>
+          </a:xfrm>
+          <a:prstGeom prst="rect">
+            <a:avLst/>
+          </a:prstGeom>
+          <a:noFill/>
+          <a:ln/>
+        </p:spPr>
+        <p:txBody>
+          <a:bodyPr wrap="square" lIns="0" tIns="0" rIns="0" bIns="0" rtlCol="0" anchor="t"/>
+          <a:lstStyle/>
+          <a:p>
+            <a:pPr indent="0" marL="0">
+              <a:lnSpc>
+                <a:spcPts val="2000"/>
+              </a:lnSpc>
+              <a:buNone/>
+            </a:pPr>
+            <a:r>
+              <a:rPr lang="en-US" sz="1450" dirty="0">
+                <a:solidFill>
+                  <a:srgbClr val="24313F"/>
+                </a:solidFill>
+                <a:latin typeface="Georgia" pitchFamily="34" charset="0"/>
+                <a:ea typeface="Georgia" pitchFamily="34" charset="-122"/>
+                <a:cs typeface="Georgia" pitchFamily="34" charset="-120"/>
+              </a:rPr>
+              <a:t>The boom exists to buy distance: the mic rides just outside the frame, as close as the shot allows. On your shoots the phone is the mic, and the habit is identical: monitor on headphones, every take, and move the mic, not the gain.</a:t>
+            </a:r>
+            <a:endParaRPr lang="en-US" sz="1450" dirty="0"/>
+          </a:p>
+        </p:txBody>
+      </p:sp>
+      <p:sp>
+        <p:nvSpPr>
+          <p:cNvPr id="11" name="Shape 8"/>
+          <p:cNvSpPr/>
+          <p:nvPr/>
+        </p:nvSpPr>
+        <p:spPr>
+          <a:xfrm>
+            <a:off x="822960" y="6382512"/>
+            <a:ext cx="10543032" cy="0"/>
+          </a:xfrm>
+          <a:prstGeom prst="line">
+            <a:avLst/>
+          </a:prstGeom>
+          <a:noFill/>
+          <a:ln w="9525">
+            <a:solidFill>
+              <a:srgbClr val="D9D4C4"/>
+            </a:solidFill>
+            <a:prstDash val="solid"/>
+          </a:ln>
+        </p:spPr>
+      </p:sp>
+      <p:sp>
+        <p:nvSpPr>
+          <p:cNvPr id="12" name="Text 9"/>
+          <p:cNvSpPr/>
+          <p:nvPr/>
+        </p:nvSpPr>
+        <p:spPr>
+          <a:xfrm>
+            <a:off x="822960" y="6419088"/>
+            <a:ext cx="7315200" cy="274320"/>
+          </a:xfrm>
+          <a:prstGeom prst="rect">
+            <a:avLst/>
+          </a:prstGeom>
+          <a:noFill/>
+          <a:ln/>
+        </p:spPr>
+        <p:txBody>
+          <a:bodyPr wrap="square" lIns="0" tIns="0" rIns="0" bIns="0" rtlCol="0" anchor="ctr"/>
+          <a:lstStyle/>
+          <a:p>
+            <a:pPr indent="0" marL="0">
+              <a:buNone/>
+            </a:pPr>
+            <a:r>
+              <a:rPr lang="en-US" sz="900" spc="150" kern="0" dirty="0">
+                <a:solidFill>
+                  <a:srgbClr val="7A7F72"/>
+                </a:solidFill>
+                <a:latin typeface="Arial" pitchFamily="34" charset="0"/>
+                <a:ea typeface="Arial" pitchFamily="34" charset="-122"/>
+                <a:cs typeface="Arial" pitchFamily="34" charset="-120"/>
+              </a:rPr>
               <a:t>MEDIA STUDIES 9607 · SEMESTER I</a:t>
             </a:r>
             <a:endParaRPr lang="en-US" sz="900" dirty="0"/>
@@ -3048,7 +3399,7 @@
       </p:sp>
       <p:sp>
         <p:nvSpPr>
-          <p:cNvPr id="12" name="Text 10"/>
+          <p:cNvPr id="13" name="Text 10"/>
           <p:cNvSpPr/>
           <p:nvPr/>
         </p:nvSpPr>
@@ -3096,6 +3447,1110 @@
 <file path=ppt/slides/slide12.xml><?xml version="1.0" encoding="utf-8"?>
 <p:sld xmlns:a="http://schemas.openxmlformats.org/drawingml/2006/main" xmlns:r="http://schemas.openxmlformats.org/officeDocument/2006/relationships" xmlns:p="http://schemas.openxmlformats.org/presentationml/2006/main">
   <p:cSld name="Slide 12">
+    <p:bg>
+      <p:bgPr>
+        <a:solidFill>
+          <a:srgbClr val="FAF8F1"/>
+        </a:solidFill>
+      </p:bgPr>
+    </p:bg>
+    <p:spTree>
+      <p:nvGrpSpPr>
+        <p:cNvPr id="1" name=""/>
+        <p:cNvGrpSpPr/>
+        <p:nvPr/>
+      </p:nvGrpSpPr>
+      <p:grpSpPr>
+        <a:xfrm>
+          <a:off x="0" y="0"/>
+          <a:ext cx="0" cy="0"/>
+          <a:chOff x="0" y="0"/>
+          <a:chExt cx="0" cy="0"/>
+        </a:xfrm>
+      </p:grpSpPr>
+      <p:sp>
+        <p:nvSpPr>
+          <p:cNvPr id="2" name="Text 0"/>
+          <p:cNvSpPr/>
+          <p:nvPr/>
+        </p:nvSpPr>
+        <p:spPr>
+          <a:xfrm>
+            <a:off x="822960" y="457200"/>
+            <a:ext cx="6400800" cy="274320"/>
+          </a:xfrm>
+          <a:prstGeom prst="rect">
+            <a:avLst/>
+          </a:prstGeom>
+          <a:noFill/>
+          <a:ln/>
+        </p:spPr>
+        <p:txBody>
+          <a:bodyPr wrap="square" lIns="0" tIns="0" rIns="0" bIns="0" rtlCol="0" anchor="ctr"/>
+          <a:lstStyle/>
+          <a:p>
+            <a:pPr algn="l" indent="0" marL="0">
+              <a:buNone/>
+            </a:pPr>
+            <a:r>
+              <a:rPr lang="en-US" sz="1100" b="1" spc="250" kern="0" dirty="0">
+                <a:solidFill>
+                  <a:srgbClr val="4A6B5D"/>
+                </a:solidFill>
+                <a:latin typeface="Arial" pitchFamily="34" charset="0"/>
+                <a:ea typeface="Arial" pitchFamily="34" charset="-122"/>
+                <a:cs typeface="Arial" pitchFamily="34" charset="-120"/>
+              </a:rPr>
+              <a:t>DELIVERABLE · CS4</a:t>
+            </a:r>
+            <a:endParaRPr lang="en-US" sz="1100" dirty="0"/>
+          </a:p>
+        </p:txBody>
+      </p:sp>
+      <p:sp>
+        <p:nvSpPr>
+          <p:cNvPr id="3" name="Text 1"/>
+          <p:cNvSpPr/>
+          <p:nvPr/>
+        </p:nvSpPr>
+        <p:spPr>
+          <a:xfrm>
+            <a:off x="6793992" y="457200"/>
+            <a:ext cx="4572000" cy="274320"/>
+          </a:xfrm>
+          <a:prstGeom prst="rect">
+            <a:avLst/>
+          </a:prstGeom>
+          <a:noFill/>
+          <a:ln/>
+        </p:spPr>
+        <p:txBody>
+          <a:bodyPr wrap="square" lIns="0" tIns="0" rIns="0" bIns="0" rtlCol="0" anchor="ctr"/>
+          <a:lstStyle/>
+          <a:p>
+            <a:pPr algn="r" indent="0" marL="0">
+              <a:buNone/>
+            </a:pPr>
+            <a:r>
+              <a:rPr lang="en-US" sz="1100" b="1" spc="250" kern="0" dirty="0">
+                <a:solidFill>
+                  <a:srgbClr val="7A7F72"/>
+                </a:solidFill>
+                <a:latin typeface="Arial" pitchFamily="34" charset="0"/>
+                <a:ea typeface="Arial" pitchFamily="34" charset="-122"/>
+                <a:cs typeface="Arial" pitchFamily="34" charset="-120"/>
+              </a:rPr>
+              <a:t>FRIDAY, THIRTY MINUTES</a:t>
+            </a:r>
+            <a:endParaRPr lang="en-US" sz="1100" dirty="0"/>
+          </a:p>
+        </p:txBody>
+      </p:sp>
+      <p:sp>
+        <p:nvSpPr>
+          <p:cNvPr id="4" name="Shape 2"/>
+          <p:cNvSpPr/>
+          <p:nvPr/>
+        </p:nvSpPr>
+        <p:spPr>
+          <a:xfrm>
+            <a:off x="822960" y="786384"/>
+            <a:ext cx="10543032" cy="0"/>
+          </a:xfrm>
+          <a:prstGeom prst="line">
+            <a:avLst/>
+          </a:prstGeom>
+          <a:noFill/>
+          <a:ln w="9525">
+            <a:solidFill>
+              <a:srgbClr val="D9D4C4"/>
+            </a:solidFill>
+            <a:prstDash val="solid"/>
+          </a:ln>
+        </p:spPr>
+      </p:sp>
+      <p:sp>
+        <p:nvSpPr>
+          <p:cNvPr id="5" name="Text 3"/>
+          <p:cNvSpPr/>
+          <p:nvPr/>
+        </p:nvSpPr>
+        <p:spPr>
+          <a:xfrm>
+            <a:off x="822960" y="1051560"/>
+            <a:ext cx="6766560" cy="731520"/>
+          </a:xfrm>
+          <a:prstGeom prst="rect">
+            <a:avLst/>
+          </a:prstGeom>
+          <a:noFill/>
+          <a:ln/>
+        </p:spPr>
+        <p:txBody>
+          <a:bodyPr wrap="square" lIns="0" tIns="0" rIns="0" bIns="0" rtlCol="0" anchor="ctr"/>
+          <a:lstStyle/>
+          <a:p>
+            <a:pPr indent="0" marL="0">
+              <a:buNone/>
+            </a:pPr>
+            <a:r>
+              <a:rPr lang="en-US" sz="3000" dirty="0">
+                <a:solidFill>
+                  <a:srgbClr val="24313F"/>
+                </a:solidFill>
+                <a:latin typeface="Georgia" pitchFamily="34" charset="0"/>
+                <a:ea typeface="Georgia" pitchFamily="34" charset="-122"/>
+                <a:cs typeface="Georgia" pitchFamily="34" charset="-120"/>
+              </a:rPr>
+              <a:t>Thirty seconds of your own opening</a:t>
+            </a:r>
+            <a:endParaRPr lang="en-US" sz="3000" dirty="0"/>
+          </a:p>
+        </p:txBody>
+      </p:sp>
+      <p:sp>
+        <p:nvSpPr>
+          <p:cNvPr id="6" name="Shape 4"/>
+          <p:cNvSpPr/>
+          <p:nvPr/>
+        </p:nvSpPr>
+        <p:spPr>
+          <a:xfrm>
+            <a:off x="822960" y="1920240"/>
+            <a:ext cx="914400" cy="0"/>
+          </a:xfrm>
+          <a:prstGeom prst="line">
+            <a:avLst/>
+          </a:prstGeom>
+          <a:noFill/>
+          <a:ln w="31750">
+            <a:solidFill>
+              <a:srgbClr val="8C3A38"/>
+            </a:solidFill>
+            <a:prstDash val="solid"/>
+          </a:ln>
+        </p:spPr>
+      </p:sp>
+      <p:sp>
+        <p:nvSpPr>
+          <p:cNvPr id="7" name="Text 5"/>
+          <p:cNvSpPr/>
+          <p:nvPr/>
+        </p:nvSpPr>
+        <p:spPr>
+          <a:xfrm>
+            <a:off x="822960" y="2103120"/>
+            <a:ext cx="6675120" cy="731520"/>
+          </a:xfrm>
+          <a:prstGeom prst="rect">
+            <a:avLst/>
+          </a:prstGeom>
+          <a:noFill/>
+          <a:ln/>
+        </p:spPr>
+        <p:txBody>
+          <a:bodyPr wrap="square" lIns="0" tIns="0" rIns="0" bIns="0" rtlCol="0" anchor="t"/>
+          <a:lstStyle/>
+          <a:p>
+            <a:pPr indent="0" marL="0">
+              <a:lnSpc>
+                <a:spcPts val="2300"/>
+              </a:lnSpc>
+              <a:buNone/>
+            </a:pPr>
+            <a:r>
+              <a:rPr lang="en-US" sz="1650" dirty="0">
+                <a:solidFill>
+                  <a:srgbClr val="24313F"/>
+                </a:solidFill>
+                <a:latin typeface="Georgia" pitchFamily="34" charset="0"/>
+                <a:ea typeface="Georgia" pitchFamily="34" charset="-122"/>
+                <a:cs typeface="Georgia" pitchFamily="34" charset="-120"/>
+              </a:rPr>
+              <a:t>Built from your own recordings, the foley takes, and one non-diegetic element. Four things must be in it:</a:t>
+            </a:r>
+            <a:endParaRPr lang="en-US" sz="1650" dirty="0"/>
+          </a:p>
+        </p:txBody>
+      </p:sp>
+      <p:sp>
+        <p:nvSpPr>
+          <p:cNvPr id="8" name="Shape 6"/>
+          <p:cNvSpPr/>
+          <p:nvPr/>
+        </p:nvSpPr>
+        <p:spPr>
+          <a:xfrm>
+            <a:off x="822960" y="3017520"/>
+            <a:ext cx="292608" cy="292608"/>
+          </a:xfrm>
+          <a:prstGeom prst="rect">
+            <a:avLst/>
+          </a:prstGeom>
+          <a:solidFill>
+            <a:srgbClr val="A3C1AD"/>
+          </a:solidFill>
+          <a:ln/>
+        </p:spPr>
+      </p:sp>
+      <p:sp>
+        <p:nvSpPr>
+          <p:cNvPr id="9" name="Text 7"/>
+          <p:cNvSpPr/>
+          <p:nvPr/>
+        </p:nvSpPr>
+        <p:spPr>
+          <a:xfrm>
+            <a:off x="1325880" y="2953512"/>
+            <a:ext cx="6309360" cy="402336"/>
+          </a:xfrm>
+          <a:prstGeom prst="rect">
+            <a:avLst/>
+          </a:prstGeom>
+          <a:noFill/>
+          <a:ln/>
+        </p:spPr>
+        <p:txBody>
+          <a:bodyPr wrap="square" lIns="0" tIns="0" rIns="0" bIns="0" rtlCol="0" anchor="ctr"/>
+          <a:lstStyle/>
+          <a:p>
+            <a:pPr indent="0" marL="0">
+              <a:buNone/>
+            </a:pPr>
+            <a:r>
+              <a:rPr lang="en-US" sz="1600" dirty="0">
+                <a:solidFill>
+                  <a:srgbClr val="24313F"/>
+                </a:solidFill>
+                <a:latin typeface="Georgia" pitchFamily="34" charset="0"/>
+                <a:ea typeface="Georgia" pitchFamily="34" charset="-122"/>
+                <a:cs typeface="Georgia" pitchFamily="34" charset="-120"/>
+              </a:rPr>
+              <a:t>One clearly diegetic sound</a:t>
+            </a:r>
+            <a:endParaRPr lang="en-US" sz="1600" dirty="0"/>
+          </a:p>
+        </p:txBody>
+      </p:sp>
+      <p:sp>
+        <p:nvSpPr>
+          <p:cNvPr id="10" name="Shape 8"/>
+          <p:cNvSpPr/>
+          <p:nvPr/>
+        </p:nvSpPr>
+        <p:spPr>
+          <a:xfrm>
+            <a:off x="822960" y="3547872"/>
+            <a:ext cx="292608" cy="292608"/>
+          </a:xfrm>
+          <a:prstGeom prst="rect">
+            <a:avLst/>
+          </a:prstGeom>
+          <a:solidFill>
+            <a:srgbClr val="A3C1AD"/>
+          </a:solidFill>
+          <a:ln/>
+        </p:spPr>
+      </p:sp>
+      <p:sp>
+        <p:nvSpPr>
+          <p:cNvPr id="11" name="Text 9"/>
+          <p:cNvSpPr/>
+          <p:nvPr/>
+        </p:nvSpPr>
+        <p:spPr>
+          <a:xfrm>
+            <a:off x="1325880" y="3483864"/>
+            <a:ext cx="6309360" cy="402336"/>
+          </a:xfrm>
+          <a:prstGeom prst="rect">
+            <a:avLst/>
+          </a:prstGeom>
+          <a:noFill/>
+          <a:ln/>
+        </p:spPr>
+        <p:txBody>
+          <a:bodyPr wrap="square" lIns="0" tIns="0" rIns="0" bIns="0" rtlCol="0" anchor="ctr"/>
+          <a:lstStyle/>
+          <a:p>
+            <a:pPr indent="0" marL="0">
+              <a:buNone/>
+            </a:pPr>
+            <a:r>
+              <a:rPr lang="en-US" sz="1600" dirty="0">
+                <a:solidFill>
+                  <a:srgbClr val="24313F"/>
+                </a:solidFill>
+                <a:latin typeface="Georgia" pitchFamily="34" charset="0"/>
+                <a:ea typeface="Georgia" pitchFamily="34" charset="-122"/>
+                <a:cs typeface="Georgia" pitchFamily="34" charset="-120"/>
+              </a:rPr>
+              <a:t>One clearly non-diegetic</a:t>
+            </a:r>
+            <a:endParaRPr lang="en-US" sz="1600" dirty="0"/>
+          </a:p>
+        </p:txBody>
+      </p:sp>
+      <p:sp>
+        <p:nvSpPr>
+          <p:cNvPr id="12" name="Shape 10"/>
+          <p:cNvSpPr/>
+          <p:nvPr/>
+        </p:nvSpPr>
+        <p:spPr>
+          <a:xfrm>
+            <a:off x="822960" y="4078224"/>
+            <a:ext cx="292608" cy="292608"/>
+          </a:xfrm>
+          <a:prstGeom prst="rect">
+            <a:avLst/>
+          </a:prstGeom>
+          <a:solidFill>
+            <a:srgbClr val="A3C1AD"/>
+          </a:solidFill>
+          <a:ln/>
+        </p:spPr>
+      </p:sp>
+      <p:sp>
+        <p:nvSpPr>
+          <p:cNvPr id="13" name="Text 11"/>
+          <p:cNvSpPr/>
+          <p:nvPr/>
+        </p:nvSpPr>
+        <p:spPr>
+          <a:xfrm>
+            <a:off x="1325880" y="4014216"/>
+            <a:ext cx="6309360" cy="402336"/>
+          </a:xfrm>
+          <a:prstGeom prst="rect">
+            <a:avLst/>
+          </a:prstGeom>
+          <a:noFill/>
+          <a:ln/>
+        </p:spPr>
+        <p:txBody>
+          <a:bodyPr wrap="square" lIns="0" tIns="0" rIns="0" bIns="0" rtlCol="0" anchor="ctr"/>
+          <a:lstStyle/>
+          <a:p>
+            <a:pPr indent="0" marL="0">
+              <a:buNone/>
+            </a:pPr>
+            <a:r>
+              <a:rPr lang="en-US" sz="1600" dirty="0">
+                <a:solidFill>
+                  <a:srgbClr val="24313F"/>
+                </a:solidFill>
+                <a:latin typeface="Georgia" pitchFamily="34" charset="0"/>
+                <a:ea typeface="Georgia" pitchFamily="34" charset="-122"/>
+                <a:cs typeface="Georgia" pitchFamily="34" charset="-120"/>
+              </a:rPr>
+              <a:t>One with a near or far perspective</a:t>
+            </a:r>
+            <a:endParaRPr lang="en-US" sz="1600" dirty="0"/>
+          </a:p>
+        </p:txBody>
+      </p:sp>
+      <p:sp>
+        <p:nvSpPr>
+          <p:cNvPr id="14" name="Shape 12"/>
+          <p:cNvSpPr/>
+          <p:nvPr/>
+        </p:nvSpPr>
+        <p:spPr>
+          <a:xfrm>
+            <a:off x="822960" y="4608576"/>
+            <a:ext cx="292608" cy="292608"/>
+          </a:xfrm>
+          <a:prstGeom prst="rect">
+            <a:avLst/>
+          </a:prstGeom>
+          <a:solidFill>
+            <a:srgbClr val="A3C1AD"/>
+          </a:solidFill>
+          <a:ln/>
+        </p:spPr>
+      </p:sp>
+      <p:sp>
+        <p:nvSpPr>
+          <p:cNvPr id="15" name="Text 13"/>
+          <p:cNvSpPr/>
+          <p:nvPr/>
+        </p:nvSpPr>
+        <p:spPr>
+          <a:xfrm>
+            <a:off x="1325880" y="4544568"/>
+            <a:ext cx="6309360" cy="402336"/>
+          </a:xfrm>
+          <a:prstGeom prst="rect">
+            <a:avLst/>
+          </a:prstGeom>
+          <a:noFill/>
+          <a:ln/>
+        </p:spPr>
+        <p:txBody>
+          <a:bodyPr wrap="square" lIns="0" tIns="0" rIns="0" bIns="0" rtlCol="0" anchor="ctr"/>
+          <a:lstStyle/>
+          <a:p>
+            <a:pPr indent="0" marL="0">
+              <a:buNone/>
+            </a:pPr>
+            <a:r>
+              <a:rPr lang="en-US" sz="1600" dirty="0">
+                <a:solidFill>
+                  <a:srgbClr val="24313F"/>
+                </a:solidFill>
+                <a:latin typeface="Georgia" pitchFamily="34" charset="0"/>
+                <a:ea typeface="Georgia" pitchFamily="34" charset="-122"/>
+                <a:cs typeface="Georgia" pitchFamily="34" charset="-120"/>
+              </a:rPr>
+              <a:t>One carrying across an implied cut, as a bridge</a:t>
+            </a:r>
+            <a:endParaRPr lang="en-US" sz="1600" dirty="0"/>
+          </a:p>
+        </p:txBody>
+      </p:sp>
+      <p:sp>
+        <p:nvSpPr>
+          <p:cNvPr id="16" name="Text 14"/>
+          <p:cNvSpPr/>
+          <p:nvPr/>
+        </p:nvSpPr>
+        <p:spPr>
+          <a:xfrm>
+            <a:off x="822960" y="5257800"/>
+            <a:ext cx="6675120" cy="822960"/>
+          </a:xfrm>
+          <a:prstGeom prst="rect">
+            <a:avLst/>
+          </a:prstGeom>
+          <a:noFill/>
+          <a:ln/>
+        </p:spPr>
+        <p:txBody>
+          <a:bodyPr wrap="square" lIns="0" tIns="0" rIns="0" bIns="0" rtlCol="0" anchor="t"/>
+          <a:lstStyle/>
+          <a:p>
+            <a:pPr indent="0" marL="0">
+              <a:lnSpc>
+                <a:spcPts val="1600"/>
+              </a:lnSpc>
+              <a:buNone/>
+            </a:pPr>
+            <a:r>
+              <a:rPr lang="en-US" sz="1200" dirty="0">
+                <a:solidFill>
+                  <a:srgbClr val="7A7F72"/>
+                </a:solidFill>
+                <a:latin typeface="Arial" pitchFamily="34" charset="0"/>
+                <a:ea typeface="Arial" pitchFamily="34" charset="-122"/>
+                <a:cs typeface="Arial" pitchFamily="34" charset="-120"/>
+              </a:rPr>
+              <a:t>Posted and dated on the blog with a rationale naming every choice by its term and saying what it is meant to do to the listener. Marked on terminology and intention, not on polish.</a:t>
+            </a:r>
+            <a:endParaRPr lang="en-US" sz="1200" dirty="0"/>
+          </a:p>
+        </p:txBody>
+      </p:sp>
+      <p:sp>
+        <p:nvSpPr>
+          <p:cNvPr id="17" name="Shape 15"/>
+          <p:cNvSpPr/>
+          <p:nvPr/>
+        </p:nvSpPr>
+        <p:spPr>
+          <a:xfrm>
+            <a:off x="7452360" y="1097280"/>
+            <a:ext cx="3931920" cy="4297680"/>
+          </a:xfrm>
+          <a:prstGeom prst="rect">
+            <a:avLst/>
+          </a:prstGeom>
+          <a:solidFill>
+            <a:srgbClr val="FAF8F1"/>
+          </a:solidFill>
+          <a:ln w="9525">
+            <a:solidFill>
+              <a:srgbClr val="D9D4C4"/>
+            </a:solidFill>
+            <a:prstDash val="solid"/>
+          </a:ln>
+        </p:spPr>
+      </p:sp>
+      <p:pic>
+        <p:nvPicPr>
+          <p:cNvPr id="18" name="Image 0" descr="/Users/dogan/Documents/Vaults/Courses/wiki/classes/media-studies/decks/_build/img/cup-soundscape-gate.jpg">    </p:cNvPr>
+          <p:cNvPicPr>
+            <a:picLocks noChangeAspect="1"/>
+          </p:cNvPicPr>
+          <p:nvPr/>
+        </p:nvPicPr>
+        <p:blipFill>
+          <a:blip r:embed="rId1"/>
+          <a:stretch>
+            <a:fillRect/>
+          </a:stretch>
+        </p:blipFill>
+        <p:spPr>
+          <a:xfrm>
+            <a:off x="7580376" y="2020824"/>
+            <a:ext cx="3675888" cy="2450592"/>
+          </a:xfrm>
+          <a:prstGeom prst="rect">
+            <a:avLst/>
+          </a:prstGeom>
+        </p:spPr>
+      </p:pic>
+      <p:sp>
+        <p:nvSpPr>
+          <p:cNvPr id="19" name="Text 16"/>
+          <p:cNvSpPr/>
+          <p:nvPr/>
+        </p:nvSpPr>
+        <p:spPr>
+          <a:xfrm>
+            <a:off x="7452360" y="5440680"/>
+            <a:ext cx="3931920" cy="457200"/>
+          </a:xfrm>
+          <a:prstGeom prst="rect">
+            <a:avLst/>
+          </a:prstGeom>
+          <a:noFill/>
+          <a:ln/>
+        </p:spPr>
+        <p:txBody>
+          <a:bodyPr wrap="square" lIns="0" tIns="0" rIns="0" bIns="0" rtlCol="0" anchor="t"/>
+          <a:lstStyle/>
+          <a:p>
+            <a:pPr algn="ctr" indent="0" marL="0">
+              <a:lnSpc>
+                <a:spcPts val="1300"/>
+              </a:lnSpc>
+              <a:buNone/>
+            </a:pPr>
+            <a:r>
+              <a:rPr lang="en-US" sz="1000" dirty="0">
+                <a:solidFill>
+                  <a:srgbClr val="7A7F72"/>
+                </a:solidFill>
+                <a:latin typeface="Arial" pitchFamily="34" charset="0"/>
+                <a:ea typeface="Arial" pitchFamily="34" charset="-122"/>
+                <a:cs typeface="Arial" pitchFamily="34" charset="-120"/>
+              </a:rPr>
+              <a:t>Design the soundscape for this frame: the brief's own image (CUP Teacher's Resource)</a:t>
+            </a:r>
+            <a:endParaRPr lang="en-US" sz="1000" dirty="0"/>
+          </a:p>
+        </p:txBody>
+      </p:sp>
+      <p:sp>
+        <p:nvSpPr>
+          <p:cNvPr id="20" name="Shape 17"/>
+          <p:cNvSpPr/>
+          <p:nvPr/>
+        </p:nvSpPr>
+        <p:spPr>
+          <a:xfrm>
+            <a:off x="822960" y="6382512"/>
+            <a:ext cx="10543032" cy="0"/>
+          </a:xfrm>
+          <a:prstGeom prst="line">
+            <a:avLst/>
+          </a:prstGeom>
+          <a:noFill/>
+          <a:ln w="9525">
+            <a:solidFill>
+              <a:srgbClr val="D9D4C4"/>
+            </a:solidFill>
+            <a:prstDash val="solid"/>
+          </a:ln>
+        </p:spPr>
+      </p:sp>
+      <p:sp>
+        <p:nvSpPr>
+          <p:cNvPr id="21" name="Text 18"/>
+          <p:cNvSpPr/>
+          <p:nvPr/>
+        </p:nvSpPr>
+        <p:spPr>
+          <a:xfrm>
+            <a:off x="822960" y="6419088"/>
+            <a:ext cx="7315200" cy="274320"/>
+          </a:xfrm>
+          <a:prstGeom prst="rect">
+            <a:avLst/>
+          </a:prstGeom>
+          <a:noFill/>
+          <a:ln/>
+        </p:spPr>
+        <p:txBody>
+          <a:bodyPr wrap="square" lIns="0" tIns="0" rIns="0" bIns="0" rtlCol="0" anchor="ctr"/>
+          <a:lstStyle/>
+          <a:p>
+            <a:pPr indent="0" marL="0">
+              <a:buNone/>
+            </a:pPr>
+            <a:r>
+              <a:rPr lang="en-US" sz="900" spc="150" kern="0" dirty="0">
+                <a:solidFill>
+                  <a:srgbClr val="7A7F72"/>
+                </a:solidFill>
+                <a:latin typeface="Arial" pitchFamily="34" charset="0"/>
+                <a:ea typeface="Arial" pitchFamily="34" charset="-122"/>
+                <a:cs typeface="Arial" pitchFamily="34" charset="-120"/>
+              </a:rPr>
+              <a:t>MEDIA STUDIES 9607 · SEMESTER I</a:t>
+            </a:r>
+            <a:endParaRPr lang="en-US" sz="900" dirty="0"/>
+          </a:p>
+        </p:txBody>
+      </p:sp>
+      <p:sp>
+        <p:nvSpPr>
+          <p:cNvPr id="22" name="Text 19"/>
+          <p:cNvSpPr/>
+          <p:nvPr/>
+        </p:nvSpPr>
+        <p:spPr>
+          <a:xfrm>
+            <a:off x="10268712" y="6355080"/>
+            <a:ext cx="1097280" cy="365760"/>
+          </a:xfrm>
+          <a:prstGeom prst="rect">
+            <a:avLst/>
+          </a:prstGeom>
+          <a:noFill/>
+          <a:ln/>
+        </p:spPr>
+        <p:txBody>
+          <a:bodyPr wrap="square" lIns="0" tIns="0" rIns="0" bIns="0" rtlCol="0" anchor="ctr"/>
+          <a:lstStyle/>
+          <a:p>
+            <a:pPr algn="r" indent="0" marL="0">
+              <a:buNone/>
+            </a:pPr>
+            <a:r>
+              <a:rPr lang="en-US" sz="1600" dirty="0">
+                <a:solidFill>
+                  <a:srgbClr val="A3C1AD"/>
+                </a:solidFill>
+                <a:latin typeface="Georgia" pitchFamily="34" charset="0"/>
+                <a:ea typeface="Georgia" pitchFamily="34" charset="-122"/>
+                <a:cs typeface="Georgia" pitchFamily="34" charset="-120"/>
+              </a:rPr>
+              <a:t>07</a:t>
+            </a:r>
+            <a:endParaRPr lang="en-US" sz="1600" dirty="0"/>
+          </a:p>
+        </p:txBody>
+      </p:sp>
+    </p:spTree>
+  </p:cSld>
+  <p:clrMapOvr>
+    <a:masterClrMapping/>
+  </p:clrMapOvr>
+</p:sld>
+</file>
+
+<file path=ppt/slides/slide13.xml><?xml version="1.0" encoding="utf-8"?>
+<p:sld xmlns:a="http://schemas.openxmlformats.org/drawingml/2006/main" xmlns:r="http://schemas.openxmlformats.org/officeDocument/2006/relationships" xmlns:p="http://schemas.openxmlformats.org/presentationml/2006/main">
+  <p:cSld name="Slide 13">
+    <p:bg>
+      <p:bgPr>
+        <a:solidFill>
+          <a:srgbClr val="FAF8F1"/>
+        </a:solidFill>
+      </p:bgPr>
+    </p:bg>
+    <p:spTree>
+      <p:nvGrpSpPr>
+        <p:cNvPr id="1" name=""/>
+        <p:cNvGrpSpPr/>
+        <p:nvPr/>
+      </p:nvGrpSpPr>
+      <p:grpSpPr>
+        <a:xfrm>
+          <a:off x="0" y="0"/>
+          <a:ext cx="0" cy="0"/>
+          <a:chOff x="0" y="0"/>
+          <a:chExt cx="0" cy="0"/>
+        </a:xfrm>
+      </p:grpSpPr>
+      <p:sp>
+        <p:nvSpPr>
+          <p:cNvPr id="2" name="Text 0"/>
+          <p:cNvSpPr/>
+          <p:nvPr/>
+        </p:nvSpPr>
+        <p:spPr>
+          <a:xfrm>
+            <a:off x="822960" y="457200"/>
+            <a:ext cx="6400800" cy="274320"/>
+          </a:xfrm>
+          <a:prstGeom prst="rect">
+            <a:avLst/>
+          </a:prstGeom>
+          <a:noFill/>
+          <a:ln/>
+        </p:spPr>
+        <p:txBody>
+          <a:bodyPr wrap="square" lIns="0" tIns="0" rIns="0" bIns="0" rtlCol="0" anchor="ctr"/>
+          <a:lstStyle/>
+          <a:p>
+            <a:pPr algn="l" indent="0" marL="0">
+              <a:buNone/>
+            </a:pPr>
+            <a:r>
+              <a:rPr lang="en-US" sz="1100" b="1" spc="250" kern="0" dirty="0">
+                <a:solidFill>
+                  <a:srgbClr val="4A6B5D"/>
+                </a:solidFill>
+                <a:latin typeface="Arial" pitchFamily="34" charset="0"/>
+                <a:ea typeface="Arial" pitchFamily="34" charset="-122"/>
+                <a:cs typeface="Arial" pitchFamily="34" charset="-120"/>
+              </a:rPr>
+              <a:t>WHY SOUND PAYS MORE THAN THE REST</a:t>
+            </a:r>
+            <a:endParaRPr lang="en-US" sz="1100" dirty="0"/>
+          </a:p>
+        </p:txBody>
+      </p:sp>
+      <p:sp>
+        <p:nvSpPr>
+          <p:cNvPr id="3" name="Text 1"/>
+          <p:cNvSpPr/>
+          <p:nvPr/>
+        </p:nvSpPr>
+        <p:spPr>
+          <a:xfrm>
+            <a:off x="6793992" y="457200"/>
+            <a:ext cx="4572000" cy="274320"/>
+          </a:xfrm>
+          <a:prstGeom prst="rect">
+            <a:avLst/>
+          </a:prstGeom>
+          <a:noFill/>
+          <a:ln/>
+        </p:spPr>
+        <p:txBody>
+          <a:bodyPr wrap="square" lIns="0" tIns="0" rIns="0" bIns="0" rtlCol="0" anchor="ctr"/>
+          <a:lstStyle/>
+          <a:p>
+            <a:pPr algn="r" indent="0" marL="0">
+              <a:buNone/>
+            </a:pPr>
+            <a:r>
+              <a:rPr lang="en-US" sz="1100" b="1" spc="250" kern="0" dirty="0">
+                <a:solidFill>
+                  <a:srgbClr val="7A7F72"/>
+                </a:solidFill>
+                <a:latin typeface="Arial" pitchFamily="34" charset="0"/>
+                <a:ea typeface="Arial" pitchFamily="34" charset="-122"/>
+                <a:cs typeface="Arial" pitchFamily="34" charset="-120"/>
+              </a:rPr>
+              <a:t>NEGLECT IS AN OPPORTUNITY</a:t>
+            </a:r>
+            <a:endParaRPr lang="en-US" sz="1100" dirty="0"/>
+          </a:p>
+        </p:txBody>
+      </p:sp>
+      <p:sp>
+        <p:nvSpPr>
+          <p:cNvPr id="4" name="Shape 2"/>
+          <p:cNvSpPr/>
+          <p:nvPr/>
+        </p:nvSpPr>
+        <p:spPr>
+          <a:xfrm>
+            <a:off x="822960" y="786384"/>
+            <a:ext cx="10543032" cy="0"/>
+          </a:xfrm>
+          <a:prstGeom prst="line">
+            <a:avLst/>
+          </a:prstGeom>
+          <a:noFill/>
+          <a:ln w="9525">
+            <a:solidFill>
+              <a:srgbClr val="D9D4C4"/>
+            </a:solidFill>
+            <a:prstDash val="solid"/>
+          </a:ln>
+        </p:spPr>
+      </p:sp>
+      <p:sp>
+        <p:nvSpPr>
+          <p:cNvPr id="5" name="Text 3"/>
+          <p:cNvSpPr/>
+          <p:nvPr/>
+        </p:nvSpPr>
+        <p:spPr>
+          <a:xfrm>
+            <a:off x="822960" y="1097280"/>
+            <a:ext cx="10543032" cy="822960"/>
+          </a:xfrm>
+          <a:prstGeom prst="rect">
+            <a:avLst/>
+          </a:prstGeom>
+          <a:noFill/>
+          <a:ln/>
+        </p:spPr>
+        <p:txBody>
+          <a:bodyPr wrap="square" lIns="0" tIns="0" rIns="0" bIns="0" rtlCol="0" anchor="ctr"/>
+          <a:lstStyle/>
+          <a:p>
+            <a:pPr indent="0" marL="0">
+              <a:buNone/>
+            </a:pPr>
+            <a:r>
+              <a:rPr lang="en-US" sz="3600" dirty="0">
+                <a:solidFill>
+                  <a:srgbClr val="24313F"/>
+                </a:solidFill>
+                <a:latin typeface="Georgia" pitchFamily="34" charset="0"/>
+                <a:ea typeface="Georgia" pitchFamily="34" charset="-122"/>
+                <a:cs typeface="Georgia" pitchFamily="34" charset="-120"/>
+              </a:rPr>
+              <a:t>The cheapest advantage in the course</a:t>
+            </a:r>
+            <a:endParaRPr lang="en-US" sz="3600" dirty="0"/>
+          </a:p>
+        </p:txBody>
+      </p:sp>
+      <p:sp>
+        <p:nvSpPr>
+          <p:cNvPr id="6" name="Shape 4"/>
+          <p:cNvSpPr/>
+          <p:nvPr/>
+        </p:nvSpPr>
+        <p:spPr>
+          <a:xfrm>
+            <a:off x="822960" y="2194560"/>
+            <a:ext cx="914400" cy="0"/>
+          </a:xfrm>
+          <a:prstGeom prst="line">
+            <a:avLst/>
+          </a:prstGeom>
+          <a:noFill/>
+          <a:ln w="31750">
+            <a:solidFill>
+              <a:srgbClr val="8C3A38"/>
+            </a:solidFill>
+            <a:prstDash val="solid"/>
+          </a:ln>
+        </p:spPr>
+      </p:sp>
+      <p:sp>
+        <p:nvSpPr>
+          <p:cNvPr id="7" name="Text 5"/>
+          <p:cNvSpPr/>
+          <p:nvPr/>
+        </p:nvSpPr>
+        <p:spPr>
+          <a:xfrm>
+            <a:off x="822960" y="2468880"/>
+            <a:ext cx="10058400" cy="1737360"/>
+          </a:xfrm>
+          <a:prstGeom prst="rect">
+            <a:avLst/>
+          </a:prstGeom>
+          <a:noFill/>
+          <a:ln/>
+        </p:spPr>
+        <p:txBody>
+          <a:bodyPr wrap="square" lIns="0" tIns="0" rIns="0" bIns="0" rtlCol="0" anchor="t"/>
+          <a:lstStyle/>
+          <a:p>
+            <a:pPr indent="0" marL="0">
+              <a:lnSpc>
+                <a:spcPts val="2700"/>
+              </a:lnSpc>
+              <a:buNone/>
+            </a:pPr>
+            <a:r>
+              <a:rPr lang="en-US" sz="1900" dirty="0">
+                <a:solidFill>
+                  <a:srgbClr val="24313F"/>
+                </a:solidFill>
+                <a:latin typeface="Georgia" pitchFamily="34" charset="0"/>
+                <a:ea typeface="Georgia" pitchFamily="34" charset="-122"/>
+                <a:cs typeface="Georgia" pitchFamily="34" charset="-120"/>
+              </a:rPr>
+              <a:t>Cambridge says candidates neglect sound. That is a statement about the field you are marked against. A script that reads camera brilliantly and never mentions sound has a coverage gap the examiner sees immediately. A script that names a sound bridge, or a shift in sound perspective, has almost always outperformed the scripts beside it.</a:t>
+            </a:r>
+            <a:endParaRPr lang="en-US" sz="1900" dirty="0"/>
+          </a:p>
+        </p:txBody>
+      </p:sp>
+      <p:sp>
+        <p:nvSpPr>
+          <p:cNvPr id="8" name="Shape 6"/>
+          <p:cNvSpPr/>
+          <p:nvPr/>
+        </p:nvSpPr>
+        <p:spPr>
+          <a:xfrm>
+            <a:off x="822960" y="4434840"/>
+            <a:ext cx="10543032" cy="914400"/>
+          </a:xfrm>
+          <a:prstGeom prst="rect">
+            <a:avLst/>
+          </a:prstGeom>
+          <a:solidFill>
+            <a:srgbClr val="E8EFE7"/>
+          </a:solidFill>
+          <a:ln/>
+        </p:spPr>
+      </p:sp>
+      <p:sp>
+        <p:nvSpPr>
+          <p:cNvPr id="9" name="Text 7"/>
+          <p:cNvSpPr/>
+          <p:nvPr/>
+        </p:nvSpPr>
+        <p:spPr>
+          <a:xfrm>
+            <a:off x="1097280" y="4526280"/>
+            <a:ext cx="9994392" cy="731520"/>
+          </a:xfrm>
+          <a:prstGeom prst="rect">
+            <a:avLst/>
+          </a:prstGeom>
+          <a:noFill/>
+          <a:ln/>
+        </p:spPr>
+        <p:txBody>
+          <a:bodyPr wrap="square" lIns="0" tIns="0" rIns="0" bIns="0" rtlCol="0" anchor="ctr"/>
+          <a:lstStyle/>
+          <a:p>
+            <a:pPr indent="0" marL="0">
+              <a:buNone/>
+            </a:pPr>
+            <a:r>
+              <a:rPr lang="en-US" sz="1650" i="1" dirty="0">
+                <a:solidFill>
+                  <a:srgbClr val="4A6B5D"/>
+                </a:solidFill>
+                <a:latin typeface="Georgia" pitchFamily="34" charset="0"/>
+                <a:ea typeface="Georgia" pitchFamily="34" charset="-122"/>
+                <a:cs typeface="Georgia" pitchFamily="34" charset="-120"/>
+              </a:rPr>
+              <a:t>Carries forward: the Component 3 music-promotion and documentary briefs in Grade 12 live or die on sound, and every C3 video task carries a mix.</a:t>
+            </a:r>
+            <a:endParaRPr lang="en-US" sz="1650" dirty="0"/>
+          </a:p>
+        </p:txBody>
+      </p:sp>
+      <p:sp>
+        <p:nvSpPr>
+          <p:cNvPr id="10" name="Shape 8"/>
+          <p:cNvSpPr/>
+          <p:nvPr/>
+        </p:nvSpPr>
+        <p:spPr>
+          <a:xfrm>
+            <a:off x="822960" y="6382512"/>
+            <a:ext cx="10543032" cy="0"/>
+          </a:xfrm>
+          <a:prstGeom prst="line">
+            <a:avLst/>
+          </a:prstGeom>
+          <a:noFill/>
+          <a:ln w="9525">
+            <a:solidFill>
+              <a:srgbClr val="D9D4C4"/>
+            </a:solidFill>
+            <a:prstDash val="solid"/>
+          </a:ln>
+        </p:spPr>
+      </p:sp>
+      <p:sp>
+        <p:nvSpPr>
+          <p:cNvPr id="11" name="Text 9"/>
+          <p:cNvSpPr/>
+          <p:nvPr/>
+        </p:nvSpPr>
+        <p:spPr>
+          <a:xfrm>
+            <a:off x="822960" y="6419088"/>
+            <a:ext cx="7315200" cy="274320"/>
+          </a:xfrm>
+          <a:prstGeom prst="rect">
+            <a:avLst/>
+          </a:prstGeom>
+          <a:noFill/>
+          <a:ln/>
+        </p:spPr>
+        <p:txBody>
+          <a:bodyPr wrap="square" lIns="0" tIns="0" rIns="0" bIns="0" rtlCol="0" anchor="ctr"/>
+          <a:lstStyle/>
+          <a:p>
+            <a:pPr indent="0" marL="0">
+              <a:buNone/>
+            </a:pPr>
+            <a:r>
+              <a:rPr lang="en-US" sz="900" spc="150" kern="0" dirty="0">
+                <a:solidFill>
+                  <a:srgbClr val="7A7F72"/>
+                </a:solidFill>
+                <a:latin typeface="Arial" pitchFamily="34" charset="0"/>
+                <a:ea typeface="Arial" pitchFamily="34" charset="-122"/>
+                <a:cs typeface="Arial" pitchFamily="34" charset="-120"/>
+              </a:rPr>
+              <a:t>MEDIA STUDIES 9607 · SEMESTER I</a:t>
+            </a:r>
+            <a:endParaRPr lang="en-US" sz="900" dirty="0"/>
+          </a:p>
+        </p:txBody>
+      </p:sp>
+      <p:sp>
+        <p:nvSpPr>
+          <p:cNvPr id="12" name="Text 10"/>
+          <p:cNvSpPr/>
+          <p:nvPr/>
+        </p:nvSpPr>
+        <p:spPr>
+          <a:xfrm>
+            <a:off x="10268712" y="6355080"/>
+            <a:ext cx="1097280" cy="365760"/>
+          </a:xfrm>
+          <a:prstGeom prst="rect">
+            <a:avLst/>
+          </a:prstGeom>
+          <a:noFill/>
+          <a:ln/>
+        </p:spPr>
+        <p:txBody>
+          <a:bodyPr wrap="square" lIns="0" tIns="0" rIns="0" bIns="0" rtlCol="0" anchor="ctr"/>
+          <a:lstStyle/>
+          <a:p>
+            <a:pPr algn="r" indent="0" marL="0">
+              <a:buNone/>
+            </a:pPr>
+            <a:r>
+              <a:rPr lang="en-US" sz="1600" dirty="0">
+                <a:solidFill>
+                  <a:srgbClr val="A3C1AD"/>
+                </a:solidFill>
+                <a:latin typeface="Georgia" pitchFamily="34" charset="0"/>
+                <a:ea typeface="Georgia" pitchFamily="34" charset="-122"/>
+                <a:cs typeface="Georgia" pitchFamily="34" charset="-120"/>
+              </a:rPr>
+              <a:t>08</a:t>
+            </a:r>
+            <a:endParaRPr lang="en-US" sz="1600" dirty="0"/>
+          </a:p>
+        </p:txBody>
+      </p:sp>
+    </p:spTree>
+  </p:cSld>
+  <p:clrMapOvr>
+    <a:masterClrMapping/>
+  </p:clrMapOvr>
+</p:sld>
+</file>
+
+<file path=ppt/slides/slide14.xml><?xml version="1.0" encoding="utf-8"?>
+<p:sld xmlns:a="http://schemas.openxmlformats.org/drawingml/2006/main" xmlns:r="http://schemas.openxmlformats.org/officeDocument/2006/relationships" xmlns:p="http://schemas.openxmlformats.org/presentationml/2006/main">
+  <p:cSld name="Slide 14">
     <p:bg>
       <p:bgPr>
         <a:solidFill>
@@ -3358,7 +4813,7 @@
                 <a:ea typeface="Georgia" pitchFamily="34" charset="-122"/>
                 <a:cs typeface="Georgia" pitchFamily="34" charset="-120"/>
               </a:rPr>
-              <a:t>07</a:t>
+              <a:t>09</a:t>
             </a:r>
             <a:endParaRPr lang="en-US" sz="1600" dirty="0"/>
           </a:p>
@@ -4417,12 +5872,12 @@
           <a:p>
             <a:pPr indent="0" marL="0">
               <a:lnSpc>
-                <a:spcPts val="4400"/>
+                <a:spcPts val="4200"/>
               </a:lnSpc>
               <a:buNone/>
             </a:pPr>
             <a:r>
-              <a:rPr lang="en-US" sz="3400" dirty="0">
+              <a:rPr lang="en-US" sz="3000" dirty="0">
                 <a:solidFill>
                   <a:srgbClr val="24313F"/>
                 </a:solidFill>
@@ -4430,9 +5885,9 @@
                 <a:ea typeface="Georgia" pitchFamily="34" charset="-122"/>
                 <a:cs typeface="Georgia" pitchFamily="34" charset="-120"/>
               </a:rPr>
-              <a:t>Sound is often neglected, so it is worth doing some targeted work on this, helping learners to develop a vocabulary of sound terminology.</a:t>
-            </a:r>
-            <a:endParaRPr lang="en-US" sz="3400" dirty="0"/>
+              <a:t>Sound is often neglected ... it is worth doing some targeted work on this, in particularly helping learners to develop a vocabulary of sound terminology.</a:t>
+            </a:r>
+            <a:endParaRPr lang="en-US" sz="3000" dirty="0"/>
           </a:p>
         </p:txBody>
       </p:sp>
@@ -4492,7 +5947,7 @@
                 <a:ea typeface="Arial" pitchFamily="34" charset="-122"/>
                 <a:cs typeface="Arial" pitchFamily="34" charset="-120"/>
               </a:rPr>
-              <a:t>Cambridge Scheme of Work, Component 2 Section A</a:t>
+              <a:t>Cambridge Scheme of Work (2021), Component 2 Section A</a:t>
             </a:r>
             <a:endParaRPr lang="en-US" sz="1400" dirty="0"/>
           </a:p>
@@ -5160,7 +6615,7 @@
                 <a:ea typeface="Georgia" pitchFamily="34" charset="-122"/>
                 <a:cs typeface="Georgia" pitchFamily="34" charset="-120"/>
               </a:rPr>
-              <a:t>themes and stings</a:t>
+              <a:t>themes and stings  ·  sound effects</a:t>
             </a:r>
             <a:endParaRPr lang="en-US" sz="1800" dirty="0"/>
           </a:p>
@@ -5364,9 +6819,135 @@
           <a:chExt cx="0" cy="0"/>
         </a:xfrm>
       </p:grpSpPr>
+      <p:sp>
+        <p:nvSpPr>
+          <p:cNvPr id="2" name="Text 0"/>
+          <p:cNvSpPr/>
+          <p:nvPr/>
+        </p:nvSpPr>
+        <p:spPr>
+          <a:xfrm>
+            <a:off x="822960" y="457200"/>
+            <a:ext cx="6400800" cy="274320"/>
+          </a:xfrm>
+          <a:prstGeom prst="rect">
+            <a:avLst/>
+          </a:prstGeom>
+          <a:noFill/>
+          <a:ln/>
+        </p:spPr>
+        <p:txBody>
+          <a:bodyPr wrap="square" lIns="0" tIns="0" rIns="0" bIns="0" rtlCol="0" anchor="ctr"/>
+          <a:lstStyle/>
+          <a:p>
+            <a:pPr algn="l" indent="0" marL="0">
+              <a:buNone/>
+            </a:pPr>
+            <a:r>
+              <a:rPr lang="en-US" sz="1100" b="1" spc="250" kern="0" dirty="0">
+                <a:solidFill>
+                  <a:srgbClr val="4A6B5D"/>
+                </a:solidFill>
+                <a:latin typeface="Arial" pitchFamily="34" charset="0"/>
+                <a:ea typeface="Arial" pitchFamily="34" charset="-122"/>
+                <a:cs typeface="Arial" pitchFamily="34" charset="-120"/>
+              </a:rPr>
+              <a:t>THE SOUND MOTIF</a:t>
+            </a:r>
+            <a:endParaRPr lang="en-US" sz="1100" dirty="0"/>
+          </a:p>
+        </p:txBody>
+      </p:sp>
+      <p:sp>
+        <p:nvSpPr>
+          <p:cNvPr id="3" name="Text 1"/>
+          <p:cNvSpPr/>
+          <p:nvPr/>
+        </p:nvSpPr>
+        <p:spPr>
+          <a:xfrm>
+            <a:off x="6793992" y="457200"/>
+            <a:ext cx="4572000" cy="274320"/>
+          </a:xfrm>
+          <a:prstGeom prst="rect">
+            <a:avLst/>
+          </a:prstGeom>
+          <a:noFill/>
+          <a:ln/>
+        </p:spPr>
+        <p:txBody>
+          <a:bodyPr wrap="square" lIns="0" tIns="0" rIns="0" bIns="0" rtlCol="0" anchor="ctr"/>
+          <a:lstStyle/>
+          <a:p>
+            <a:pPr algn="r" indent="0" marL="0">
+              <a:buNone/>
+            </a:pPr>
+            <a:r>
+              <a:rPr lang="en-US" sz="1100" b="1" spc="250" kern="0" dirty="0">
+                <a:solidFill>
+                  <a:srgbClr val="7A7F72"/>
+                </a:solidFill>
+                <a:latin typeface="Arial" pitchFamily="34" charset="0"/>
+                <a:ea typeface="Arial" pitchFamily="34" charset="-122"/>
+                <a:cs typeface="Arial" pitchFamily="34" charset="-120"/>
+              </a:rPr>
+              <a:t>TWO NOTES, AND YOU KNOW</a:t>
+            </a:r>
+            <a:endParaRPr lang="en-US" sz="1100" dirty="0"/>
+          </a:p>
+        </p:txBody>
+      </p:sp>
+      <p:sp>
+        <p:nvSpPr>
+          <p:cNvPr id="4" name="Shape 2"/>
+          <p:cNvSpPr/>
+          <p:nvPr/>
+        </p:nvSpPr>
+        <p:spPr>
+          <a:xfrm>
+            <a:off x="822960" y="786384"/>
+            <a:ext cx="10543032" cy="0"/>
+          </a:xfrm>
+          <a:prstGeom prst="line">
+            <a:avLst/>
+          </a:prstGeom>
+          <a:noFill/>
+          <a:ln w="9525">
+            <a:solidFill>
+              <a:srgbClr val="D9D4C4"/>
+            </a:solidFill>
+            <a:prstDash val="solid"/>
+          </a:ln>
+        </p:spPr>
+      </p:sp>
+      <p:sp>
+        <p:nvSpPr>
+          <p:cNvPr id="5" name="Shape 3"/>
+          <p:cNvSpPr/>
+          <p:nvPr/>
+        </p:nvSpPr>
+        <p:spPr>
+          <a:xfrm>
+            <a:off x="822960" y="1051560"/>
+            <a:ext cx="10543032" cy="3063240"/>
+          </a:xfrm>
+          <a:prstGeom prst="rect">
+            <a:avLst/>
+          </a:prstGeom>
+          <a:solidFill>
+            <a:srgbClr val="FAF8F1"/>
+          </a:solidFill>
+          <a:ln w="9525">
+            <a:solidFill>
+              <a:srgbClr val="D9D4C4"/>
+            </a:solidFill>
+            <a:prstDash val="solid"/>
+          </a:ln>
+        </p:spPr>
+      </p:sp>
       <p:pic>
         <p:nvPicPr>
-          <p:cNvPr id="2" name="Image 0" descr="/Users/dogan/Documents/Vaults/Courses/wiki/classes/media-studies/decks/_build/img/crops/foley-room_a664.jpg">    </p:cNvPr>
+          <p:cNvPr id="6" name="Image 0" descr="/Users/dogan/Documents/Vaults/Courses/wiki/classes/media-studies/decks/_build/img/jaws-fin.jpg">    </p:cNvPr>
           <p:cNvPicPr>
             <a:picLocks noChangeAspect="1"/>
           </p:cNvPicPr>
@@ -5380,8 +6961,8 @@
         </p:blipFill>
         <p:spPr>
           <a:xfrm>
-            <a:off x="7635240" y="0"/>
-            <a:ext cx="4553712" cy="6858000"/>
+            <a:off x="2770151" y="1179576"/>
+            <a:ext cx="6648651" cy="2807208"/>
           </a:xfrm>
           <a:prstGeom prst="rect">
             <a:avLst/>
@@ -5390,14 +6971,14 @@
       </p:pic>
       <p:sp>
         <p:nvSpPr>
-          <p:cNvPr id="3" name="Text 0"/>
-          <p:cNvSpPr/>
-          <p:nvPr/>
-        </p:nvSpPr>
-        <p:spPr>
-          <a:xfrm>
-            <a:off x="822960" y="822960"/>
-            <a:ext cx="6400800" cy="274320"/>
+          <p:cNvPr id="7" name="Text 4"/>
+          <p:cNvSpPr/>
+          <p:nvPr/>
+        </p:nvSpPr>
+        <p:spPr>
+          <a:xfrm>
+            <a:off x="822960" y="4133088"/>
+            <a:ext cx="10543032" cy="274320"/>
           </a:xfrm>
           <a:prstGeom prst="rect">
             <a:avLst/>
@@ -5409,34 +6990,76 @@
           <a:bodyPr wrap="square" lIns="0" tIns="0" rIns="0" bIns="0" rtlCol="0" anchor="ctr"/>
           <a:lstStyle/>
           <a:p>
-            <a:pPr algn="l" indent="0" marL="0">
-              <a:buNone/>
-            </a:pPr>
-            <a:r>
-              <a:rPr lang="en-US" sz="1100" b="1" spc="250" kern="0" dirty="0">
-                <a:solidFill>
-                  <a:srgbClr val="4A6B5D"/>
+            <a:pPr algn="ctr" indent="0" marL="0">
+              <a:buNone/>
+            </a:pPr>
+            <a:r>
+              <a:rPr lang="en-US" sz="1000" dirty="0">
+                <a:solidFill>
+                  <a:srgbClr val="7A7F72"/>
                 </a:solidFill>
                 <a:latin typeface="Arial" pitchFamily="34" charset="0"/>
                 <a:ea typeface="Arial" pitchFamily="34" charset="-122"/>
                 <a:cs typeface="Arial" pitchFamily="34" charset="-120"/>
               </a:rPr>
-              <a:t>SOUND, MADE VISIBLE</a:t>
-            </a:r>
-            <a:endParaRPr lang="en-US" sz="1100" dirty="0"/>
-          </a:p>
-        </p:txBody>
-      </p:sp>
-      <p:sp>
-        <p:nvSpPr>
-          <p:cNvPr id="4" name="Shape 1"/>
-          <p:cNvSpPr/>
-          <p:nvPr/>
-        </p:nvSpPr>
-        <p:spPr>
-          <a:xfrm>
-            <a:off x="822960" y="1188720"/>
-            <a:ext cx="6400800" cy="0"/>
+              <a:t>Jaws (1975), dir. Steven Spielberg: the fin surfaces behind the chum line</a:t>
+            </a:r>
+            <a:endParaRPr lang="en-US" sz="1000" dirty="0"/>
+          </a:p>
+        </p:txBody>
+      </p:sp>
+      <p:sp>
+        <p:nvSpPr>
+          <p:cNvPr id="8" name="Text 5"/>
+          <p:cNvSpPr/>
+          <p:nvPr/>
+        </p:nvSpPr>
+        <p:spPr>
+          <a:xfrm>
+            <a:off x="822960" y="4572000"/>
+            <a:ext cx="10543032" cy="1463040"/>
+          </a:xfrm>
+          <a:prstGeom prst="rect">
+            <a:avLst/>
+          </a:prstGeom>
+          <a:noFill/>
+          <a:ln/>
+        </p:spPr>
+        <p:txBody>
+          <a:bodyPr wrap="square" lIns="0" tIns="0" rIns="0" bIns="0" rtlCol="0" anchor="t"/>
+          <a:lstStyle/>
+          <a:p>
+            <a:pPr indent="0" marL="0">
+              <a:lnSpc>
+                <a:spcPts val="2300"/>
+              </a:lnSpc>
+              <a:buNone/>
+            </a:pPr>
+            <a:r>
+              <a:rPr lang="en-US" sz="1600" dirty="0">
+                <a:solidFill>
+                  <a:srgbClr val="24313F"/>
+                </a:solidFill>
+                <a:latin typeface="Georgia" pitchFamily="34" charset="0"/>
+                <a:ea typeface="Georgia" pitchFamily="34" charset="-122"/>
+                <a:cs typeface="Georgia" pitchFamily="34" charset="-120"/>
+              </a:rPr>
+              <a:t>Jaws attaches two low notes to the shark, and after the first attack the film never needs to show it again: the motif is the monster. Play the two notes over a calm beach and the audience supplies the dread themselves. That is a sound motif: a recurring sound welded to a character or idea until the sound alone can carry it. The coursebook's own example, and the cheapest tension machine in cinema.</a:t>
+            </a:r>
+            <a:endParaRPr lang="en-US" sz="1600" dirty="0"/>
+          </a:p>
+        </p:txBody>
+      </p:sp>
+      <p:sp>
+        <p:nvSpPr>
+          <p:cNvPr id="9" name="Shape 6"/>
+          <p:cNvSpPr/>
+          <p:nvPr/>
+        </p:nvSpPr>
+        <p:spPr>
+          <a:xfrm>
+            <a:off x="822960" y="6382512"/>
+            <a:ext cx="10543032" cy="0"/>
           </a:xfrm>
           <a:prstGeom prst="line">
             <a:avLst/>
@@ -5452,14 +7075,14 @@
       </p:sp>
       <p:sp>
         <p:nvSpPr>
-          <p:cNvPr id="5" name="Text 2"/>
-          <p:cNvSpPr/>
-          <p:nvPr/>
-        </p:nvSpPr>
-        <p:spPr>
-          <a:xfrm>
-            <a:off x="822960" y="1371600"/>
-            <a:ext cx="6400800" cy="822960"/>
+          <p:cNvPr id="10" name="Text 7"/>
+          <p:cNvSpPr/>
+          <p:nvPr/>
+        </p:nvSpPr>
+        <p:spPr>
+          <a:xfrm>
+            <a:off x="822960" y="6419088"/>
+            <a:ext cx="7315200" cy="274320"/>
           </a:xfrm>
           <a:prstGeom prst="rect">
             <a:avLst/>
@@ -5475,129 +7098,56 @@
               <a:buNone/>
             </a:pPr>
             <a:r>
-              <a:rPr lang="en-US" sz="3600" dirty="0">
-                <a:solidFill>
-                  <a:srgbClr val="24313F"/>
+              <a:rPr lang="en-US" sz="900" spc="150" kern="0" dirty="0">
+                <a:solidFill>
+                  <a:srgbClr val="7A7F72"/>
+                </a:solidFill>
+                <a:latin typeface="Arial" pitchFamily="34" charset="0"/>
+                <a:ea typeface="Arial" pitchFamily="34" charset="-122"/>
+                <a:cs typeface="Arial" pitchFamily="34" charset="-120"/>
+              </a:rPr>
+              <a:t>MEDIA STUDIES 9607 · SEMESTER I</a:t>
+            </a:r>
+            <a:endParaRPr lang="en-US" sz="900" dirty="0"/>
+          </a:p>
+        </p:txBody>
+      </p:sp>
+      <p:sp>
+        <p:nvSpPr>
+          <p:cNvPr id="11" name="Text 8"/>
+          <p:cNvSpPr/>
+          <p:nvPr/>
+        </p:nvSpPr>
+        <p:spPr>
+          <a:xfrm>
+            <a:off x="10268712" y="6355080"/>
+            <a:ext cx="1097280" cy="365760"/>
+          </a:xfrm>
+          <a:prstGeom prst="rect">
+            <a:avLst/>
+          </a:prstGeom>
+          <a:noFill/>
+          <a:ln/>
+        </p:spPr>
+        <p:txBody>
+          <a:bodyPr wrap="square" lIns="0" tIns="0" rIns="0" bIns="0" rtlCol="0" anchor="ctr"/>
+          <a:lstStyle/>
+          <a:p>
+            <a:pPr algn="r" indent="0" marL="0">
+              <a:buNone/>
+            </a:pPr>
+            <a:r>
+              <a:rPr lang="en-US" sz="1600" dirty="0">
+                <a:solidFill>
+                  <a:srgbClr val="A3C1AD"/>
                 </a:solidFill>
                 <a:latin typeface="Georgia" pitchFamily="34" charset="0"/>
                 <a:ea typeface="Georgia" pitchFamily="34" charset="-122"/>
                 <a:cs typeface="Georgia" pitchFamily="34" charset="-120"/>
               </a:rPr>
-              <a:t>The room where sound is built</a:t>
-            </a:r>
-            <a:endParaRPr lang="en-US" sz="3600" dirty="0"/>
-          </a:p>
-        </p:txBody>
-      </p:sp>
-      <p:sp>
-        <p:nvSpPr>
-          <p:cNvPr id="6" name="Text 3"/>
-          <p:cNvSpPr/>
-          <p:nvPr/>
-        </p:nvSpPr>
-        <p:spPr>
-          <a:xfrm>
-            <a:off x="822960" y="2331720"/>
-            <a:ext cx="6400800" cy="3291840"/>
-          </a:xfrm>
-          <a:prstGeom prst="rect">
-            <a:avLst/>
-          </a:prstGeom>
-          <a:noFill/>
-          <a:ln/>
-        </p:spPr>
-        <p:txBody>
-          <a:bodyPr wrap="square" lIns="0" tIns="0" rIns="0" bIns="0" rtlCol="0" anchor="t"/>
-          <a:lstStyle/>
-          <a:p>
-            <a:pPr indent="0" marL="0">
-              <a:lnSpc>
-                <a:spcPts val="2400"/>
-              </a:lnSpc>
-              <a:buNone/>
-            </a:pPr>
-            <a:r>
-              <a:rPr lang="en-US" sz="1700" dirty="0">
-                <a:solidFill>
-                  <a:srgbClr val="24313F"/>
-                </a:solidFill>
-                <a:latin typeface="Georgia" pitchFamily="34" charset="0"/>
-                <a:ea typeface="Georgia" pitchFamily="34" charset="-122"/>
-                <a:cs typeface="Georgia" pitchFamily="34" charset="-120"/>
-              </a:rPr>
-              <a:t>A foley artist, mid-drop. Almost nothing you hear in a finished scene was recorded when the camera rolled: footsteps, cloth, a glass set down, a door eased shut are all performed later, object by object, in a room like this one.</a:t>
-            </a:r>
-            <a:endParaRPr lang="en-US" sz="1700" dirty="0"/>
-          </a:p>
-          <a:p>
-            <a:pPr indent="0" marL="0">
-              <a:lnSpc>
-                <a:spcPts val="2400"/>
-              </a:lnSpc>
-              <a:buNone/>
-            </a:pPr>
-            <a:endParaRPr lang="en-US" sz="1700" dirty="0"/>
-          </a:p>
-          <a:p>
-            <a:pPr indent="0" marL="0">
-              <a:lnSpc>
-                <a:spcPts val="2400"/>
-              </a:lnSpc>
-              <a:buNone/>
-            </a:pPr>
-            <a:r>
-              <a:rPr lang="en-US" sz="1700" dirty="0">
-                <a:solidFill>
-                  <a:srgbClr val="24313F"/>
-                </a:solidFill>
-                <a:latin typeface="Georgia" pitchFamily="34" charset="0"/>
-                <a:ea typeface="Georgia" pitchFamily="34" charset="-122"/>
-                <a:cs typeface="Georgia" pitchFamily="34" charset="-120"/>
-              </a:rPr>
-              <a:t>That is the part of a soundtrack students never hear as a decision. Ambient sound, the bed under the scene, the breath before the line: every one of them was chosen and placed, which is exactly why it is easy to overlook and worth naming.</a:t>
-            </a:r>
-            <a:endParaRPr lang="en-US" sz="1700" dirty="0"/>
-          </a:p>
-        </p:txBody>
-      </p:sp>
-      <p:sp>
-        <p:nvSpPr>
-          <p:cNvPr id="7" name="Text 4"/>
-          <p:cNvSpPr/>
-          <p:nvPr/>
-        </p:nvSpPr>
-        <p:spPr>
-          <a:xfrm>
-            <a:off x="7818120" y="6126480"/>
-            <a:ext cx="4187952" cy="365760"/>
-          </a:xfrm>
-          <a:prstGeom prst="rect">
-            <a:avLst/>
-          </a:prstGeom>
-          <a:solidFill>
-            <a:srgbClr val="FAF8F1"/>
-          </a:solidFill>
-          <a:ln/>
-        </p:spPr>
-        <p:txBody>
-          <a:bodyPr wrap="square" lIns="0" tIns="0" rIns="0" bIns="0" rtlCol="0" anchor="ctr"/>
-          <a:lstStyle/>
-          <a:p>
-            <a:pPr indent="0" marL="0">
-              <a:buNone/>
-            </a:pPr>
-            <a:r>
-              <a:rPr lang="en-US" sz="950" spc="50" kern="0" dirty="0">
-                <a:solidFill>
-                  <a:srgbClr val="7A7F72"/>
-                </a:solidFill>
-                <a:latin typeface="Arial" pitchFamily="34" charset="0"/>
-                <a:ea typeface="Arial" pitchFamily="34" charset="-122"/>
-                <a:cs typeface="Arial" pitchFamily="34" charset="-120"/>
-              </a:rPr>
-              <a:t>A foley room at work. Vancouver Film School, CC BY 2.0</a:t>
-            </a:r>
-            <a:endParaRPr lang="en-US" sz="950" dirty="0"/>
+              <a:t>03</a:t>
+            </a:r>
+            <a:endParaRPr lang="en-US" sz="1600" dirty="0"/>
           </a:p>
         </p:txBody>
       </p:sp>
@@ -5633,15 +7183,39 @@
           <a:chExt cx="0" cy="0"/>
         </a:xfrm>
       </p:grpSpPr>
-      <p:sp>
-        <p:nvSpPr>
-          <p:cNvPr id="2" name="Text 0"/>
-          <p:cNvSpPr/>
-          <p:nvPr/>
-        </p:nvSpPr>
-        <p:spPr>
-          <a:xfrm>
-            <a:off x="822960" y="457200"/>
+      <p:pic>
+        <p:nvPicPr>
+          <p:cNvPr id="2" name="Image 0" descr="/Users/dogan/Documents/Vaults/Courses/wiki/classes/media-studies/decks/_build/img/crops/foley-room_a664.jpg">    </p:cNvPr>
+          <p:cNvPicPr>
+            <a:picLocks noChangeAspect="1"/>
+          </p:cNvPicPr>
+          <p:nvPr/>
+        </p:nvPicPr>
+        <p:blipFill>
+          <a:blip r:embed="rId1"/>
+          <a:stretch>
+            <a:fillRect/>
+          </a:stretch>
+        </p:blipFill>
+        <p:spPr>
+          <a:xfrm>
+            <a:off x="7635240" y="0"/>
+            <a:ext cx="4553712" cy="6858000"/>
+          </a:xfrm>
+          <a:prstGeom prst="rect">
+            <a:avLst/>
+          </a:prstGeom>
+        </p:spPr>
+      </p:pic>
+      <p:sp>
+        <p:nvSpPr>
+          <p:cNvPr id="3" name="Text 0"/>
+          <p:cNvSpPr/>
+          <p:nvPr/>
+        </p:nvSpPr>
+        <p:spPr>
+          <a:xfrm>
+            <a:off x="822960" y="822960"/>
             <a:ext cx="6400800" cy="274320"/>
           </a:xfrm>
           <a:prstGeom prst="rect">
@@ -5666,7 +7240,7 @@
                 <a:ea typeface="Arial" pitchFamily="34" charset="-122"/>
                 <a:cs typeface="Arial" pitchFamily="34" charset="-120"/>
               </a:rPr>
-              <a:t>THE LINE, AND CROSSING IT</a:t>
+              <a:t>SOUND, MADE VISIBLE</a:t>
             </a:r>
             <a:endParaRPr lang="en-US" sz="1100" dirty="0"/>
           </a:p>
@@ -5674,53 +7248,14 @@
       </p:sp>
       <p:sp>
         <p:nvSpPr>
-          <p:cNvPr id="3" name="Text 1"/>
-          <p:cNvSpPr/>
-          <p:nvPr/>
-        </p:nvSpPr>
-        <p:spPr>
-          <a:xfrm>
-            <a:off x="6793992" y="457200"/>
-            <a:ext cx="4572000" cy="274320"/>
-          </a:xfrm>
-          <a:prstGeom prst="rect">
-            <a:avLst/>
-          </a:prstGeom>
-          <a:noFill/>
-          <a:ln/>
-        </p:spPr>
-        <p:txBody>
-          <a:bodyPr wrap="square" lIns="0" tIns="0" rIns="0" bIns="0" rtlCol="0" anchor="ctr"/>
-          <a:lstStyle/>
-          <a:p>
-            <a:pPr algn="r" indent="0" marL="0">
-              <a:buNone/>
-            </a:pPr>
-            <a:r>
-              <a:rPr lang="en-US" sz="1100" b="1" spc="250" kern="0" dirty="0">
-                <a:solidFill>
-                  <a:srgbClr val="7A7F72"/>
-                </a:solidFill>
-                <a:latin typeface="Arial" pitchFamily="34" charset="0"/>
-                <a:ea typeface="Arial" pitchFamily="34" charset="-122"/>
-                <a:cs typeface="Arial" pitchFamily="34" charset="-120"/>
-              </a:rPr>
-              <a:t>THE MOVE THAT EARNS MORE THAN EITHER STATE</a:t>
-            </a:r>
-            <a:endParaRPr lang="en-US" sz="1100" dirty="0"/>
-          </a:p>
-        </p:txBody>
-      </p:sp>
-      <p:sp>
-        <p:nvSpPr>
-          <p:cNvPr id="4" name="Shape 2"/>
-          <p:cNvSpPr/>
-          <p:nvPr/>
-        </p:nvSpPr>
-        <p:spPr>
-          <a:xfrm>
-            <a:off x="822960" y="786384"/>
-            <a:ext cx="10543032" cy="0"/>
+          <p:cNvPr id="4" name="Shape 1"/>
+          <p:cNvSpPr/>
+          <p:nvPr/>
+        </p:nvSpPr>
+        <p:spPr>
+          <a:xfrm>
+            <a:off x="822960" y="1188720"/>
+            <a:ext cx="6400800" cy="0"/>
           </a:xfrm>
           <a:prstGeom prst="line">
             <a:avLst/>
@@ -5736,14 +7271,14 @@
       </p:sp>
       <p:sp>
         <p:nvSpPr>
-          <p:cNvPr id="5" name="Text 3"/>
-          <p:cNvSpPr/>
-          <p:nvPr/>
-        </p:nvSpPr>
-        <p:spPr>
-          <a:xfrm>
-            <a:off x="822960" y="1005840"/>
-            <a:ext cx="10543032" cy="731520"/>
+          <p:cNvPr id="5" name="Text 2"/>
+          <p:cNvSpPr/>
+          <p:nvPr/>
+        </p:nvSpPr>
+        <p:spPr>
+          <a:xfrm>
+            <a:off x="822960" y="1371600"/>
+            <a:ext cx="6400800" cy="822960"/>
           </a:xfrm>
           <a:prstGeom prst="rect">
             <a:avLst/>
@@ -5767,7 +7302,7 @@
                 <a:ea typeface="Georgia" pitchFamily="34" charset="-122"/>
                 <a:cs typeface="Georgia" pitchFamily="34" charset="-120"/>
               </a:rPr>
-              <a:t>A car radio, then a kitchen</a:t>
+              <a:t>The room where sound is built</a:t>
             </a:r>
             <a:endParaRPr lang="en-US" sz="3600" dirty="0"/>
           </a:p>
@@ -5775,76 +7310,14 @@
       </p:sp>
       <p:sp>
         <p:nvSpPr>
-          <p:cNvPr id="6" name="Text 4"/>
-          <p:cNvSpPr/>
-          <p:nvPr/>
-        </p:nvSpPr>
-        <p:spPr>
-          <a:xfrm>
-            <a:off x="822960" y="2011680"/>
-            <a:ext cx="4846320" cy="502920"/>
-          </a:xfrm>
-          <a:prstGeom prst="rect">
-            <a:avLst/>
-          </a:prstGeom>
-          <a:noFill/>
-          <a:ln/>
-        </p:spPr>
-        <p:txBody>
-          <a:bodyPr wrap="square" lIns="0" tIns="0" rIns="0" bIns="0" rtlCol="0" anchor="ctr"/>
-          <a:lstStyle/>
-          <a:p>
-            <a:pPr indent="0" marL="0">
-              <a:buNone/>
-            </a:pPr>
-            <a:r>
-              <a:rPr lang="en-US" sz="2600" dirty="0">
-                <a:solidFill>
-                  <a:srgbClr val="4A6B5D"/>
-                </a:solidFill>
-                <a:latin typeface="Georgia" pitchFamily="34" charset="0"/>
-                <a:ea typeface="Georgia" pitchFamily="34" charset="-122"/>
-                <a:cs typeface="Georgia" pitchFamily="34" charset="-120"/>
-              </a:rPr>
-              <a:t>Diegetic</a:t>
-            </a:r>
-            <a:endParaRPr lang="en-US" sz="2600" dirty="0"/>
-          </a:p>
-        </p:txBody>
-      </p:sp>
-      <p:sp>
-        <p:nvSpPr>
-          <p:cNvPr id="7" name="Shape 5"/>
-          <p:cNvSpPr/>
-          <p:nvPr/>
-        </p:nvSpPr>
-        <p:spPr>
-          <a:xfrm>
-            <a:off x="822960" y="2606040"/>
-            <a:ext cx="4754880" cy="0"/>
-          </a:xfrm>
-          <a:prstGeom prst="line">
-            <a:avLst/>
-          </a:prstGeom>
-          <a:noFill/>
-          <a:ln w="9525">
-            <a:solidFill>
-              <a:srgbClr val="D9D4C4"/>
-            </a:solidFill>
-            <a:prstDash val="solid"/>
-          </a:ln>
-        </p:spPr>
-      </p:sp>
-      <p:sp>
-        <p:nvSpPr>
-          <p:cNvPr id="8" name="Text 6"/>
-          <p:cNvSpPr/>
-          <p:nvPr/>
-        </p:nvSpPr>
-        <p:spPr>
-          <a:xfrm>
-            <a:off x="822960" y="2743200"/>
-            <a:ext cx="4846320" cy="1463040"/>
+          <p:cNvPr id="6" name="Text 3"/>
+          <p:cNvSpPr/>
+          <p:nvPr/>
+        </p:nvSpPr>
+        <p:spPr>
+          <a:xfrm>
+            <a:off x="822960" y="2331720"/>
+            <a:ext cx="6400800" cy="3291840"/>
           </a:xfrm>
           <a:prstGeom prst="rect">
             <a:avLst/>
@@ -5854,172 +7327,6 @@
         </p:spPr>
         <p:txBody>
           <a:bodyPr wrap="square" lIns="0" tIns="0" rIns="0" bIns="0" rtlCol="0" anchor="t"/>
-          <a:lstStyle/>
-          <a:p>
-            <a:pPr indent="0" marL="0">
-              <a:lnSpc>
-                <a:spcPts val="2500"/>
-              </a:lnSpc>
-              <a:buNone/>
-            </a:pPr>
-            <a:r>
-              <a:rPr lang="en-US" sz="1800" dirty="0">
-                <a:solidFill>
-                  <a:srgbClr val="24313F"/>
-                </a:solidFill>
-                <a:latin typeface="Georgia" pitchFamily="34" charset="0"/>
-                <a:ea typeface="Georgia" pitchFamily="34" charset="-122"/>
-                <a:cs typeface="Georgia" pitchFamily="34" charset="-120"/>
-              </a:rPr>
-              <a:t>The song plays on the car radio. It exists in the world of the text and the character can hear it.</a:t>
-            </a:r>
-            <a:endParaRPr lang="en-US" sz="1800" dirty="0"/>
-          </a:p>
-        </p:txBody>
-      </p:sp>
-      <p:sp>
-        <p:nvSpPr>
-          <p:cNvPr id="9" name="Text 7"/>
-          <p:cNvSpPr/>
-          <p:nvPr/>
-        </p:nvSpPr>
-        <p:spPr>
-          <a:xfrm>
-            <a:off x="6309360" y="2011680"/>
-            <a:ext cx="4846320" cy="502920"/>
-          </a:xfrm>
-          <a:prstGeom prst="rect">
-            <a:avLst/>
-          </a:prstGeom>
-          <a:noFill/>
-          <a:ln/>
-        </p:spPr>
-        <p:txBody>
-          <a:bodyPr wrap="square" lIns="0" tIns="0" rIns="0" bIns="0" rtlCol="0" anchor="ctr"/>
-          <a:lstStyle/>
-          <a:p>
-            <a:pPr indent="0" marL="0">
-              <a:buNone/>
-            </a:pPr>
-            <a:r>
-              <a:rPr lang="en-US" sz="2600" dirty="0">
-                <a:solidFill>
-                  <a:srgbClr val="5C7A6B"/>
-                </a:solidFill>
-                <a:latin typeface="Georgia" pitchFamily="34" charset="0"/>
-                <a:ea typeface="Georgia" pitchFamily="34" charset="-122"/>
-                <a:cs typeface="Georgia" pitchFamily="34" charset="-120"/>
-              </a:rPr>
-              <a:t>Non-diegetic</a:t>
-            </a:r>
-            <a:endParaRPr lang="en-US" sz="2600" dirty="0"/>
-          </a:p>
-        </p:txBody>
-      </p:sp>
-      <p:sp>
-        <p:nvSpPr>
-          <p:cNvPr id="10" name="Shape 8"/>
-          <p:cNvSpPr/>
-          <p:nvPr/>
-        </p:nvSpPr>
-        <p:spPr>
-          <a:xfrm>
-            <a:off x="6309360" y="2606040"/>
-            <a:ext cx="4754880" cy="0"/>
-          </a:xfrm>
-          <a:prstGeom prst="line">
-            <a:avLst/>
-          </a:prstGeom>
-          <a:noFill/>
-          <a:ln w="9525">
-            <a:solidFill>
-              <a:srgbClr val="D9D4C4"/>
-            </a:solidFill>
-            <a:prstDash val="solid"/>
-          </a:ln>
-        </p:spPr>
-      </p:sp>
-      <p:sp>
-        <p:nvSpPr>
-          <p:cNvPr id="11" name="Text 9"/>
-          <p:cNvSpPr/>
-          <p:nvPr/>
-        </p:nvSpPr>
-        <p:spPr>
-          <a:xfrm>
-            <a:off x="6309360" y="2743200"/>
-            <a:ext cx="4846320" cy="1463040"/>
-          </a:xfrm>
-          <a:prstGeom prst="rect">
-            <a:avLst/>
-          </a:prstGeom>
-          <a:noFill/>
-          <a:ln/>
-        </p:spPr>
-        <p:txBody>
-          <a:bodyPr wrap="square" lIns="0" tIns="0" rIns="0" bIns="0" rtlCol="0" anchor="t"/>
-          <a:lstStyle/>
-          <a:p>
-            <a:pPr indent="0" marL="0">
-              <a:lnSpc>
-                <a:spcPts val="2500"/>
-              </a:lnSpc>
-              <a:buNone/>
-            </a:pPr>
-            <a:r>
-              <a:rPr lang="en-US" sz="1800" dirty="0">
-                <a:solidFill>
-                  <a:srgbClr val="24313F"/>
-                </a:solidFill>
-                <a:latin typeface="Georgia" pitchFamily="34" charset="0"/>
-                <a:ea typeface="Georgia" pitchFamily="34" charset="-122"/>
-                <a:cs typeface="Georgia" pitchFamily="34" charset="-120"/>
-              </a:rPr>
-              <a:t>The same song continues over the next scene, in a kitchen, with no radio. Only you can hear it now.</a:t>
-            </a:r>
-            <a:endParaRPr lang="en-US" sz="1800" dirty="0"/>
-          </a:p>
-        </p:txBody>
-      </p:sp>
-      <p:sp>
-        <p:nvSpPr>
-          <p:cNvPr id="12" name="Shape 10"/>
-          <p:cNvSpPr/>
-          <p:nvPr/>
-        </p:nvSpPr>
-        <p:spPr>
-          <a:xfrm>
-            <a:off x="822960" y="4343400"/>
-            <a:ext cx="10543032" cy="960120"/>
-          </a:xfrm>
-          <a:prstGeom prst="rect">
-            <a:avLst/>
-          </a:prstGeom>
-          <a:solidFill>
-            <a:srgbClr val="E8EFE7"/>
-          </a:solidFill>
-          <a:ln/>
-        </p:spPr>
-      </p:sp>
-      <p:sp>
-        <p:nvSpPr>
-          <p:cNvPr id="13" name="Text 11"/>
-          <p:cNvSpPr/>
-          <p:nvPr/>
-        </p:nvSpPr>
-        <p:spPr>
-          <a:xfrm>
-            <a:off x="1097280" y="4480560"/>
-            <a:ext cx="9994392" cy="685800"/>
-          </a:xfrm>
-          <a:prstGeom prst="rect">
-            <a:avLst/>
-          </a:prstGeom>
-          <a:noFill/>
-          <a:ln/>
-        </p:spPr>
-        <p:txBody>
-          <a:bodyPr wrap="square" lIns="0" tIns="0" rIns="0" bIns="0" rtlCol="0" anchor="ctr"/>
           <a:lstStyle/>
           <a:p>
             <a:pPr indent="0" marL="0">
@@ -6029,7 +7336,7 @@
               <a:buNone/>
             </a:pPr>
             <a:r>
-              <a:rPr lang="en-US" sz="1800" dirty="0">
+              <a:rPr lang="en-US" sz="1700" dirty="0">
                 <a:solidFill>
                   <a:srgbClr val="24313F"/>
                 </a:solidFill>
@@ -6037,50 +7344,58 @@
                 <a:ea typeface="Georgia" pitchFamily="34" charset="-122"/>
                 <a:cs typeface="Georgia" pitchFamily="34" charset="-120"/>
               </a:rPr>
-              <a:t>The carry itself has a name: a sound bridge. Naming the crossing is worth more than naming either side of it, because the crossing is the decision.</a:t>
-            </a:r>
-            <a:endParaRPr lang="en-US" sz="1800" dirty="0"/>
-          </a:p>
-        </p:txBody>
-      </p:sp>
-      <p:sp>
-        <p:nvSpPr>
-          <p:cNvPr id="14" name="Shape 12"/>
-          <p:cNvSpPr/>
-          <p:nvPr/>
-        </p:nvSpPr>
-        <p:spPr>
-          <a:xfrm>
-            <a:off x="822960" y="6382512"/>
-            <a:ext cx="10543032" cy="0"/>
-          </a:xfrm>
-          <a:prstGeom prst="line">
-            <a:avLst/>
-          </a:prstGeom>
-          <a:noFill/>
-          <a:ln w="9525">
-            <a:solidFill>
-              <a:srgbClr val="D9D4C4"/>
-            </a:solidFill>
-            <a:prstDash val="solid"/>
-          </a:ln>
-        </p:spPr>
-      </p:sp>
-      <p:sp>
-        <p:nvSpPr>
-          <p:cNvPr id="15" name="Text 13"/>
-          <p:cNvSpPr/>
-          <p:nvPr/>
-        </p:nvSpPr>
-        <p:spPr>
-          <a:xfrm>
-            <a:off x="822960" y="6419088"/>
-            <a:ext cx="7315200" cy="274320"/>
-          </a:xfrm>
-          <a:prstGeom prst="rect">
-            <a:avLst/>
-          </a:prstGeom>
-          <a:noFill/>
+              <a:t>A foley artist, mid-drop. Almost nothing you hear in a finished scene was recorded when the camera rolled: footsteps, cloth, a glass set down, a door eased shut are all performed later, object by object, in a room like this one.</a:t>
+            </a:r>
+            <a:endParaRPr lang="en-US" sz="1700" dirty="0"/>
+          </a:p>
+          <a:p>
+            <a:pPr indent="0" marL="0">
+              <a:lnSpc>
+                <a:spcPts val="2400"/>
+              </a:lnSpc>
+              <a:buNone/>
+            </a:pPr>
+            <a:endParaRPr lang="en-US" sz="1700" dirty="0"/>
+          </a:p>
+          <a:p>
+            <a:pPr indent="0" marL="0">
+              <a:lnSpc>
+                <a:spcPts val="2400"/>
+              </a:lnSpc>
+              <a:buNone/>
+            </a:pPr>
+            <a:r>
+              <a:rPr lang="en-US" sz="1700" dirty="0">
+                <a:solidFill>
+                  <a:srgbClr val="24313F"/>
+                </a:solidFill>
+                <a:latin typeface="Georgia" pitchFamily="34" charset="0"/>
+                <a:ea typeface="Georgia" pitchFamily="34" charset="-122"/>
+                <a:cs typeface="Georgia" pitchFamily="34" charset="-120"/>
+              </a:rPr>
+              <a:t>That is the part of a soundtrack students never hear as a decision. Ambient sound, the bed under the scene, the breath before the line: every one of them was chosen and placed, which is exactly why it is easy to overlook and worth naming.</a:t>
+            </a:r>
+            <a:endParaRPr lang="en-US" sz="1700" dirty="0"/>
+          </a:p>
+        </p:txBody>
+      </p:sp>
+      <p:sp>
+        <p:nvSpPr>
+          <p:cNvPr id="7" name="Text 4"/>
+          <p:cNvSpPr/>
+          <p:nvPr/>
+        </p:nvSpPr>
+        <p:spPr>
+          <a:xfrm>
+            <a:off x="7818120" y="6126480"/>
+            <a:ext cx="4187952" cy="365760"/>
+          </a:xfrm>
+          <a:prstGeom prst="rect">
+            <a:avLst/>
+          </a:prstGeom>
+          <a:solidFill>
+            <a:srgbClr val="FAF8F1"/>
+          </a:solidFill>
           <a:ln/>
         </p:spPr>
         <p:txBody>
@@ -6091,7 +7406,7 @@
               <a:buNone/>
             </a:pPr>
             <a:r>
-              <a:rPr lang="en-US" sz="900" spc="150" kern="0" dirty="0">
+              <a:rPr lang="en-US" sz="950" spc="50" kern="0" dirty="0">
                 <a:solidFill>
                   <a:srgbClr val="7A7F72"/>
                 </a:solidFill>
@@ -6099,48 +7414,9 @@
                 <a:ea typeface="Arial" pitchFamily="34" charset="-122"/>
                 <a:cs typeface="Arial" pitchFamily="34" charset="-120"/>
               </a:rPr>
-              <a:t>MEDIA STUDIES 9607 · SEMESTER I</a:t>
-            </a:r>
-            <a:endParaRPr lang="en-US" sz="900" dirty="0"/>
-          </a:p>
-        </p:txBody>
-      </p:sp>
-      <p:sp>
-        <p:nvSpPr>
-          <p:cNvPr id="16" name="Text 14"/>
-          <p:cNvSpPr/>
-          <p:nvPr/>
-        </p:nvSpPr>
-        <p:spPr>
-          <a:xfrm>
-            <a:off x="10268712" y="6355080"/>
-            <a:ext cx="1097280" cy="365760"/>
-          </a:xfrm>
-          <a:prstGeom prst="rect">
-            <a:avLst/>
-          </a:prstGeom>
-          <a:noFill/>
-          <a:ln/>
-        </p:spPr>
-        <p:txBody>
-          <a:bodyPr wrap="square" lIns="0" tIns="0" rIns="0" bIns="0" rtlCol="0" anchor="ctr"/>
-          <a:lstStyle/>
-          <a:p>
-            <a:pPr algn="r" indent="0" marL="0">
-              <a:buNone/>
-            </a:pPr>
-            <a:r>
-              <a:rPr lang="en-US" sz="1600" dirty="0">
-                <a:solidFill>
-                  <a:srgbClr val="A3C1AD"/>
-                </a:solidFill>
-                <a:latin typeface="Georgia" pitchFamily="34" charset="0"/>
-                <a:ea typeface="Georgia" pitchFamily="34" charset="-122"/>
-                <a:cs typeface="Georgia" pitchFamily="34" charset="-120"/>
-              </a:rPr>
-              <a:t>03</a:t>
-            </a:r>
-            <a:endParaRPr lang="en-US" sz="1600" dirty="0"/>
+              <a:t>A foley room at work. Vancouver Film School, CC BY 2.0</a:t>
+            </a:r>
+            <a:endParaRPr lang="en-US" sz="950" dirty="0"/>
           </a:p>
         </p:txBody>
       </p:sp>
@@ -6155,6 +7431,1576 @@
 <file path=ppt/slides/slide8.xml><?xml version="1.0" encoding="utf-8"?>
 <p:sld xmlns:a="http://schemas.openxmlformats.org/drawingml/2006/main" xmlns:r="http://schemas.openxmlformats.org/officeDocument/2006/relationships" xmlns:p="http://schemas.openxmlformats.org/presentationml/2006/main">
   <p:cSld name="Slide 8">
+    <p:bg>
+      <p:bgPr>
+        <a:solidFill>
+          <a:srgbClr val="FAF8F1"/>
+        </a:solidFill>
+      </p:bgPr>
+    </p:bg>
+    <p:spTree>
+      <p:nvGrpSpPr>
+        <p:cNvPr id="1" name=""/>
+        <p:cNvGrpSpPr/>
+        <p:nvPr/>
+      </p:nvGrpSpPr>
+      <p:grpSpPr>
+        <a:xfrm>
+          <a:off x="0" y="0"/>
+          <a:ext cx="0" cy="0"/>
+          <a:chOff x="0" y="0"/>
+          <a:chExt cx="0" cy="0"/>
+        </a:xfrm>
+      </p:grpSpPr>
+      <p:sp>
+        <p:nvSpPr>
+          <p:cNvPr id="2" name="Text 0"/>
+          <p:cNvSpPr/>
+          <p:nvPr/>
+        </p:nvSpPr>
+        <p:spPr>
+          <a:xfrm>
+            <a:off x="822960" y="457200"/>
+            <a:ext cx="6400800" cy="274320"/>
+          </a:xfrm>
+          <a:prstGeom prst="rect">
+            <a:avLst/>
+          </a:prstGeom>
+          <a:noFill/>
+          <a:ln/>
+        </p:spPr>
+        <p:txBody>
+          <a:bodyPr wrap="square" lIns="0" tIns="0" rIns="0" bIns="0" rtlCol="0" anchor="ctr"/>
+          <a:lstStyle/>
+          <a:p>
+            <a:pPr algn="l" indent="0" marL="0">
+              <a:buNone/>
+            </a:pPr>
+            <a:r>
+              <a:rPr lang="en-US" sz="1100" b="1" spc="250" kern="0" dirty="0">
+                <a:solidFill>
+                  <a:srgbClr val="4A6B5D"/>
+                </a:solidFill>
+                <a:latin typeface="Arial" pitchFamily="34" charset="0"/>
+                <a:ea typeface="Arial" pitchFamily="34" charset="-122"/>
+                <a:cs typeface="Arial" pitchFamily="34" charset="-120"/>
+              </a:rPr>
+              <a:t>THE LINE, AND CROSSING IT</a:t>
+            </a:r>
+            <a:endParaRPr lang="en-US" sz="1100" dirty="0"/>
+          </a:p>
+        </p:txBody>
+      </p:sp>
+      <p:sp>
+        <p:nvSpPr>
+          <p:cNvPr id="3" name="Text 1"/>
+          <p:cNvSpPr/>
+          <p:nvPr/>
+        </p:nvSpPr>
+        <p:spPr>
+          <a:xfrm>
+            <a:off x="6793992" y="457200"/>
+            <a:ext cx="4572000" cy="274320"/>
+          </a:xfrm>
+          <a:prstGeom prst="rect">
+            <a:avLst/>
+          </a:prstGeom>
+          <a:noFill/>
+          <a:ln/>
+        </p:spPr>
+        <p:txBody>
+          <a:bodyPr wrap="square" lIns="0" tIns="0" rIns="0" bIns="0" rtlCol="0" anchor="ctr"/>
+          <a:lstStyle/>
+          <a:p>
+            <a:pPr algn="r" indent="0" marL="0">
+              <a:buNone/>
+            </a:pPr>
+            <a:r>
+              <a:rPr lang="en-US" sz="1100" b="1" spc="250" kern="0" dirty="0">
+                <a:solidFill>
+                  <a:srgbClr val="7A7F72"/>
+                </a:solidFill>
+                <a:latin typeface="Arial" pitchFamily="34" charset="0"/>
+                <a:ea typeface="Arial" pitchFamily="34" charset="-122"/>
+                <a:cs typeface="Arial" pitchFamily="34" charset="-120"/>
+              </a:rPr>
+              <a:t>THE MOVE THAT EARNS MORE THAN EITHER STATE</a:t>
+            </a:r>
+            <a:endParaRPr lang="en-US" sz="1100" dirty="0"/>
+          </a:p>
+        </p:txBody>
+      </p:sp>
+      <p:sp>
+        <p:nvSpPr>
+          <p:cNvPr id="4" name="Shape 2"/>
+          <p:cNvSpPr/>
+          <p:nvPr/>
+        </p:nvSpPr>
+        <p:spPr>
+          <a:xfrm>
+            <a:off x="822960" y="786384"/>
+            <a:ext cx="10543032" cy="0"/>
+          </a:xfrm>
+          <a:prstGeom prst="line">
+            <a:avLst/>
+          </a:prstGeom>
+          <a:noFill/>
+          <a:ln w="9525">
+            <a:solidFill>
+              <a:srgbClr val="D9D4C4"/>
+            </a:solidFill>
+            <a:prstDash val="solid"/>
+          </a:ln>
+        </p:spPr>
+      </p:sp>
+      <p:sp>
+        <p:nvSpPr>
+          <p:cNvPr id="5" name="Text 3"/>
+          <p:cNvSpPr/>
+          <p:nvPr/>
+        </p:nvSpPr>
+        <p:spPr>
+          <a:xfrm>
+            <a:off x="822960" y="914400"/>
+            <a:ext cx="10543032" cy="548640"/>
+          </a:xfrm>
+          <a:prstGeom prst="rect">
+            <a:avLst/>
+          </a:prstGeom>
+          <a:noFill/>
+          <a:ln/>
+        </p:spPr>
+        <p:txBody>
+          <a:bodyPr wrap="square" lIns="0" tIns="0" rIns="0" bIns="0" rtlCol="0" anchor="ctr"/>
+          <a:lstStyle/>
+          <a:p>
+            <a:pPr indent="0" marL="0">
+              <a:buNone/>
+            </a:pPr>
+            <a:r>
+              <a:rPr lang="en-US" sz="3200" dirty="0">
+                <a:solidFill>
+                  <a:srgbClr val="24313F"/>
+                </a:solidFill>
+                <a:latin typeface="Georgia" pitchFamily="34" charset="0"/>
+                <a:ea typeface="Georgia" pitchFamily="34" charset="-122"/>
+                <a:cs typeface="Georgia" pitchFamily="34" charset="-120"/>
+              </a:rPr>
+              <a:t>A car radio, then a kitchen</a:t>
+            </a:r>
+            <a:endParaRPr lang="en-US" sz="3200" dirty="0"/>
+          </a:p>
+        </p:txBody>
+      </p:sp>
+      <p:sp>
+        <p:nvSpPr>
+          <p:cNvPr id="6" name="Text 4"/>
+          <p:cNvSpPr/>
+          <p:nvPr/>
+        </p:nvSpPr>
+        <p:spPr>
+          <a:xfrm>
+            <a:off x="822960" y="1600200"/>
+            <a:ext cx="4846320" cy="457200"/>
+          </a:xfrm>
+          <a:prstGeom prst="rect">
+            <a:avLst/>
+          </a:prstGeom>
+          <a:noFill/>
+          <a:ln/>
+        </p:spPr>
+        <p:txBody>
+          <a:bodyPr wrap="square" lIns="0" tIns="0" rIns="0" bIns="0" rtlCol="0" anchor="ctr"/>
+          <a:lstStyle/>
+          <a:p>
+            <a:pPr indent="0" marL="0">
+              <a:buNone/>
+            </a:pPr>
+            <a:r>
+              <a:rPr lang="en-US" sz="2400" dirty="0">
+                <a:solidFill>
+                  <a:srgbClr val="4A6B5D"/>
+                </a:solidFill>
+                <a:latin typeface="Georgia" pitchFamily="34" charset="0"/>
+                <a:ea typeface="Georgia" pitchFamily="34" charset="-122"/>
+                <a:cs typeface="Georgia" pitchFamily="34" charset="-120"/>
+              </a:rPr>
+              <a:t>Diegetic</a:t>
+            </a:r>
+            <a:endParaRPr lang="en-US" sz="2400" dirty="0"/>
+          </a:p>
+        </p:txBody>
+      </p:sp>
+      <p:sp>
+        <p:nvSpPr>
+          <p:cNvPr id="7" name="Shape 5"/>
+          <p:cNvSpPr/>
+          <p:nvPr/>
+        </p:nvSpPr>
+        <p:spPr>
+          <a:xfrm>
+            <a:off x="822960" y="2121408"/>
+            <a:ext cx="4754880" cy="0"/>
+          </a:xfrm>
+          <a:prstGeom prst="line">
+            <a:avLst/>
+          </a:prstGeom>
+          <a:noFill/>
+          <a:ln w="9525">
+            <a:solidFill>
+              <a:srgbClr val="D9D4C4"/>
+            </a:solidFill>
+            <a:prstDash val="solid"/>
+          </a:ln>
+        </p:spPr>
+      </p:sp>
+      <p:sp>
+        <p:nvSpPr>
+          <p:cNvPr id="8" name="Text 6"/>
+          <p:cNvSpPr/>
+          <p:nvPr/>
+        </p:nvSpPr>
+        <p:spPr>
+          <a:xfrm>
+            <a:off x="822960" y="2240280"/>
+            <a:ext cx="4846320" cy="1234440"/>
+          </a:xfrm>
+          <a:prstGeom prst="rect">
+            <a:avLst/>
+          </a:prstGeom>
+          <a:noFill/>
+          <a:ln/>
+        </p:spPr>
+        <p:txBody>
+          <a:bodyPr wrap="square" lIns="0" tIns="0" rIns="0" bIns="0" rtlCol="0" anchor="t"/>
+          <a:lstStyle/>
+          <a:p>
+            <a:pPr indent="0" marL="0">
+              <a:lnSpc>
+                <a:spcPts val="2300"/>
+              </a:lnSpc>
+              <a:buNone/>
+            </a:pPr>
+            <a:r>
+              <a:rPr lang="en-US" sz="1650" dirty="0">
+                <a:solidFill>
+                  <a:srgbClr val="24313F"/>
+                </a:solidFill>
+                <a:latin typeface="Georgia" pitchFamily="34" charset="0"/>
+                <a:ea typeface="Georgia" pitchFamily="34" charset="-122"/>
+                <a:cs typeface="Georgia" pitchFamily="34" charset="-120"/>
+              </a:rPr>
+              <a:t>The song plays on the car radio. It exists in the world of the text and the character can hear it.</a:t>
+            </a:r>
+            <a:endParaRPr lang="en-US" sz="1650" dirty="0"/>
+          </a:p>
+        </p:txBody>
+      </p:sp>
+      <p:sp>
+        <p:nvSpPr>
+          <p:cNvPr id="9" name="Text 7"/>
+          <p:cNvSpPr/>
+          <p:nvPr/>
+        </p:nvSpPr>
+        <p:spPr>
+          <a:xfrm>
+            <a:off x="6309360" y="1600200"/>
+            <a:ext cx="4846320" cy="457200"/>
+          </a:xfrm>
+          <a:prstGeom prst="rect">
+            <a:avLst/>
+          </a:prstGeom>
+          <a:noFill/>
+          <a:ln/>
+        </p:spPr>
+        <p:txBody>
+          <a:bodyPr wrap="square" lIns="0" tIns="0" rIns="0" bIns="0" rtlCol="0" anchor="ctr"/>
+          <a:lstStyle/>
+          <a:p>
+            <a:pPr indent="0" marL="0">
+              <a:buNone/>
+            </a:pPr>
+            <a:r>
+              <a:rPr lang="en-US" sz="2400" dirty="0">
+                <a:solidFill>
+                  <a:srgbClr val="5C7A6B"/>
+                </a:solidFill>
+                <a:latin typeface="Georgia" pitchFamily="34" charset="0"/>
+                <a:ea typeface="Georgia" pitchFamily="34" charset="-122"/>
+                <a:cs typeface="Georgia" pitchFamily="34" charset="-120"/>
+              </a:rPr>
+              <a:t>Non-diegetic</a:t>
+            </a:r>
+            <a:endParaRPr lang="en-US" sz="2400" dirty="0"/>
+          </a:p>
+        </p:txBody>
+      </p:sp>
+      <p:sp>
+        <p:nvSpPr>
+          <p:cNvPr id="10" name="Shape 8"/>
+          <p:cNvSpPr/>
+          <p:nvPr/>
+        </p:nvSpPr>
+        <p:spPr>
+          <a:xfrm>
+            <a:off x="6309360" y="2121408"/>
+            <a:ext cx="4754880" cy="0"/>
+          </a:xfrm>
+          <a:prstGeom prst="line">
+            <a:avLst/>
+          </a:prstGeom>
+          <a:noFill/>
+          <a:ln w="9525">
+            <a:solidFill>
+              <a:srgbClr val="D9D4C4"/>
+            </a:solidFill>
+            <a:prstDash val="solid"/>
+          </a:ln>
+        </p:spPr>
+      </p:sp>
+      <p:sp>
+        <p:nvSpPr>
+          <p:cNvPr id="11" name="Text 9"/>
+          <p:cNvSpPr/>
+          <p:nvPr/>
+        </p:nvSpPr>
+        <p:spPr>
+          <a:xfrm>
+            <a:off x="6309360" y="2240280"/>
+            <a:ext cx="4846320" cy="1234440"/>
+          </a:xfrm>
+          <a:prstGeom prst="rect">
+            <a:avLst/>
+          </a:prstGeom>
+          <a:noFill/>
+          <a:ln/>
+        </p:spPr>
+        <p:txBody>
+          <a:bodyPr wrap="square" lIns="0" tIns="0" rIns="0" bIns="0" rtlCol="0" anchor="t"/>
+          <a:lstStyle/>
+          <a:p>
+            <a:pPr indent="0" marL="0">
+              <a:lnSpc>
+                <a:spcPts val="2300"/>
+              </a:lnSpc>
+              <a:buNone/>
+            </a:pPr>
+            <a:r>
+              <a:rPr lang="en-US" sz="1650" dirty="0">
+                <a:solidFill>
+                  <a:srgbClr val="24313F"/>
+                </a:solidFill>
+                <a:latin typeface="Georgia" pitchFamily="34" charset="0"/>
+                <a:ea typeface="Georgia" pitchFamily="34" charset="-122"/>
+                <a:cs typeface="Georgia" pitchFamily="34" charset="-120"/>
+              </a:rPr>
+              <a:t>The same song continues over the next scene, in a kitchen, with no radio. Only you can hear it now.</a:t>
+            </a:r>
+            <a:endParaRPr lang="en-US" sz="1650" dirty="0"/>
+          </a:p>
+        </p:txBody>
+      </p:sp>
+      <p:sp>
+        <p:nvSpPr>
+          <p:cNvPr id="12" name="Shape 10"/>
+          <p:cNvSpPr/>
+          <p:nvPr/>
+        </p:nvSpPr>
+        <p:spPr>
+          <a:xfrm>
+            <a:off x="822960" y="3794760"/>
+            <a:ext cx="5074920" cy="1371600"/>
+          </a:xfrm>
+          <a:prstGeom prst="rect">
+            <a:avLst/>
+          </a:prstGeom>
+          <a:solidFill>
+            <a:srgbClr val="E8EFE7"/>
+          </a:solidFill>
+          <a:ln w="12700">
+            <a:solidFill>
+              <a:srgbClr val="8AA394"/>
+            </a:solidFill>
+            <a:prstDash val="solid"/>
+          </a:ln>
+        </p:spPr>
+      </p:sp>
+      <p:sp>
+        <p:nvSpPr>
+          <p:cNvPr id="13" name="Shape 11"/>
+          <p:cNvSpPr/>
+          <p:nvPr/>
+        </p:nvSpPr>
+        <p:spPr>
+          <a:xfrm>
+            <a:off x="6263640" y="3794760"/>
+            <a:ext cx="5074920" cy="1371600"/>
+          </a:xfrm>
+          <a:prstGeom prst="rect">
+            <a:avLst/>
+          </a:prstGeom>
+          <a:solidFill>
+            <a:srgbClr val="E8EFE7"/>
+          </a:solidFill>
+          <a:ln w="12700">
+            <a:solidFill>
+              <a:srgbClr val="8AA394"/>
+            </a:solidFill>
+            <a:prstDash val="solid"/>
+          </a:ln>
+        </p:spPr>
+      </p:sp>
+      <p:sp>
+        <p:nvSpPr>
+          <p:cNvPr id="14" name="Text 12"/>
+          <p:cNvSpPr/>
+          <p:nvPr/>
+        </p:nvSpPr>
+        <p:spPr>
+          <a:xfrm>
+            <a:off x="1005840" y="3904488"/>
+            <a:ext cx="2743200" cy="274320"/>
+          </a:xfrm>
+          <a:prstGeom prst="rect">
+            <a:avLst/>
+          </a:prstGeom>
+          <a:noFill/>
+          <a:ln/>
+        </p:spPr>
+        <p:txBody>
+          <a:bodyPr wrap="square" lIns="0" tIns="0" rIns="0" bIns="0" rtlCol="0" anchor="ctr"/>
+          <a:lstStyle/>
+          <a:p>
+            <a:pPr indent="0" marL="0">
+              <a:buNone/>
+            </a:pPr>
+            <a:r>
+              <a:rPr lang="en-US" sz="1050" b="1" spc="150" kern="0" dirty="0">
+                <a:solidFill>
+                  <a:srgbClr val="7A7F72"/>
+                </a:solidFill>
+                <a:latin typeface="Arial" pitchFamily="34" charset="0"/>
+                <a:ea typeface="Arial" pitchFamily="34" charset="-122"/>
+                <a:cs typeface="Arial" pitchFamily="34" charset="-120"/>
+              </a:rPr>
+              <a:t>INT. CAR</a:t>
+            </a:r>
+            <a:endParaRPr lang="en-US" sz="1050" dirty="0"/>
+          </a:p>
+        </p:txBody>
+      </p:sp>
+      <p:sp>
+        <p:nvSpPr>
+          <p:cNvPr id="15" name="Text 13"/>
+          <p:cNvSpPr/>
+          <p:nvPr/>
+        </p:nvSpPr>
+        <p:spPr>
+          <a:xfrm>
+            <a:off x="6446520" y="3904488"/>
+            <a:ext cx="2743200" cy="274320"/>
+          </a:xfrm>
+          <a:prstGeom prst="rect">
+            <a:avLst/>
+          </a:prstGeom>
+          <a:noFill/>
+          <a:ln/>
+        </p:spPr>
+        <p:txBody>
+          <a:bodyPr wrap="square" lIns="0" tIns="0" rIns="0" bIns="0" rtlCol="0" anchor="ctr"/>
+          <a:lstStyle/>
+          <a:p>
+            <a:pPr indent="0" marL="0">
+              <a:buNone/>
+            </a:pPr>
+            <a:r>
+              <a:rPr lang="en-US" sz="1050" b="1" spc="150" kern="0" dirty="0">
+                <a:solidFill>
+                  <a:srgbClr val="7A7F72"/>
+                </a:solidFill>
+                <a:latin typeface="Arial" pitchFamily="34" charset="0"/>
+                <a:ea typeface="Arial" pitchFamily="34" charset="-122"/>
+                <a:cs typeface="Arial" pitchFamily="34" charset="-120"/>
+              </a:rPr>
+              <a:t>INT. KITCHEN</a:t>
+            </a:r>
+            <a:endParaRPr lang="en-US" sz="1050" dirty="0"/>
+          </a:p>
+        </p:txBody>
+      </p:sp>
+      <p:sp>
+        <p:nvSpPr>
+          <p:cNvPr id="16" name="Shape 14"/>
+          <p:cNvSpPr/>
+          <p:nvPr/>
+        </p:nvSpPr>
+        <p:spPr>
+          <a:xfrm>
+            <a:off x="5897880" y="3657600"/>
+            <a:ext cx="365760" cy="1645920"/>
+          </a:xfrm>
+          <a:prstGeom prst="rect">
+            <a:avLst/>
+          </a:prstGeom>
+          <a:solidFill>
+            <a:srgbClr val="8C3A38"/>
+          </a:solidFill>
+          <a:ln/>
+        </p:spPr>
+      </p:sp>
+      <p:sp>
+        <p:nvSpPr>
+          <p:cNvPr id="17" name="Text 15"/>
+          <p:cNvSpPr/>
+          <p:nvPr/>
+        </p:nvSpPr>
+        <p:spPr>
+          <a:xfrm>
+            <a:off x="5650992" y="5330952"/>
+            <a:ext cx="914400" cy="274320"/>
+          </a:xfrm>
+          <a:prstGeom prst="rect">
+            <a:avLst/>
+          </a:prstGeom>
+          <a:noFill/>
+          <a:ln/>
+        </p:spPr>
+        <p:txBody>
+          <a:bodyPr wrap="square" lIns="0" tIns="0" rIns="0" bIns="0" rtlCol="0" anchor="ctr"/>
+          <a:lstStyle/>
+          <a:p>
+            <a:pPr algn="ctr" indent="0" marL="0">
+              <a:buNone/>
+            </a:pPr>
+            <a:r>
+              <a:rPr lang="en-US" sz="950" i="1" dirty="0">
+                <a:solidFill>
+                  <a:srgbClr val="8C3A38"/>
+                </a:solidFill>
+                <a:latin typeface="Arial" pitchFamily="34" charset="0"/>
+                <a:ea typeface="Arial" pitchFamily="34" charset="-122"/>
+                <a:cs typeface="Arial" pitchFamily="34" charset="-120"/>
+              </a:rPr>
+              <a:t>the cut</a:t>
+            </a:r>
+            <a:endParaRPr lang="en-US" sz="950" dirty="0"/>
+          </a:p>
+        </p:txBody>
+      </p:sp>
+      <p:sp>
+        <p:nvSpPr>
+          <p:cNvPr id="18" name="Shape 16"/>
+          <p:cNvSpPr/>
+          <p:nvPr/>
+        </p:nvSpPr>
+        <p:spPr>
+          <a:xfrm>
+            <a:off x="1051560" y="4453128"/>
+            <a:ext cx="82296" cy="512064"/>
+          </a:xfrm>
+          <a:prstGeom prst="rect">
+            <a:avLst/>
+          </a:prstGeom>
+          <a:solidFill>
+            <a:srgbClr val="4A6B5D"/>
+          </a:solidFill>
+          <a:ln/>
+        </p:spPr>
+      </p:sp>
+      <p:sp>
+        <p:nvSpPr>
+          <p:cNvPr id="19" name="Shape 17"/>
+          <p:cNvSpPr/>
+          <p:nvPr/>
+        </p:nvSpPr>
+        <p:spPr>
+          <a:xfrm>
+            <a:off x="1272845" y="4528566"/>
+            <a:ext cx="82296" cy="361188"/>
+          </a:xfrm>
+          <a:prstGeom prst="rect">
+            <a:avLst/>
+          </a:prstGeom>
+          <a:solidFill>
+            <a:srgbClr val="4A6B5D"/>
+          </a:solidFill>
+          <a:ln/>
+        </p:spPr>
+      </p:sp>
+      <p:sp>
+        <p:nvSpPr>
+          <p:cNvPr id="20" name="Shape 18"/>
+          <p:cNvSpPr/>
+          <p:nvPr/>
+        </p:nvSpPr>
+        <p:spPr>
+          <a:xfrm>
+            <a:off x="1494130" y="4604004"/>
+            <a:ext cx="82296" cy="210312"/>
+          </a:xfrm>
+          <a:prstGeom prst="rect">
+            <a:avLst/>
+          </a:prstGeom>
+          <a:solidFill>
+            <a:srgbClr val="4A6B5D"/>
+          </a:solidFill>
+          <a:ln/>
+        </p:spPr>
+      </p:sp>
+      <p:sp>
+        <p:nvSpPr>
+          <p:cNvPr id="21" name="Shape 19"/>
+          <p:cNvSpPr/>
+          <p:nvPr/>
+        </p:nvSpPr>
+        <p:spPr>
+          <a:xfrm>
+            <a:off x="1715414" y="4629150"/>
+            <a:ext cx="82296" cy="160020"/>
+          </a:xfrm>
+          <a:prstGeom prst="rect">
+            <a:avLst/>
+          </a:prstGeom>
+          <a:solidFill>
+            <a:srgbClr val="4A6B5D"/>
+          </a:solidFill>
+          <a:ln/>
+        </p:spPr>
+      </p:sp>
+      <p:sp>
+        <p:nvSpPr>
+          <p:cNvPr id="22" name="Shape 20"/>
+          <p:cNvSpPr/>
+          <p:nvPr/>
+        </p:nvSpPr>
+        <p:spPr>
+          <a:xfrm>
+            <a:off x="1936699" y="4553712"/>
+            <a:ext cx="82296" cy="310896"/>
+          </a:xfrm>
+          <a:prstGeom prst="rect">
+            <a:avLst/>
+          </a:prstGeom>
+          <a:solidFill>
+            <a:srgbClr val="4A6B5D"/>
+          </a:solidFill>
+          <a:ln/>
+        </p:spPr>
+      </p:sp>
+      <p:sp>
+        <p:nvSpPr>
+          <p:cNvPr id="23" name="Shape 21"/>
+          <p:cNvSpPr/>
+          <p:nvPr/>
+        </p:nvSpPr>
+        <p:spPr>
+          <a:xfrm>
+            <a:off x="2157984" y="4478274"/>
+            <a:ext cx="82296" cy="461772"/>
+          </a:xfrm>
+          <a:prstGeom prst="rect">
+            <a:avLst/>
+          </a:prstGeom>
+          <a:solidFill>
+            <a:srgbClr val="4A6B5D"/>
+          </a:solidFill>
+          <a:ln/>
+        </p:spPr>
+      </p:sp>
+      <p:sp>
+        <p:nvSpPr>
+          <p:cNvPr id="24" name="Shape 22"/>
+          <p:cNvSpPr/>
+          <p:nvPr/>
+        </p:nvSpPr>
+        <p:spPr>
+          <a:xfrm>
+            <a:off x="2379269" y="4478274"/>
+            <a:ext cx="82296" cy="461772"/>
+          </a:xfrm>
+          <a:prstGeom prst="rect">
+            <a:avLst/>
+          </a:prstGeom>
+          <a:solidFill>
+            <a:srgbClr val="4A6B5D"/>
+          </a:solidFill>
+          <a:ln/>
+        </p:spPr>
+      </p:sp>
+      <p:sp>
+        <p:nvSpPr>
+          <p:cNvPr id="25" name="Shape 23"/>
+          <p:cNvSpPr/>
+          <p:nvPr/>
+        </p:nvSpPr>
+        <p:spPr>
+          <a:xfrm>
+            <a:off x="2600554" y="4553712"/>
+            <a:ext cx="82296" cy="310896"/>
+          </a:xfrm>
+          <a:prstGeom prst="rect">
+            <a:avLst/>
+          </a:prstGeom>
+          <a:solidFill>
+            <a:srgbClr val="4A6B5D"/>
+          </a:solidFill>
+          <a:ln/>
+        </p:spPr>
+      </p:sp>
+      <p:sp>
+        <p:nvSpPr>
+          <p:cNvPr id="26" name="Shape 24"/>
+          <p:cNvSpPr/>
+          <p:nvPr/>
+        </p:nvSpPr>
+        <p:spPr>
+          <a:xfrm>
+            <a:off x="2821838" y="4629150"/>
+            <a:ext cx="82296" cy="160020"/>
+          </a:xfrm>
+          <a:prstGeom prst="rect">
+            <a:avLst/>
+          </a:prstGeom>
+          <a:solidFill>
+            <a:srgbClr val="4A6B5D"/>
+          </a:solidFill>
+          <a:ln/>
+        </p:spPr>
+      </p:sp>
+      <p:sp>
+        <p:nvSpPr>
+          <p:cNvPr id="27" name="Shape 25"/>
+          <p:cNvSpPr/>
+          <p:nvPr/>
+        </p:nvSpPr>
+        <p:spPr>
+          <a:xfrm>
+            <a:off x="3043123" y="4604004"/>
+            <a:ext cx="82296" cy="210312"/>
+          </a:xfrm>
+          <a:prstGeom prst="rect">
+            <a:avLst/>
+          </a:prstGeom>
+          <a:solidFill>
+            <a:srgbClr val="4A6B5D"/>
+          </a:solidFill>
+          <a:ln/>
+        </p:spPr>
+      </p:sp>
+      <p:sp>
+        <p:nvSpPr>
+          <p:cNvPr id="28" name="Shape 26"/>
+          <p:cNvSpPr/>
+          <p:nvPr/>
+        </p:nvSpPr>
+        <p:spPr>
+          <a:xfrm>
+            <a:off x="3264408" y="4528566"/>
+            <a:ext cx="82296" cy="361188"/>
+          </a:xfrm>
+          <a:prstGeom prst="rect">
+            <a:avLst/>
+          </a:prstGeom>
+          <a:solidFill>
+            <a:srgbClr val="4A6B5D"/>
+          </a:solidFill>
+          <a:ln/>
+        </p:spPr>
+      </p:sp>
+      <p:sp>
+        <p:nvSpPr>
+          <p:cNvPr id="29" name="Shape 27"/>
+          <p:cNvSpPr/>
+          <p:nvPr/>
+        </p:nvSpPr>
+        <p:spPr>
+          <a:xfrm>
+            <a:off x="3485693" y="4453128"/>
+            <a:ext cx="82296" cy="512064"/>
+          </a:xfrm>
+          <a:prstGeom prst="rect">
+            <a:avLst/>
+          </a:prstGeom>
+          <a:solidFill>
+            <a:srgbClr val="4A6B5D"/>
+          </a:solidFill>
+          <a:ln/>
+        </p:spPr>
+      </p:sp>
+      <p:sp>
+        <p:nvSpPr>
+          <p:cNvPr id="30" name="Shape 28"/>
+          <p:cNvSpPr/>
+          <p:nvPr/>
+        </p:nvSpPr>
+        <p:spPr>
+          <a:xfrm>
+            <a:off x="3706978" y="4503420"/>
+            <a:ext cx="82296" cy="411480"/>
+          </a:xfrm>
+          <a:prstGeom prst="rect">
+            <a:avLst/>
+          </a:prstGeom>
+          <a:solidFill>
+            <a:srgbClr val="4A6B5D"/>
+          </a:solidFill>
+          <a:ln/>
+        </p:spPr>
+      </p:sp>
+      <p:sp>
+        <p:nvSpPr>
+          <p:cNvPr id="31" name="Shape 29"/>
+          <p:cNvSpPr/>
+          <p:nvPr/>
+        </p:nvSpPr>
+        <p:spPr>
+          <a:xfrm>
+            <a:off x="3928262" y="4578858"/>
+            <a:ext cx="82296" cy="260604"/>
+          </a:xfrm>
+          <a:prstGeom prst="rect">
+            <a:avLst/>
+          </a:prstGeom>
+          <a:solidFill>
+            <a:srgbClr val="4A6B5D"/>
+          </a:solidFill>
+          <a:ln/>
+        </p:spPr>
+      </p:sp>
+      <p:sp>
+        <p:nvSpPr>
+          <p:cNvPr id="32" name="Shape 30"/>
+          <p:cNvSpPr/>
+          <p:nvPr/>
+        </p:nvSpPr>
+        <p:spPr>
+          <a:xfrm>
+            <a:off x="4149547" y="4654296"/>
+            <a:ext cx="82296" cy="109728"/>
+          </a:xfrm>
+          <a:prstGeom prst="rect">
+            <a:avLst/>
+          </a:prstGeom>
+          <a:solidFill>
+            <a:srgbClr val="4A6B5D"/>
+          </a:solidFill>
+          <a:ln/>
+        </p:spPr>
+      </p:sp>
+      <p:sp>
+        <p:nvSpPr>
+          <p:cNvPr id="33" name="Shape 31"/>
+          <p:cNvSpPr/>
+          <p:nvPr/>
+        </p:nvSpPr>
+        <p:spPr>
+          <a:xfrm>
+            <a:off x="4370832" y="4578858"/>
+            <a:ext cx="82296" cy="260604"/>
+          </a:xfrm>
+          <a:prstGeom prst="rect">
+            <a:avLst/>
+          </a:prstGeom>
+          <a:solidFill>
+            <a:srgbClr val="4A6B5D"/>
+          </a:solidFill>
+          <a:ln/>
+        </p:spPr>
+      </p:sp>
+      <p:sp>
+        <p:nvSpPr>
+          <p:cNvPr id="34" name="Shape 32"/>
+          <p:cNvSpPr/>
+          <p:nvPr/>
+        </p:nvSpPr>
+        <p:spPr>
+          <a:xfrm>
+            <a:off x="4592117" y="4503420"/>
+            <a:ext cx="82296" cy="411480"/>
+          </a:xfrm>
+          <a:prstGeom prst="rect">
+            <a:avLst/>
+          </a:prstGeom>
+          <a:solidFill>
+            <a:srgbClr val="4A6B5D"/>
+          </a:solidFill>
+          <a:ln/>
+        </p:spPr>
+      </p:sp>
+      <p:sp>
+        <p:nvSpPr>
+          <p:cNvPr id="35" name="Shape 33"/>
+          <p:cNvSpPr/>
+          <p:nvPr/>
+        </p:nvSpPr>
+        <p:spPr>
+          <a:xfrm>
+            <a:off x="4813402" y="4453128"/>
+            <a:ext cx="82296" cy="512064"/>
+          </a:xfrm>
+          <a:prstGeom prst="rect">
+            <a:avLst/>
+          </a:prstGeom>
+          <a:solidFill>
+            <a:srgbClr val="4A6B5D"/>
+          </a:solidFill>
+          <a:ln/>
+        </p:spPr>
+      </p:sp>
+      <p:sp>
+        <p:nvSpPr>
+          <p:cNvPr id="36" name="Shape 34"/>
+          <p:cNvSpPr/>
+          <p:nvPr/>
+        </p:nvSpPr>
+        <p:spPr>
+          <a:xfrm>
+            <a:off x="5034686" y="4528566"/>
+            <a:ext cx="82296" cy="361188"/>
+          </a:xfrm>
+          <a:prstGeom prst="rect">
+            <a:avLst/>
+          </a:prstGeom>
+          <a:solidFill>
+            <a:srgbClr val="4A6B5D"/>
+          </a:solidFill>
+          <a:ln/>
+        </p:spPr>
+      </p:sp>
+      <p:sp>
+        <p:nvSpPr>
+          <p:cNvPr id="37" name="Shape 35"/>
+          <p:cNvSpPr/>
+          <p:nvPr/>
+        </p:nvSpPr>
+        <p:spPr>
+          <a:xfrm>
+            <a:off x="5255971" y="4604004"/>
+            <a:ext cx="82296" cy="210312"/>
+          </a:xfrm>
+          <a:prstGeom prst="rect">
+            <a:avLst/>
+          </a:prstGeom>
+          <a:solidFill>
+            <a:srgbClr val="4A6B5D"/>
+          </a:solidFill>
+          <a:ln/>
+        </p:spPr>
+      </p:sp>
+      <p:sp>
+        <p:nvSpPr>
+          <p:cNvPr id="38" name="Shape 36"/>
+          <p:cNvSpPr/>
+          <p:nvPr/>
+        </p:nvSpPr>
+        <p:spPr>
+          <a:xfrm>
+            <a:off x="5477256" y="4629150"/>
+            <a:ext cx="82296" cy="160020"/>
+          </a:xfrm>
+          <a:prstGeom prst="rect">
+            <a:avLst/>
+          </a:prstGeom>
+          <a:solidFill>
+            <a:srgbClr val="4A6B5D"/>
+          </a:solidFill>
+          <a:ln/>
+        </p:spPr>
+      </p:sp>
+      <p:sp>
+        <p:nvSpPr>
+          <p:cNvPr id="39" name="Shape 37"/>
+          <p:cNvSpPr/>
+          <p:nvPr/>
+        </p:nvSpPr>
+        <p:spPr>
+          <a:xfrm>
+            <a:off x="5698541" y="4553712"/>
+            <a:ext cx="82296" cy="310896"/>
+          </a:xfrm>
+          <a:prstGeom prst="rect">
+            <a:avLst/>
+          </a:prstGeom>
+          <a:solidFill>
+            <a:srgbClr val="4A6B5D"/>
+          </a:solidFill>
+          <a:ln/>
+        </p:spPr>
+      </p:sp>
+      <p:sp>
+        <p:nvSpPr>
+          <p:cNvPr id="40" name="Shape 38"/>
+          <p:cNvSpPr/>
+          <p:nvPr/>
+        </p:nvSpPr>
+        <p:spPr>
+          <a:xfrm>
+            <a:off x="6583680" y="4629150"/>
+            <a:ext cx="82296" cy="160020"/>
+          </a:xfrm>
+          <a:prstGeom prst="rect">
+            <a:avLst/>
+          </a:prstGeom>
+          <a:solidFill>
+            <a:srgbClr val="4A6B5D"/>
+          </a:solidFill>
+          <a:ln/>
+        </p:spPr>
+      </p:sp>
+      <p:sp>
+        <p:nvSpPr>
+          <p:cNvPr id="41" name="Shape 39"/>
+          <p:cNvSpPr/>
+          <p:nvPr/>
+        </p:nvSpPr>
+        <p:spPr>
+          <a:xfrm>
+            <a:off x="6804965" y="4604004"/>
+            <a:ext cx="82296" cy="210312"/>
+          </a:xfrm>
+          <a:prstGeom prst="rect">
+            <a:avLst/>
+          </a:prstGeom>
+          <a:solidFill>
+            <a:srgbClr val="4A6B5D"/>
+          </a:solidFill>
+          <a:ln/>
+        </p:spPr>
+      </p:sp>
+      <p:sp>
+        <p:nvSpPr>
+          <p:cNvPr id="42" name="Shape 40"/>
+          <p:cNvSpPr/>
+          <p:nvPr/>
+        </p:nvSpPr>
+        <p:spPr>
+          <a:xfrm>
+            <a:off x="7026250" y="4528566"/>
+            <a:ext cx="82296" cy="361188"/>
+          </a:xfrm>
+          <a:prstGeom prst="rect">
+            <a:avLst/>
+          </a:prstGeom>
+          <a:solidFill>
+            <a:srgbClr val="4A6B5D"/>
+          </a:solidFill>
+          <a:ln/>
+        </p:spPr>
+      </p:sp>
+      <p:sp>
+        <p:nvSpPr>
+          <p:cNvPr id="43" name="Shape 41"/>
+          <p:cNvSpPr/>
+          <p:nvPr/>
+        </p:nvSpPr>
+        <p:spPr>
+          <a:xfrm>
+            <a:off x="7247534" y="4453128"/>
+            <a:ext cx="82296" cy="512064"/>
+          </a:xfrm>
+          <a:prstGeom prst="rect">
+            <a:avLst/>
+          </a:prstGeom>
+          <a:solidFill>
+            <a:srgbClr val="4A6B5D"/>
+          </a:solidFill>
+          <a:ln/>
+        </p:spPr>
+      </p:sp>
+      <p:sp>
+        <p:nvSpPr>
+          <p:cNvPr id="44" name="Shape 42"/>
+          <p:cNvSpPr/>
+          <p:nvPr/>
+        </p:nvSpPr>
+        <p:spPr>
+          <a:xfrm>
+            <a:off x="7468819" y="4503420"/>
+            <a:ext cx="82296" cy="411480"/>
+          </a:xfrm>
+          <a:prstGeom prst="rect">
+            <a:avLst/>
+          </a:prstGeom>
+          <a:solidFill>
+            <a:srgbClr val="4A6B5D"/>
+          </a:solidFill>
+          <a:ln/>
+        </p:spPr>
+      </p:sp>
+      <p:sp>
+        <p:nvSpPr>
+          <p:cNvPr id="45" name="Shape 43"/>
+          <p:cNvSpPr/>
+          <p:nvPr/>
+        </p:nvSpPr>
+        <p:spPr>
+          <a:xfrm>
+            <a:off x="7690104" y="4578858"/>
+            <a:ext cx="82296" cy="260604"/>
+          </a:xfrm>
+          <a:prstGeom prst="rect">
+            <a:avLst/>
+          </a:prstGeom>
+          <a:solidFill>
+            <a:srgbClr val="4A6B5D"/>
+          </a:solidFill>
+          <a:ln/>
+        </p:spPr>
+      </p:sp>
+      <p:sp>
+        <p:nvSpPr>
+          <p:cNvPr id="46" name="Shape 44"/>
+          <p:cNvSpPr/>
+          <p:nvPr/>
+        </p:nvSpPr>
+        <p:spPr>
+          <a:xfrm>
+            <a:off x="7911389" y="4654296"/>
+            <a:ext cx="82296" cy="109728"/>
+          </a:xfrm>
+          <a:prstGeom prst="rect">
+            <a:avLst/>
+          </a:prstGeom>
+          <a:solidFill>
+            <a:srgbClr val="4A6B5D"/>
+          </a:solidFill>
+          <a:ln/>
+        </p:spPr>
+      </p:sp>
+      <p:sp>
+        <p:nvSpPr>
+          <p:cNvPr id="47" name="Shape 45"/>
+          <p:cNvSpPr/>
+          <p:nvPr/>
+        </p:nvSpPr>
+        <p:spPr>
+          <a:xfrm>
+            <a:off x="8132674" y="4578858"/>
+            <a:ext cx="82296" cy="260604"/>
+          </a:xfrm>
+          <a:prstGeom prst="rect">
+            <a:avLst/>
+          </a:prstGeom>
+          <a:solidFill>
+            <a:srgbClr val="4A6B5D"/>
+          </a:solidFill>
+          <a:ln/>
+        </p:spPr>
+      </p:sp>
+      <p:sp>
+        <p:nvSpPr>
+          <p:cNvPr id="48" name="Shape 46"/>
+          <p:cNvSpPr/>
+          <p:nvPr/>
+        </p:nvSpPr>
+        <p:spPr>
+          <a:xfrm>
+            <a:off x="8353958" y="4503420"/>
+            <a:ext cx="82296" cy="411480"/>
+          </a:xfrm>
+          <a:prstGeom prst="rect">
+            <a:avLst/>
+          </a:prstGeom>
+          <a:solidFill>
+            <a:srgbClr val="4A6B5D"/>
+          </a:solidFill>
+          <a:ln/>
+        </p:spPr>
+      </p:sp>
+      <p:sp>
+        <p:nvSpPr>
+          <p:cNvPr id="49" name="Shape 47"/>
+          <p:cNvSpPr/>
+          <p:nvPr/>
+        </p:nvSpPr>
+        <p:spPr>
+          <a:xfrm>
+            <a:off x="8575243" y="4453128"/>
+            <a:ext cx="82296" cy="512064"/>
+          </a:xfrm>
+          <a:prstGeom prst="rect">
+            <a:avLst/>
+          </a:prstGeom>
+          <a:solidFill>
+            <a:srgbClr val="4A6B5D"/>
+          </a:solidFill>
+          <a:ln/>
+        </p:spPr>
+      </p:sp>
+      <p:sp>
+        <p:nvSpPr>
+          <p:cNvPr id="50" name="Shape 48"/>
+          <p:cNvSpPr/>
+          <p:nvPr/>
+        </p:nvSpPr>
+        <p:spPr>
+          <a:xfrm>
+            <a:off x="8796528" y="4528566"/>
+            <a:ext cx="82296" cy="361188"/>
+          </a:xfrm>
+          <a:prstGeom prst="rect">
+            <a:avLst/>
+          </a:prstGeom>
+          <a:solidFill>
+            <a:srgbClr val="4A6B5D"/>
+          </a:solidFill>
+          <a:ln/>
+        </p:spPr>
+      </p:sp>
+      <p:sp>
+        <p:nvSpPr>
+          <p:cNvPr id="51" name="Shape 49"/>
+          <p:cNvSpPr/>
+          <p:nvPr/>
+        </p:nvSpPr>
+        <p:spPr>
+          <a:xfrm>
+            <a:off x="9017813" y="4604004"/>
+            <a:ext cx="82296" cy="210312"/>
+          </a:xfrm>
+          <a:prstGeom prst="rect">
+            <a:avLst/>
+          </a:prstGeom>
+          <a:solidFill>
+            <a:srgbClr val="4A6B5D"/>
+          </a:solidFill>
+          <a:ln/>
+        </p:spPr>
+      </p:sp>
+      <p:sp>
+        <p:nvSpPr>
+          <p:cNvPr id="52" name="Shape 50"/>
+          <p:cNvSpPr/>
+          <p:nvPr/>
+        </p:nvSpPr>
+        <p:spPr>
+          <a:xfrm>
+            <a:off x="9239098" y="4629150"/>
+            <a:ext cx="82296" cy="160020"/>
+          </a:xfrm>
+          <a:prstGeom prst="rect">
+            <a:avLst/>
+          </a:prstGeom>
+          <a:solidFill>
+            <a:srgbClr val="4A6B5D"/>
+          </a:solidFill>
+          <a:ln/>
+        </p:spPr>
+      </p:sp>
+      <p:sp>
+        <p:nvSpPr>
+          <p:cNvPr id="53" name="Shape 51"/>
+          <p:cNvSpPr/>
+          <p:nvPr/>
+        </p:nvSpPr>
+        <p:spPr>
+          <a:xfrm>
+            <a:off x="9460382" y="4553712"/>
+            <a:ext cx="82296" cy="310896"/>
+          </a:xfrm>
+          <a:prstGeom prst="rect">
+            <a:avLst/>
+          </a:prstGeom>
+          <a:solidFill>
+            <a:srgbClr val="4A6B5D"/>
+          </a:solidFill>
+          <a:ln/>
+        </p:spPr>
+      </p:sp>
+      <p:sp>
+        <p:nvSpPr>
+          <p:cNvPr id="54" name="Shape 52"/>
+          <p:cNvSpPr/>
+          <p:nvPr/>
+        </p:nvSpPr>
+        <p:spPr>
+          <a:xfrm>
+            <a:off x="9681667" y="4478274"/>
+            <a:ext cx="82296" cy="461772"/>
+          </a:xfrm>
+          <a:prstGeom prst="rect">
+            <a:avLst/>
+          </a:prstGeom>
+          <a:solidFill>
+            <a:srgbClr val="4A6B5D"/>
+          </a:solidFill>
+          <a:ln/>
+        </p:spPr>
+      </p:sp>
+      <p:sp>
+        <p:nvSpPr>
+          <p:cNvPr id="55" name="Shape 53"/>
+          <p:cNvSpPr/>
+          <p:nvPr/>
+        </p:nvSpPr>
+        <p:spPr>
+          <a:xfrm>
+            <a:off x="9902952" y="4478274"/>
+            <a:ext cx="82296" cy="461772"/>
+          </a:xfrm>
+          <a:prstGeom prst="rect">
+            <a:avLst/>
+          </a:prstGeom>
+          <a:solidFill>
+            <a:srgbClr val="4A6B5D"/>
+          </a:solidFill>
+          <a:ln/>
+        </p:spPr>
+      </p:sp>
+      <p:sp>
+        <p:nvSpPr>
+          <p:cNvPr id="56" name="Shape 54"/>
+          <p:cNvSpPr/>
+          <p:nvPr/>
+        </p:nvSpPr>
+        <p:spPr>
+          <a:xfrm>
+            <a:off x="10124237" y="4553712"/>
+            <a:ext cx="82296" cy="310896"/>
+          </a:xfrm>
+          <a:prstGeom prst="rect">
+            <a:avLst/>
+          </a:prstGeom>
+          <a:solidFill>
+            <a:srgbClr val="4A6B5D"/>
+          </a:solidFill>
+          <a:ln/>
+        </p:spPr>
+      </p:sp>
+      <p:sp>
+        <p:nvSpPr>
+          <p:cNvPr id="57" name="Shape 55"/>
+          <p:cNvSpPr/>
+          <p:nvPr/>
+        </p:nvSpPr>
+        <p:spPr>
+          <a:xfrm>
+            <a:off x="10345522" y="4629150"/>
+            <a:ext cx="82296" cy="160020"/>
+          </a:xfrm>
+          <a:prstGeom prst="rect">
+            <a:avLst/>
+          </a:prstGeom>
+          <a:solidFill>
+            <a:srgbClr val="4A6B5D"/>
+          </a:solidFill>
+          <a:ln/>
+        </p:spPr>
+      </p:sp>
+      <p:sp>
+        <p:nvSpPr>
+          <p:cNvPr id="58" name="Shape 56"/>
+          <p:cNvSpPr/>
+          <p:nvPr/>
+        </p:nvSpPr>
+        <p:spPr>
+          <a:xfrm>
+            <a:off x="10566806" y="4604004"/>
+            <a:ext cx="82296" cy="210312"/>
+          </a:xfrm>
+          <a:prstGeom prst="rect">
+            <a:avLst/>
+          </a:prstGeom>
+          <a:solidFill>
+            <a:srgbClr val="4A6B5D"/>
+          </a:solidFill>
+          <a:ln/>
+        </p:spPr>
+      </p:sp>
+      <p:sp>
+        <p:nvSpPr>
+          <p:cNvPr id="59" name="Shape 57"/>
+          <p:cNvSpPr/>
+          <p:nvPr/>
+        </p:nvSpPr>
+        <p:spPr>
+          <a:xfrm>
+            <a:off x="10788091" y="4528566"/>
+            <a:ext cx="82296" cy="361188"/>
+          </a:xfrm>
+          <a:prstGeom prst="rect">
+            <a:avLst/>
+          </a:prstGeom>
+          <a:solidFill>
+            <a:srgbClr val="4A6B5D"/>
+          </a:solidFill>
+          <a:ln/>
+        </p:spPr>
+      </p:sp>
+      <p:sp>
+        <p:nvSpPr>
+          <p:cNvPr id="60" name="Shape 58"/>
+          <p:cNvSpPr/>
+          <p:nvPr/>
+        </p:nvSpPr>
+        <p:spPr>
+          <a:xfrm>
+            <a:off x="11009376" y="4453128"/>
+            <a:ext cx="82296" cy="512064"/>
+          </a:xfrm>
+          <a:prstGeom prst="rect">
+            <a:avLst/>
+          </a:prstGeom>
+          <a:solidFill>
+            <a:srgbClr val="4A6B5D"/>
+          </a:solidFill>
+          <a:ln/>
+        </p:spPr>
+      </p:sp>
+      <p:sp>
+        <p:nvSpPr>
+          <p:cNvPr id="61" name="Text 59"/>
+          <p:cNvSpPr/>
+          <p:nvPr/>
+        </p:nvSpPr>
+        <p:spPr>
+          <a:xfrm>
+            <a:off x="822960" y="5440680"/>
+            <a:ext cx="10543032" cy="548640"/>
+          </a:xfrm>
+          <a:prstGeom prst="rect">
+            <a:avLst/>
+          </a:prstGeom>
+          <a:noFill/>
+          <a:ln/>
+        </p:spPr>
+        <p:txBody>
+          <a:bodyPr wrap="square" lIns="0" tIns="0" rIns="0" bIns="0" rtlCol="0" anchor="t"/>
+          <a:lstStyle/>
+          <a:p>
+            <a:pPr indent="0" marL="0">
+              <a:lnSpc>
+                <a:spcPts val="2100"/>
+              </a:lnSpc>
+              <a:buNone/>
+            </a:pPr>
+            <a:r>
+              <a:rPr lang="en-US" sz="1550" dirty="0">
+                <a:solidFill>
+                  <a:srgbClr val="24313F"/>
+                </a:solidFill>
+                <a:latin typeface="Georgia" pitchFamily="34" charset="0"/>
+                <a:ea typeface="Georgia" pitchFamily="34" charset="-122"/>
+                <a:cs typeface="Georgia" pitchFamily="34" charset="-120"/>
+              </a:rPr>
+              <a:t>One song, unbroken, across two worlds: a sound bridge. Naming the crossing is worth more than naming either side, because the crossing is the decision.</a:t>
+            </a:r>
+            <a:endParaRPr lang="en-US" sz="1550" dirty="0"/>
+          </a:p>
+        </p:txBody>
+      </p:sp>
+      <p:sp>
+        <p:nvSpPr>
+          <p:cNvPr id="62" name="Shape 60"/>
+          <p:cNvSpPr/>
+          <p:nvPr/>
+        </p:nvSpPr>
+        <p:spPr>
+          <a:xfrm>
+            <a:off x="822960" y="6382512"/>
+            <a:ext cx="10543032" cy="0"/>
+          </a:xfrm>
+          <a:prstGeom prst="line">
+            <a:avLst/>
+          </a:prstGeom>
+          <a:noFill/>
+          <a:ln w="9525">
+            <a:solidFill>
+              <a:srgbClr val="D9D4C4"/>
+            </a:solidFill>
+            <a:prstDash val="solid"/>
+          </a:ln>
+        </p:spPr>
+      </p:sp>
+      <p:sp>
+        <p:nvSpPr>
+          <p:cNvPr id="63" name="Text 61"/>
+          <p:cNvSpPr/>
+          <p:nvPr/>
+        </p:nvSpPr>
+        <p:spPr>
+          <a:xfrm>
+            <a:off x="822960" y="6419088"/>
+            <a:ext cx="7315200" cy="274320"/>
+          </a:xfrm>
+          <a:prstGeom prst="rect">
+            <a:avLst/>
+          </a:prstGeom>
+          <a:noFill/>
+          <a:ln/>
+        </p:spPr>
+        <p:txBody>
+          <a:bodyPr wrap="square" lIns="0" tIns="0" rIns="0" bIns="0" rtlCol="0" anchor="ctr"/>
+          <a:lstStyle/>
+          <a:p>
+            <a:pPr indent="0" marL="0">
+              <a:buNone/>
+            </a:pPr>
+            <a:r>
+              <a:rPr lang="en-US" sz="900" spc="150" kern="0" dirty="0">
+                <a:solidFill>
+                  <a:srgbClr val="7A7F72"/>
+                </a:solidFill>
+                <a:latin typeface="Arial" pitchFamily="34" charset="0"/>
+                <a:ea typeface="Arial" pitchFamily="34" charset="-122"/>
+                <a:cs typeface="Arial" pitchFamily="34" charset="-120"/>
+              </a:rPr>
+              <a:t>MEDIA STUDIES 9607 · SEMESTER I</a:t>
+            </a:r>
+            <a:endParaRPr lang="en-US" sz="900" dirty="0"/>
+          </a:p>
+        </p:txBody>
+      </p:sp>
+      <p:sp>
+        <p:nvSpPr>
+          <p:cNvPr id="64" name="Text 62"/>
+          <p:cNvSpPr/>
+          <p:nvPr/>
+        </p:nvSpPr>
+        <p:spPr>
+          <a:xfrm>
+            <a:off x="10268712" y="6355080"/>
+            <a:ext cx="1097280" cy="365760"/>
+          </a:xfrm>
+          <a:prstGeom prst="rect">
+            <a:avLst/>
+          </a:prstGeom>
+          <a:noFill/>
+          <a:ln/>
+        </p:spPr>
+        <p:txBody>
+          <a:bodyPr wrap="square" lIns="0" tIns="0" rIns="0" bIns="0" rtlCol="0" anchor="ctr"/>
+          <a:lstStyle/>
+          <a:p>
+            <a:pPr algn="r" indent="0" marL="0">
+              <a:buNone/>
+            </a:pPr>
+            <a:r>
+              <a:rPr lang="en-US" sz="1600" dirty="0">
+                <a:solidFill>
+                  <a:srgbClr val="A3C1AD"/>
+                </a:solidFill>
+                <a:latin typeface="Georgia" pitchFamily="34" charset="0"/>
+                <a:ea typeface="Georgia" pitchFamily="34" charset="-122"/>
+                <a:cs typeface="Georgia" pitchFamily="34" charset="-120"/>
+              </a:rPr>
+              <a:t>04</a:t>
+            </a:r>
+            <a:endParaRPr lang="en-US" sz="1600" dirty="0"/>
+          </a:p>
+        </p:txBody>
+      </p:sp>
+    </p:spTree>
+  </p:cSld>
+  <p:clrMapOvr>
+    <a:masterClrMapping/>
+  </p:clrMapOvr>
+</p:sld>
+</file>
+
+<file path=ppt/slides/slide9.xml><?xml version="1.0" encoding="utf-8"?>
+<p:sld xmlns:a="http://schemas.openxmlformats.org/drawingml/2006/main" xmlns:r="http://schemas.openxmlformats.org/officeDocument/2006/relationships" xmlns:p="http://schemas.openxmlformats.org/presentationml/2006/main">
+  <p:cSld name="Slide 9">
     <p:bg>
       <p:bgPr>
         <a:solidFill>
@@ -6184,34 +9030,34 @@
         </p:nvSpPr>
         <p:spPr>
           <a:xfrm>
-            <a:off x="502920" y="548640"/>
-            <a:ext cx="1828800" cy="1828800"/>
-          </a:xfrm>
-          <a:prstGeom prst="rect">
-            <a:avLst/>
-          </a:prstGeom>
-          <a:noFill/>
-          <a:ln/>
-        </p:spPr>
-        <p:txBody>
-          <a:bodyPr wrap="square" lIns="0" tIns="0" rIns="0" bIns="0" rtlCol="0" anchor="t"/>
-          <a:lstStyle/>
-          <a:p>
-            <a:pPr indent="0" marL="0">
-              <a:buNone/>
-            </a:pPr>
-            <a:r>
-              <a:rPr lang="en-US" sz="20000" dirty="0">
-                <a:solidFill>
-                  <a:srgbClr val="A3C1AD"/>
-                </a:solidFill>
-                <a:latin typeface="Georgia" pitchFamily="34" charset="0"/>
-                <a:ea typeface="Georgia" pitchFamily="34" charset="-122"/>
-                <a:cs typeface="Georgia" pitchFamily="34" charset="-120"/>
-              </a:rPr>
-              <a:t>“</a:t>
-            </a:r>
-            <a:endParaRPr lang="en-US" sz="20000" dirty="0"/>
+            <a:off x="822960" y="1371600"/>
+            <a:ext cx="8229600" cy="274320"/>
+          </a:xfrm>
+          <a:prstGeom prst="rect">
+            <a:avLst/>
+          </a:prstGeom>
+          <a:noFill/>
+          <a:ln/>
+        </p:spPr>
+        <p:txBody>
+          <a:bodyPr wrap="square" lIns="0" tIns="0" rIns="0" bIns="0" rtlCol="0" anchor="ctr"/>
+          <a:lstStyle/>
+          <a:p>
+            <a:pPr algn="l" indent="0" marL="0">
+              <a:buNone/>
+            </a:pPr>
+            <a:r>
+              <a:rPr lang="en-US" sz="1100" b="1" spc="250" kern="0" dirty="0">
+                <a:solidFill>
+                  <a:srgbClr val="4A6B5D"/>
+                </a:solidFill>
+                <a:latin typeface="Arial" pitchFamily="34" charset="0"/>
+                <a:ea typeface="Arial" pitchFamily="34" charset="-122"/>
+                <a:cs typeface="Arial" pitchFamily="34" charset="-120"/>
+              </a:rPr>
+              <a:t>THE FASTEST PROOF IN THE COURSE</a:t>
+            </a:r>
+            <a:endParaRPr lang="en-US" sz="1100" dirty="0"/>
           </a:p>
         </p:txBody>
       </p:sp>
@@ -6223,7 +9069,7 @@
         </p:nvSpPr>
         <p:spPr>
           <a:xfrm>
-            <a:off x="822960" y="1737360"/>
+            <a:off x="822960" y="1874520"/>
             <a:ext cx="10424160" cy="2743200"/>
           </a:xfrm>
           <a:prstGeom prst="rect">
@@ -6359,740 +9205,6 @@
               <a:t>Watched twice, then one question: which of those choices did the audience make, and which were made for them? The recut trailer is the fastest proof that non-diegetic music is not decoration.</a:t>
             </a:r>
             <a:endParaRPr lang="en-US" sz="1400" dirty="0"/>
-          </a:p>
-        </p:txBody>
-      </p:sp>
-    </p:spTree>
-  </p:cSld>
-  <p:clrMapOvr>
-    <a:masterClrMapping/>
-  </p:clrMapOvr>
-</p:sld>
-</file>
-
-<file path=ppt/slides/slide9.xml><?xml version="1.0" encoding="utf-8"?>
-<p:sld xmlns:a="http://schemas.openxmlformats.org/drawingml/2006/main" xmlns:r="http://schemas.openxmlformats.org/officeDocument/2006/relationships" xmlns:p="http://schemas.openxmlformats.org/presentationml/2006/main">
-  <p:cSld name="Slide 9">
-    <p:bg>
-      <p:bgPr>
-        <a:solidFill>
-          <a:srgbClr val="FAF8F1"/>
-        </a:solidFill>
-      </p:bgPr>
-    </p:bg>
-    <p:spTree>
-      <p:nvGrpSpPr>
-        <p:cNvPr id="1" name=""/>
-        <p:cNvGrpSpPr/>
-        <p:nvPr/>
-      </p:nvGrpSpPr>
-      <p:grpSpPr>
-        <a:xfrm>
-          <a:off x="0" y="0"/>
-          <a:ext cx="0" cy="0"/>
-          <a:chOff x="0" y="0"/>
-          <a:chExt cx="0" cy="0"/>
-        </a:xfrm>
-      </p:grpSpPr>
-      <p:sp>
-        <p:nvSpPr>
-          <p:cNvPr id="2" name="Text 0"/>
-          <p:cNvSpPr/>
-          <p:nvPr/>
-        </p:nvSpPr>
-        <p:spPr>
-          <a:xfrm>
-            <a:off x="822960" y="457200"/>
-            <a:ext cx="6400800" cy="274320"/>
-          </a:xfrm>
-          <a:prstGeom prst="rect">
-            <a:avLst/>
-          </a:prstGeom>
-          <a:noFill/>
-          <a:ln/>
-        </p:spPr>
-        <p:txBody>
-          <a:bodyPr wrap="square" lIns="0" tIns="0" rIns="0" bIns="0" rtlCol="0" anchor="ctr"/>
-          <a:lstStyle/>
-          <a:p>
-            <a:pPr algn="l" indent="0" marL="0">
-              <a:buNone/>
-            </a:pPr>
-            <a:r>
-              <a:rPr lang="en-US" sz="1100" b="1" spc="250" kern="0" dirty="0">
-                <a:solidFill>
-                  <a:srgbClr val="4A6B5D"/>
-                </a:solidFill>
-                <a:latin typeface="Arial" pitchFamily="34" charset="0"/>
-                <a:ea typeface="Arial" pitchFamily="34" charset="-122"/>
-                <a:cs typeface="Arial" pitchFamily="34" charset="-120"/>
-              </a:rPr>
-              <a:t>FOLEY · TWENTY-FIVE MINUTES</a:t>
-            </a:r>
-            <a:endParaRPr lang="en-US" sz="1100" dirty="0"/>
-          </a:p>
-        </p:txBody>
-      </p:sp>
-      <p:sp>
-        <p:nvSpPr>
-          <p:cNvPr id="3" name="Text 1"/>
-          <p:cNvSpPr/>
-          <p:nvPr/>
-        </p:nvSpPr>
-        <p:spPr>
-          <a:xfrm>
-            <a:off x="6793992" y="457200"/>
-            <a:ext cx="4572000" cy="274320"/>
-          </a:xfrm>
-          <a:prstGeom prst="rect">
-            <a:avLst/>
-          </a:prstGeom>
-          <a:noFill/>
-          <a:ln/>
-        </p:spPr>
-        <p:txBody>
-          <a:bodyPr wrap="square" lIns="0" tIns="0" rIns="0" bIns="0" rtlCol="0" anchor="ctr"/>
-          <a:lstStyle/>
-          <a:p>
-            <a:pPr algn="r" indent="0" marL="0">
-              <a:buNone/>
-            </a:pPr>
-            <a:r>
-              <a:rPr lang="en-US" sz="1100" b="1" spc="250" kern="0" dirty="0">
-                <a:solidFill>
-                  <a:srgbClr val="7A7F72"/>
-                </a:solidFill>
-                <a:latin typeface="Arial" pitchFamily="34" charset="0"/>
-                <a:ea typeface="Arial" pitchFamily="34" charset="-122"/>
-                <a:cs typeface="Arial" pitchFamily="34" charset="-120"/>
-              </a:rPr>
-              <a:t>PHONES RECORDING, HEADPHONES ON</a:t>
-            </a:r>
-            <a:endParaRPr lang="en-US" sz="1100" dirty="0"/>
-          </a:p>
-        </p:txBody>
-      </p:sp>
-      <p:sp>
-        <p:nvSpPr>
-          <p:cNvPr id="4" name="Shape 2"/>
-          <p:cNvSpPr/>
-          <p:nvPr/>
-        </p:nvSpPr>
-        <p:spPr>
-          <a:xfrm>
-            <a:off x="822960" y="786384"/>
-            <a:ext cx="10543032" cy="0"/>
-          </a:xfrm>
-          <a:prstGeom prst="line">
-            <a:avLst/>
-          </a:prstGeom>
-          <a:noFill/>
-          <a:ln w="9525">
-            <a:solidFill>
-              <a:srgbClr val="D9D4C4"/>
-            </a:solidFill>
-            <a:prstDash val="solid"/>
-          </a:ln>
-        </p:spPr>
-      </p:sp>
-      <p:sp>
-        <p:nvSpPr>
-          <p:cNvPr id="5" name="Text 3"/>
-          <p:cNvSpPr/>
-          <p:nvPr/>
-        </p:nvSpPr>
-        <p:spPr>
-          <a:xfrm>
-            <a:off x="822960" y="932688"/>
-            <a:ext cx="10543032" cy="640080"/>
-          </a:xfrm>
-          <a:prstGeom prst="rect">
-            <a:avLst/>
-          </a:prstGeom>
-          <a:noFill/>
-          <a:ln/>
-        </p:spPr>
-        <p:txBody>
-          <a:bodyPr wrap="square" lIns="0" tIns="0" rIns="0" bIns="0" rtlCol="0" anchor="ctr"/>
-          <a:lstStyle/>
-          <a:p>
-            <a:pPr indent="0" marL="0">
-              <a:buNone/>
-            </a:pPr>
-            <a:r>
-              <a:rPr lang="en-US" sz="3200" dirty="0">
-                <a:solidFill>
-                  <a:srgbClr val="24313F"/>
-                </a:solidFill>
-                <a:latin typeface="Georgia" pitchFamily="34" charset="0"/>
-                <a:ea typeface="Georgia" pitchFamily="34" charset="-122"/>
-                <a:cs typeface="Georgia" pitchFamily="34" charset="-120"/>
-              </a:rPr>
-              <a:t>It does not have to be the real thing</a:t>
-            </a:r>
-            <a:endParaRPr lang="en-US" sz="3200" dirty="0"/>
-          </a:p>
-        </p:txBody>
-      </p:sp>
-      <p:sp>
-        <p:nvSpPr>
-          <p:cNvPr id="6" name="Text 4"/>
-          <p:cNvSpPr/>
-          <p:nvPr/>
-        </p:nvSpPr>
-        <p:spPr>
-          <a:xfrm>
-            <a:off x="822960" y="1691640"/>
-            <a:ext cx="10241280" cy="822960"/>
-          </a:xfrm>
-          <a:prstGeom prst="rect">
-            <a:avLst/>
-          </a:prstGeom>
-          <a:noFill/>
-          <a:ln/>
-        </p:spPr>
-        <p:txBody>
-          <a:bodyPr wrap="square" lIns="0" tIns="0" rIns="0" bIns="0" rtlCol="0" anchor="t"/>
-          <a:lstStyle/>
-          <a:p>
-            <a:pPr indent="0" marL="0">
-              <a:lnSpc>
-                <a:spcPts val="2500"/>
-              </a:lnSpc>
-              <a:buNone/>
-            </a:pPr>
-            <a:r>
-              <a:rPr lang="en-US" sz="1800" i="1" dirty="0">
-                <a:solidFill>
-                  <a:srgbClr val="4A6B5D"/>
-                </a:solidFill>
-                <a:latin typeface="Georgia" pitchFamily="34" charset="0"/>
-                <a:ea typeface="Georgia" pitchFamily="34" charset="-122"/>
-                <a:cs typeface="Georgia" pitchFamily="34" charset="-120"/>
-              </a:rPr>
-              <a:t>Cambridge defines it precisely: incidental sound effects which are created artificially to enhance the drama, but which are diegetic, that is, they exist within the world of the film.</a:t>
-            </a:r>
-            <a:endParaRPr lang="en-US" sz="1800" dirty="0"/>
-          </a:p>
-        </p:txBody>
-      </p:sp>
-      <p:sp>
-        <p:nvSpPr>
-          <p:cNvPr id="7" name="Shape 5"/>
-          <p:cNvSpPr/>
-          <p:nvPr/>
-        </p:nvSpPr>
-        <p:spPr>
-          <a:xfrm>
-            <a:off x="822960" y="2743200"/>
-            <a:ext cx="3291840" cy="658368"/>
-          </a:xfrm>
-          <a:prstGeom prst="rect">
-            <a:avLst/>
-          </a:prstGeom>
-          <a:solidFill>
-            <a:srgbClr val="E8EFE7"/>
-          </a:solidFill>
-          <a:ln/>
-        </p:spPr>
-      </p:sp>
-      <p:sp>
-        <p:nvSpPr>
-          <p:cNvPr id="8" name="Text 6"/>
-          <p:cNvSpPr/>
-          <p:nvPr/>
-        </p:nvSpPr>
-        <p:spPr>
-          <a:xfrm>
-            <a:off x="1024128" y="2743200"/>
-            <a:ext cx="2926080" cy="658368"/>
-          </a:xfrm>
-          <a:prstGeom prst="rect">
-            <a:avLst/>
-          </a:prstGeom>
-          <a:noFill/>
-          <a:ln/>
-        </p:spPr>
-        <p:txBody>
-          <a:bodyPr wrap="square" lIns="0" tIns="0" rIns="0" bIns="0" rtlCol="0" anchor="ctr"/>
-          <a:lstStyle/>
-          <a:p>
-            <a:pPr indent="0" marL="0">
-              <a:buNone/>
-            </a:pPr>
-            <a:r>
-              <a:rPr lang="en-US" sz="1550" dirty="0">
-                <a:solidFill>
-                  <a:srgbClr val="24313F"/>
-                </a:solidFill>
-                <a:latin typeface="Georgia" pitchFamily="34" charset="0"/>
-                <a:ea typeface="Georgia" pitchFamily="34" charset="-122"/>
-                <a:cs typeface="Georgia" pitchFamily="34" charset="-120"/>
-              </a:rPr>
-              <a:t>Footsteps, three surfaces</a:t>
-            </a:r>
-            <a:endParaRPr lang="en-US" sz="1550" dirty="0"/>
-          </a:p>
-        </p:txBody>
-      </p:sp>
-      <p:sp>
-        <p:nvSpPr>
-          <p:cNvPr id="9" name="Shape 7"/>
-          <p:cNvSpPr/>
-          <p:nvPr/>
-        </p:nvSpPr>
-        <p:spPr>
-          <a:xfrm>
-            <a:off x="4389120" y="2743200"/>
-            <a:ext cx="3291840" cy="658368"/>
-          </a:xfrm>
-          <a:prstGeom prst="rect">
-            <a:avLst/>
-          </a:prstGeom>
-          <a:solidFill>
-            <a:srgbClr val="E8EFE7"/>
-          </a:solidFill>
-          <a:ln/>
-        </p:spPr>
-      </p:sp>
-      <p:sp>
-        <p:nvSpPr>
-          <p:cNvPr id="10" name="Text 8"/>
-          <p:cNvSpPr/>
-          <p:nvPr/>
-        </p:nvSpPr>
-        <p:spPr>
-          <a:xfrm>
-            <a:off x="4590288" y="2743200"/>
-            <a:ext cx="2926080" cy="658368"/>
-          </a:xfrm>
-          <a:prstGeom prst="rect">
-            <a:avLst/>
-          </a:prstGeom>
-          <a:noFill/>
-          <a:ln/>
-        </p:spPr>
-        <p:txBody>
-          <a:bodyPr wrap="square" lIns="0" tIns="0" rIns="0" bIns="0" rtlCol="0" anchor="ctr"/>
-          <a:lstStyle/>
-          <a:p>
-            <a:pPr indent="0" marL="0">
-              <a:buNone/>
-            </a:pPr>
-            <a:r>
-              <a:rPr lang="en-US" sz="1550" dirty="0">
-                <a:solidFill>
-                  <a:srgbClr val="24313F"/>
-                </a:solidFill>
-                <a:latin typeface="Georgia" pitchFamily="34" charset="0"/>
-                <a:ea typeface="Georgia" pitchFamily="34" charset="-122"/>
-                <a:cs typeface="Georgia" pitchFamily="34" charset="-120"/>
-              </a:rPr>
-              <a:t>A door, opened slowly and fast</a:t>
-            </a:r>
-            <a:endParaRPr lang="en-US" sz="1550" dirty="0"/>
-          </a:p>
-        </p:txBody>
-      </p:sp>
-      <p:sp>
-        <p:nvSpPr>
-          <p:cNvPr id="11" name="Shape 9"/>
-          <p:cNvSpPr/>
-          <p:nvPr/>
-        </p:nvSpPr>
-        <p:spPr>
-          <a:xfrm>
-            <a:off x="7955280" y="2743200"/>
-            <a:ext cx="3291840" cy="658368"/>
-          </a:xfrm>
-          <a:prstGeom prst="rect">
-            <a:avLst/>
-          </a:prstGeom>
-          <a:solidFill>
-            <a:srgbClr val="E8EFE7"/>
-          </a:solidFill>
-          <a:ln/>
-        </p:spPr>
-      </p:sp>
-      <p:sp>
-        <p:nvSpPr>
-          <p:cNvPr id="12" name="Text 10"/>
-          <p:cNvSpPr/>
-          <p:nvPr/>
-        </p:nvSpPr>
-        <p:spPr>
-          <a:xfrm>
-            <a:off x="8156448" y="2743200"/>
-            <a:ext cx="2926080" cy="658368"/>
-          </a:xfrm>
-          <a:prstGeom prst="rect">
-            <a:avLst/>
-          </a:prstGeom>
-          <a:noFill/>
-          <a:ln/>
-        </p:spPr>
-        <p:txBody>
-          <a:bodyPr wrap="square" lIns="0" tIns="0" rIns="0" bIns="0" rtlCol="0" anchor="ctr"/>
-          <a:lstStyle/>
-          <a:p>
-            <a:pPr indent="0" marL="0">
-              <a:buNone/>
-            </a:pPr>
-            <a:r>
-              <a:rPr lang="en-US" sz="1550" dirty="0">
-                <a:solidFill>
-                  <a:srgbClr val="24313F"/>
-                </a:solidFill>
-                <a:latin typeface="Georgia" pitchFamily="34" charset="0"/>
-                <a:ea typeface="Georgia" pitchFamily="34" charset="-122"/>
-                <a:cs typeface="Georgia" pitchFamily="34" charset="-120"/>
-              </a:rPr>
-              <a:t>Cloth movement, close to the mic</a:t>
-            </a:r>
-            <a:endParaRPr lang="en-US" sz="1550" dirty="0"/>
-          </a:p>
-        </p:txBody>
-      </p:sp>
-      <p:sp>
-        <p:nvSpPr>
-          <p:cNvPr id="13" name="Shape 11"/>
-          <p:cNvSpPr/>
-          <p:nvPr/>
-        </p:nvSpPr>
-        <p:spPr>
-          <a:xfrm>
-            <a:off x="822960" y="3611880"/>
-            <a:ext cx="3291840" cy="658368"/>
-          </a:xfrm>
-          <a:prstGeom prst="rect">
-            <a:avLst/>
-          </a:prstGeom>
-          <a:solidFill>
-            <a:srgbClr val="E8EFE7"/>
-          </a:solidFill>
-          <a:ln/>
-        </p:spPr>
-      </p:sp>
-      <p:sp>
-        <p:nvSpPr>
-          <p:cNvPr id="14" name="Text 12"/>
-          <p:cNvSpPr/>
-          <p:nvPr/>
-        </p:nvSpPr>
-        <p:spPr>
-          <a:xfrm>
-            <a:off x="1024128" y="3611880"/>
-            <a:ext cx="2926080" cy="658368"/>
-          </a:xfrm>
-          <a:prstGeom prst="rect">
-            <a:avLst/>
-          </a:prstGeom>
-          <a:noFill/>
-          <a:ln/>
-        </p:spPr>
-        <p:txBody>
-          <a:bodyPr wrap="square" lIns="0" tIns="0" rIns="0" bIns="0" rtlCol="0" anchor="ctr"/>
-          <a:lstStyle/>
-          <a:p>
-            <a:pPr indent="0" marL="0">
-              <a:buNone/>
-            </a:pPr>
-            <a:r>
-              <a:rPr lang="en-US" sz="1550" dirty="0">
-                <a:solidFill>
-                  <a:srgbClr val="24313F"/>
-                </a:solidFill>
-                <a:latin typeface="Georgia" pitchFamily="34" charset="0"/>
-                <a:ea typeface="Georgia" pitchFamily="34" charset="-122"/>
-                <a:cs typeface="Georgia" pitchFamily="34" charset="-120"/>
-              </a:rPr>
-              <a:t>A punch</a:t>
-            </a:r>
-            <a:endParaRPr lang="en-US" sz="1550" dirty="0"/>
-          </a:p>
-        </p:txBody>
-      </p:sp>
-      <p:sp>
-        <p:nvSpPr>
-          <p:cNvPr id="15" name="Shape 13"/>
-          <p:cNvSpPr/>
-          <p:nvPr/>
-        </p:nvSpPr>
-        <p:spPr>
-          <a:xfrm>
-            <a:off x="4389120" y="3611880"/>
-            <a:ext cx="3291840" cy="658368"/>
-          </a:xfrm>
-          <a:prstGeom prst="rect">
-            <a:avLst/>
-          </a:prstGeom>
-          <a:solidFill>
-            <a:srgbClr val="E8EFE7"/>
-          </a:solidFill>
-          <a:ln/>
-        </p:spPr>
-      </p:sp>
-      <p:sp>
-        <p:nvSpPr>
-          <p:cNvPr id="16" name="Text 14"/>
-          <p:cNvSpPr/>
-          <p:nvPr/>
-        </p:nvSpPr>
-        <p:spPr>
-          <a:xfrm>
-            <a:off x="4590288" y="3611880"/>
-            <a:ext cx="2926080" cy="658368"/>
-          </a:xfrm>
-          <a:prstGeom prst="rect">
-            <a:avLst/>
-          </a:prstGeom>
-          <a:noFill/>
-          <a:ln/>
-        </p:spPr>
-        <p:txBody>
-          <a:bodyPr wrap="square" lIns="0" tIns="0" rIns="0" bIns="0" rtlCol="0" anchor="ctr"/>
-          <a:lstStyle/>
-          <a:p>
-            <a:pPr indent="0" marL="0">
-              <a:buNone/>
-            </a:pPr>
-            <a:r>
-              <a:rPr lang="en-US" sz="1550" dirty="0">
-                <a:solidFill>
-                  <a:srgbClr val="24313F"/>
-                </a:solidFill>
-                <a:latin typeface="Georgia" pitchFamily="34" charset="0"/>
-                <a:ea typeface="Georgia" pitchFamily="34" charset="-122"/>
-                <a:cs typeface="Georgia" pitchFamily="34" charset="-120"/>
-              </a:rPr>
-              <a:t>Liquid poured</a:t>
-            </a:r>
-            <a:endParaRPr lang="en-US" sz="1550" dirty="0"/>
-          </a:p>
-        </p:txBody>
-      </p:sp>
-      <p:sp>
-        <p:nvSpPr>
-          <p:cNvPr id="17" name="Shape 15"/>
-          <p:cNvSpPr/>
-          <p:nvPr/>
-        </p:nvSpPr>
-        <p:spPr>
-          <a:xfrm>
-            <a:off x="7955280" y="3611880"/>
-            <a:ext cx="3291840" cy="658368"/>
-          </a:xfrm>
-          <a:prstGeom prst="rect">
-            <a:avLst/>
-          </a:prstGeom>
-          <a:solidFill>
-            <a:srgbClr val="E8EFE7"/>
-          </a:solidFill>
-          <a:ln/>
-        </p:spPr>
-      </p:sp>
-      <p:sp>
-        <p:nvSpPr>
-          <p:cNvPr id="18" name="Text 16"/>
-          <p:cNvSpPr/>
-          <p:nvPr/>
-        </p:nvSpPr>
-        <p:spPr>
-          <a:xfrm>
-            <a:off x="8156448" y="3611880"/>
-            <a:ext cx="2926080" cy="658368"/>
-          </a:xfrm>
-          <a:prstGeom prst="rect">
-            <a:avLst/>
-          </a:prstGeom>
-          <a:noFill/>
-          <a:ln/>
-        </p:spPr>
-        <p:txBody>
-          <a:bodyPr wrap="square" lIns="0" tIns="0" rIns="0" bIns="0" rtlCol="0" anchor="ctr"/>
-          <a:lstStyle/>
-          <a:p>
-            <a:pPr indent="0" marL="0">
-              <a:buNone/>
-            </a:pPr>
-            <a:r>
-              <a:rPr lang="en-US" sz="1550" dirty="0">
-                <a:solidFill>
-                  <a:srgbClr val="24313F"/>
-                </a:solidFill>
-                <a:latin typeface="Georgia" pitchFamily="34" charset="0"/>
-                <a:ea typeface="Georgia" pitchFamily="34" charset="-122"/>
-                <a:cs typeface="Georgia" pitchFamily="34" charset="-120"/>
-              </a:rPr>
-              <a:t>Breath, gasp, hesitation</a:t>
-            </a:r>
-            <a:endParaRPr lang="en-US" sz="1550" dirty="0"/>
-          </a:p>
-        </p:txBody>
-      </p:sp>
-      <p:sp>
-        <p:nvSpPr>
-          <p:cNvPr id="19" name="Shape 17"/>
-          <p:cNvSpPr/>
-          <p:nvPr/>
-        </p:nvSpPr>
-        <p:spPr>
-          <a:xfrm>
-            <a:off x="822960" y="4709160"/>
-            <a:ext cx="914400" cy="0"/>
-          </a:xfrm>
-          <a:prstGeom prst="line">
-            <a:avLst/>
-          </a:prstGeom>
-          <a:noFill/>
-          <a:ln w="31750">
-            <a:solidFill>
-              <a:srgbClr val="8C3A38"/>
-            </a:solidFill>
-            <a:prstDash val="solid"/>
-          </a:ln>
-        </p:spPr>
-      </p:sp>
-      <p:sp>
-        <p:nvSpPr>
-          <p:cNvPr id="20" name="Text 18"/>
-          <p:cNvSpPr/>
-          <p:nvPr/>
-        </p:nvSpPr>
-        <p:spPr>
-          <a:xfrm>
-            <a:off x="822960" y="4892040"/>
-            <a:ext cx="10424160" cy="640080"/>
-          </a:xfrm>
-          <a:prstGeom prst="rect">
-            <a:avLst/>
-          </a:prstGeom>
-          <a:noFill/>
-          <a:ln/>
-        </p:spPr>
-        <p:txBody>
-          <a:bodyPr wrap="square" lIns="0" tIns="0" rIns="0" bIns="0" rtlCol="0" anchor="t"/>
-          <a:lstStyle/>
-          <a:p>
-            <a:pPr indent="0" marL="0">
-              <a:lnSpc>
-                <a:spcPts val="2200"/>
-              </a:lnSpc>
-              <a:buNone/>
-            </a:pPr>
-            <a:r>
-              <a:rPr lang="en-US" sz="1700" i="1" dirty="0">
-                <a:solidFill>
-                  <a:srgbClr val="4A6B5D"/>
-                </a:solidFill>
-                <a:latin typeface="Georgia" pitchFamily="34" charset="0"/>
-                <a:ea typeface="Georgia" pitchFamily="34" charset="-122"/>
-                <a:cs typeface="Georgia" pitchFamily="34" charset="-120"/>
-              </a:rPr>
-              <a:t>The habit taught here and policed at every shoot afterwards: headphones on for every take, and the mic as close as the frame allows. Unusable audio cannot be fixed later.</a:t>
-            </a:r>
-            <a:endParaRPr lang="en-US" sz="1700" dirty="0"/>
-          </a:p>
-        </p:txBody>
-      </p:sp>
-      <p:sp>
-        <p:nvSpPr>
-          <p:cNvPr id="21" name="Shape 19"/>
-          <p:cNvSpPr/>
-          <p:nvPr/>
-        </p:nvSpPr>
-        <p:spPr>
-          <a:xfrm>
-            <a:off x="822960" y="6382512"/>
-            <a:ext cx="10543032" cy="0"/>
-          </a:xfrm>
-          <a:prstGeom prst="line">
-            <a:avLst/>
-          </a:prstGeom>
-          <a:noFill/>
-          <a:ln w="9525">
-            <a:solidFill>
-              <a:srgbClr val="D9D4C4"/>
-            </a:solidFill>
-            <a:prstDash val="solid"/>
-          </a:ln>
-        </p:spPr>
-      </p:sp>
-      <p:sp>
-        <p:nvSpPr>
-          <p:cNvPr id="22" name="Text 20"/>
-          <p:cNvSpPr/>
-          <p:nvPr/>
-        </p:nvSpPr>
-        <p:spPr>
-          <a:xfrm>
-            <a:off x="822960" y="6419088"/>
-            <a:ext cx="7315200" cy="274320"/>
-          </a:xfrm>
-          <a:prstGeom prst="rect">
-            <a:avLst/>
-          </a:prstGeom>
-          <a:noFill/>
-          <a:ln/>
-        </p:spPr>
-        <p:txBody>
-          <a:bodyPr wrap="square" lIns="0" tIns="0" rIns="0" bIns="0" rtlCol="0" anchor="ctr"/>
-          <a:lstStyle/>
-          <a:p>
-            <a:pPr indent="0" marL="0">
-              <a:buNone/>
-            </a:pPr>
-            <a:r>
-              <a:rPr lang="en-US" sz="900" spc="150" kern="0" dirty="0">
-                <a:solidFill>
-                  <a:srgbClr val="7A7F72"/>
-                </a:solidFill>
-                <a:latin typeface="Arial" pitchFamily="34" charset="0"/>
-                <a:ea typeface="Arial" pitchFamily="34" charset="-122"/>
-                <a:cs typeface="Arial" pitchFamily="34" charset="-120"/>
-              </a:rPr>
-              <a:t>MEDIA STUDIES 9607 · SEMESTER I</a:t>
-            </a:r>
-            <a:endParaRPr lang="en-US" sz="900" dirty="0"/>
-          </a:p>
-        </p:txBody>
-      </p:sp>
-      <p:sp>
-        <p:nvSpPr>
-          <p:cNvPr id="23" name="Text 21"/>
-          <p:cNvSpPr/>
-          <p:nvPr/>
-        </p:nvSpPr>
-        <p:spPr>
-          <a:xfrm>
-            <a:off x="10268712" y="6355080"/>
-            <a:ext cx="1097280" cy="365760"/>
-          </a:xfrm>
-          <a:prstGeom prst="rect">
-            <a:avLst/>
-          </a:prstGeom>
-          <a:noFill/>
-          <a:ln/>
-        </p:spPr>
-        <p:txBody>
-          <a:bodyPr wrap="square" lIns="0" tIns="0" rIns="0" bIns="0" rtlCol="0" anchor="ctr"/>
-          <a:lstStyle/>
-          <a:p>
-            <a:pPr algn="r" indent="0" marL="0">
-              <a:buNone/>
-            </a:pPr>
-            <a:r>
-              <a:rPr lang="en-US" sz="1600" dirty="0">
-                <a:solidFill>
-                  <a:srgbClr val="A3C1AD"/>
-                </a:solidFill>
-                <a:latin typeface="Georgia" pitchFamily="34" charset="0"/>
-                <a:ea typeface="Georgia" pitchFamily="34" charset="-122"/>
-                <a:cs typeface="Georgia" pitchFamily="34" charset="-120"/>
-              </a:rPr>
-              <a:t>04</a:t>
-            </a:r>
-            <a:endParaRPr lang="en-US" sz="1600" dirty="0"/>
           </a:p>
         </p:txBody>
       </p:sp>

--- a/content/decks/media-studies/media-studies-s1-lesson-04-sound.pptx
+++ b/content/decks/media-studies/media-studies-s1-lesson-04-sound.pptx
@@ -2853,7 +2853,7 @@
         <p:spPr>
           <a:xfrm>
             <a:off x="822960" y="4892040"/>
-            <a:ext cx="10424160" cy="640080"/>
+            <a:ext cx="10424160" cy="411480"/>
           </a:xfrm>
           <a:prstGeom prst="rect">
             <a:avLst/>
@@ -2867,12 +2867,29 @@
           <a:p>
             <a:pPr indent="0" marL="0">
               <a:lnSpc>
-                <a:spcPts val="2200"/>
+                <a:spcPts val="2100"/>
               </a:lnSpc>
               <a:buNone/>
             </a:pPr>
             <a:r>
-              <a:rPr lang="en-US" sz="1700" i="1" dirty="0">
+              <a:rPr lang="en-US" sz="1400" b="1" spc="100" kern="0" dirty="0">
+                <a:solidFill>
+                  <a:srgbClr val="4A6B5D"/>
+                </a:solidFill>
+                <a:latin typeface="Arial" pitchFamily="34" charset="0"/>
+                <a:ea typeface="Arial" pitchFamily="34" charset="-122"/>
+                <a:cs typeface="Arial" pitchFamily="34" charset="-120"/>
+              </a:rPr>
+              <a:t>THE HABIT   </a:t>
+            </a:r>
+            <a:pPr indent="0" marL="0">
+              <a:lnSpc>
+                <a:spcPts val="2100"/>
+              </a:lnSpc>
+              <a:buNone/>
+            </a:pPr>
+            <a:r>
+              <a:rPr lang="en-US" sz="1600" i="1" dirty="0">
                 <a:solidFill>
                   <a:srgbClr val="4A6B5D"/>
                 </a:solidFill>
@@ -2880,9 +2897,9 @@
                 <a:ea typeface="Georgia" pitchFamily="34" charset="-122"/>
                 <a:cs typeface="Georgia" pitchFamily="34" charset="-120"/>
               </a:rPr>
-              <a:t>The habit taught here and policed at every shoot afterwards: headphones on for every take, and the mic as close as the frame allows. Unusable audio cannot be fixed later.</a:t>
-            </a:r>
-            <a:endParaRPr lang="en-US" sz="1700" dirty="0"/>
+              <a:t>Headphones on for every take. Mic as close as the frame allows. Bad audio cannot be fixed later.</a:t>
+            </a:r>
+            <a:endParaRPr lang="en-US" sz="1400" dirty="0"/>
           </a:p>
         </p:txBody>
       </p:sp>
@@ -3329,7 +3346,7 @@
                 <a:ea typeface="Georgia" pitchFamily="34" charset="-122"/>
                 <a:cs typeface="Georgia" pitchFamily="34" charset="-120"/>
               </a:rPr>
-              <a:t>The boom exists to buy distance: the mic rides just outside the frame, as close as the shot allows. On your shoots the phone is the mic, and the habit is identical: monitor on headphones, every take, and move the mic, not the gain.</a:t>
+              <a:t>The boom pole holds the mic just outside the frame, as close as possible. On your shoots, the phone is the mic, and the habit is the same: listen on headphones during every take. If the sound is weak, move the mic closer. Do not turn the volume up.</a:t>
             </a:r>
             <a:endParaRPr lang="en-US" sz="1450" dirty="0"/>
           </a:p>
@@ -3654,12 +3671,29 @@
           <a:p>
             <a:pPr indent="0" marL="0">
               <a:lnSpc>
-                <a:spcPts val="2300"/>
+                <a:spcPts val="2200"/>
               </a:lnSpc>
               <a:buNone/>
             </a:pPr>
             <a:r>
-              <a:rPr lang="en-US" sz="1650" dirty="0">
+              <a:rPr lang="en-US" sz="1350" b="1" spc="100" kern="0" dirty="0">
+                <a:solidFill>
+                  <a:srgbClr val="4A6B5D"/>
+                </a:solidFill>
+                <a:latin typeface="Arial" pitchFamily="34" charset="0"/>
+                <a:ea typeface="Arial" pitchFamily="34" charset="-122"/>
+                <a:cs typeface="Arial" pitchFamily="34" charset="-120"/>
+              </a:rPr>
+              <a:t>TASK   </a:t>
+            </a:r>
+            <a:pPr indent="0" marL="0">
+              <a:lnSpc>
+                <a:spcPts val="2200"/>
+              </a:lnSpc>
+              <a:buNone/>
+            </a:pPr>
+            <a:r>
+              <a:rPr lang="en-US" sz="1550" dirty="0">
                 <a:solidFill>
                   <a:srgbClr val="24313F"/>
                 </a:solidFill>
@@ -3667,9 +3701,9 @@
                 <a:ea typeface="Georgia" pitchFamily="34" charset="-122"/>
                 <a:cs typeface="Georgia" pitchFamily="34" charset="-120"/>
               </a:rPr>
-              <a:t>Built from your own recordings, the foley takes, and one non-diegetic element. Four things must be in it:</a:t>
-            </a:r>
-            <a:endParaRPr lang="en-US" sz="1650" dirty="0"/>
+              <a:t>Build it from your own recordings and the foley takes, plus one non-diegetic element. It must include:</a:t>
+            </a:r>
+            <a:endParaRPr lang="en-US" sz="1350" dirty="0"/>
           </a:p>
         </p:txBody>
       </p:sp>
@@ -3785,7 +3819,7 @@
                 <a:ea typeface="Georgia" pitchFamily="34" charset="-122"/>
                 <a:cs typeface="Georgia" pitchFamily="34" charset="-120"/>
               </a:rPr>
-              <a:t>One clearly non-diegetic</a:t>
+              <a:t>One clearly non-diegetic sound</a:t>
             </a:r>
             <a:endParaRPr lang="en-US" sz="1600" dirty="0"/>
           </a:p>
@@ -3844,7 +3878,7 @@
                 <a:ea typeface="Georgia" pitchFamily="34" charset="-122"/>
                 <a:cs typeface="Georgia" pitchFamily="34" charset="-120"/>
               </a:rPr>
-              <a:t>One with a near or far perspective</a:t>
+              <a:t>One sound with clear perspective (near or far)</a:t>
             </a:r>
             <a:endParaRPr lang="en-US" sz="1600" dirty="0"/>
           </a:p>
@@ -3903,7 +3937,7 @@
                 <a:ea typeface="Georgia" pitchFamily="34" charset="-122"/>
                 <a:cs typeface="Georgia" pitchFamily="34" charset="-120"/>
               </a:rPr>
-              <a:t>One carrying across an implied cut, as a bridge</a:t>
+              <a:t>One sound bridge across an implied cut</a:t>
             </a:r>
             <a:endParaRPr lang="en-US" sz="1600" dirty="0"/>
           </a:p>
@@ -3918,7 +3952,7 @@
         <p:spPr>
           <a:xfrm>
             <a:off x="822960" y="5257800"/>
-            <a:ext cx="6675120" cy="822960"/>
+            <a:ext cx="6675120" cy="685800"/>
           </a:xfrm>
           <a:prstGeom prst="rect">
             <a:avLst/>
@@ -3937,17 +3971,71 @@
               <a:buNone/>
             </a:pPr>
             <a:r>
-              <a:rPr lang="en-US" sz="1200" dirty="0">
-                <a:solidFill>
-                  <a:srgbClr val="7A7F72"/>
+              <a:rPr lang="en-US" sz="1000" b="1" spc="100" kern="0" dirty="0">
+                <a:solidFill>
+                  <a:srgbClr val="4A6B5D"/>
                 </a:solidFill>
                 <a:latin typeface="Arial" pitchFamily="34" charset="0"/>
                 <a:ea typeface="Arial" pitchFamily="34" charset="-122"/>
                 <a:cs typeface="Arial" pitchFamily="34" charset="-120"/>
               </a:rPr>
-              <a:t>Posted and dated on the blog with a rationale naming every choice by its term and saying what it is meant to do to the listener. Marked on terminology and intention, not on polish.</a:t>
-            </a:r>
-            <a:endParaRPr lang="en-US" sz="1200" dirty="0"/>
+              <a:t>THE BLOG   </a:t>
+            </a:r>
+            <a:pPr indent="0" marL="0">
+              <a:lnSpc>
+                <a:spcPts val="1600"/>
+              </a:lnSpc>
+              <a:buNone/>
+            </a:pPr>
+            <a:r>
+              <a:rPr lang="en-US" sz="1200" dirty="0">
+                <a:solidFill>
+                  <a:srgbClr val="24313F"/>
+                </a:solidFill>
+                <a:latin typeface="Georgia" pitchFamily="34" charset="0"/>
+                <a:ea typeface="Georgia" pitchFamily="34" charset="-122"/>
+                <a:cs typeface="Georgia" pitchFamily="34" charset="-120"/>
+              </a:rPr>
+              <a:t>Post it, dated, with a short rationale: name each choice by its term, and say what it does to the listener.</a:t>
+            </a:r>
+            <a:endParaRPr lang="en-US" sz="1000" dirty="0"/>
+          </a:p>
+          <a:p>
+            <a:pPr indent="0" marL="0">
+              <a:lnSpc>
+                <a:spcPts val="1600"/>
+              </a:lnSpc>
+              <a:buNone/>
+            </a:pPr>
+            <a:r>
+              <a:rPr lang="en-US" sz="1000" b="1" spc="100" kern="0" dirty="0">
+                <a:solidFill>
+                  <a:srgbClr val="4A6B5D"/>
+                </a:solidFill>
+                <a:latin typeface="Arial" pitchFamily="34" charset="0"/>
+                <a:ea typeface="Arial" pitchFamily="34" charset="-122"/>
+                <a:cs typeface="Arial" pitchFamily="34" charset="-120"/>
+              </a:rPr>
+              <a:t>MARKED ON   </a:t>
+            </a:r>
+            <a:pPr indent="0" marL="0">
+              <a:lnSpc>
+                <a:spcPts val="1600"/>
+              </a:lnSpc>
+              <a:buNone/>
+            </a:pPr>
+            <a:r>
+              <a:rPr lang="en-US" sz="1200" dirty="0">
+                <a:solidFill>
+                  <a:srgbClr val="24313F"/>
+                </a:solidFill>
+                <a:latin typeface="Georgia" pitchFamily="34" charset="0"/>
+                <a:ea typeface="Georgia" pitchFamily="34" charset="-122"/>
+                <a:cs typeface="Georgia" pitchFamily="34" charset="-120"/>
+              </a:rPr>
+              <a:t>Terminology and intention, not polish.</a:t>
+            </a:r>
+            <a:endParaRPr lang="en-US" sz="1000" dirty="0"/>
           </a:p>
         </p:txBody>
       </p:sp>
@@ -4347,7 +4435,7 @@
         <p:spPr>
           <a:xfrm>
             <a:off x="822960" y="2468880"/>
-            <a:ext cx="10058400" cy="1737360"/>
+            <a:ext cx="10058400" cy="1463040"/>
           </a:xfrm>
           <a:prstGeom prst="rect">
             <a:avLst/>
@@ -4361,12 +4449,29 @@
           <a:p>
             <a:pPr indent="0" marL="0">
               <a:lnSpc>
-                <a:spcPts val="2700"/>
+                <a:spcPts val="2600"/>
               </a:lnSpc>
               <a:buNone/>
             </a:pPr>
             <a:r>
-              <a:rPr lang="en-US" sz="1900" dirty="0">
+              <a:rPr lang="en-US" sz="1500" b="1" spc="100" kern="0" dirty="0">
+                <a:solidFill>
+                  <a:srgbClr val="4A6B5D"/>
+                </a:solidFill>
+                <a:latin typeface="Arial" pitchFamily="34" charset="0"/>
+                <a:ea typeface="Arial" pitchFamily="34" charset="-122"/>
+                <a:cs typeface="Arial" pitchFamily="34" charset="-120"/>
+              </a:rPr>
+              <a:t>THE FACT   </a:t>
+            </a:r>
+            <a:pPr indent="0" marL="0">
+              <a:lnSpc>
+                <a:spcPts val="2600"/>
+              </a:lnSpc>
+              <a:buNone/>
+            </a:pPr>
+            <a:r>
+              <a:rPr lang="en-US" sz="1700" dirty="0">
                 <a:solidFill>
                   <a:srgbClr val="24313F"/>
                 </a:solidFill>
@@ -4374,9 +4479,49 @@
                 <a:ea typeface="Georgia" pitchFamily="34" charset="-122"/>
                 <a:cs typeface="Georgia" pitchFamily="34" charset="-120"/>
               </a:rPr>
-              <a:t>Cambridge says candidates neglect sound. That is a statement about the field you are marked against. A script that reads camera brilliantly and never mentions sound has a coverage gap the examiner sees immediately. A script that names a sound bridge, or a shift in sound perspective, has almost always outperformed the scripts beside it.</a:t>
-            </a:r>
-            <a:endParaRPr lang="en-US" sz="1900" dirty="0"/>
+              <a:t>Cambridge says most candidates neglect sound. You are marked against those candidates.</a:t>
+            </a:r>
+            <a:endParaRPr lang="en-US" sz="1500" dirty="0"/>
+          </a:p>
+          <a:p>
+            <a:pPr indent="0" marL="0">
+              <a:lnSpc>
+                <a:spcPts val="2600"/>
+              </a:lnSpc>
+              <a:buNone/>
+            </a:pPr>
+            <a:r>
+              <a:rPr lang="en-US" sz="1700" dirty="0">
+                <a:solidFill>
+                  <a:srgbClr val="24313F"/>
+                </a:solidFill>
+                <a:latin typeface="Georgia" pitchFamily="34" charset="0"/>
+                <a:ea typeface="Georgia" pitchFamily="34" charset="-122"/>
+                <a:cs typeface="Georgia" pitchFamily="34" charset="-120"/>
+              </a:rPr>
+              <a:t>An answer with no sound paragraph has a gap the examiner sees at once.</a:t>
+            </a:r>
+            <a:endParaRPr lang="en-US" sz="1500" dirty="0"/>
+          </a:p>
+          <a:p>
+            <a:pPr indent="0" marL="0">
+              <a:lnSpc>
+                <a:spcPts val="2600"/>
+              </a:lnSpc>
+              <a:buNone/>
+            </a:pPr>
+            <a:r>
+              <a:rPr lang="en-US" sz="1700" dirty="0">
+                <a:solidFill>
+                  <a:srgbClr val="24313F"/>
+                </a:solidFill>
+                <a:latin typeface="Georgia" pitchFamily="34" charset="0"/>
+                <a:ea typeface="Georgia" pitchFamily="34" charset="-122"/>
+                <a:cs typeface="Georgia" pitchFamily="34" charset="-120"/>
+              </a:rPr>
+              <a:t>An answer that names a sound bridge or a shift in sound perspective stands out immediately.</a:t>
+            </a:r>
+            <a:endParaRPr lang="en-US" sz="1500" dirty="0"/>
           </a:p>
         </p:txBody>
       </p:sp>
@@ -4408,24 +4553,44 @@
         </p:nvSpPr>
         <p:spPr>
           <a:xfrm>
-            <a:off x="1097280" y="4526280"/>
-            <a:ext cx="9994392" cy="731520"/>
-          </a:xfrm>
-          <a:prstGeom prst="rect">
-            <a:avLst/>
-          </a:prstGeom>
-          <a:noFill/>
-          <a:ln/>
-        </p:spPr>
-        <p:txBody>
-          <a:bodyPr wrap="square" lIns="0" tIns="0" rIns="0" bIns="0" rtlCol="0" anchor="ctr"/>
-          <a:lstStyle/>
-          <a:p>
-            <a:pPr indent="0" marL="0">
-              <a:buNone/>
-            </a:pPr>
-            <a:r>
-              <a:rPr lang="en-US" sz="1650" i="1" dirty="0">
+            <a:off x="1097280" y="4681728"/>
+            <a:ext cx="9994392" cy="457200"/>
+          </a:xfrm>
+          <a:prstGeom prst="rect">
+            <a:avLst/>
+          </a:prstGeom>
+          <a:noFill/>
+          <a:ln/>
+        </p:spPr>
+        <p:txBody>
+          <a:bodyPr wrap="square" lIns="0" tIns="0" rIns="0" bIns="0" rtlCol="0" anchor="t"/>
+          <a:lstStyle/>
+          <a:p>
+            <a:pPr indent="0" marL="0">
+              <a:lnSpc>
+                <a:spcPts val="2100"/>
+              </a:lnSpc>
+              <a:buNone/>
+            </a:pPr>
+            <a:r>
+              <a:rPr lang="en-US" sz="1350" b="1" spc="100" kern="0" dirty="0">
+                <a:solidFill>
+                  <a:srgbClr val="4A6B5D"/>
+                </a:solidFill>
+                <a:latin typeface="Arial" pitchFamily="34" charset="0"/>
+                <a:ea typeface="Arial" pitchFamily="34" charset="-122"/>
+                <a:cs typeface="Arial" pitchFamily="34" charset="-120"/>
+              </a:rPr>
+              <a:t>LOOKING AHEAD   </a:t>
+            </a:r>
+            <a:pPr indent="0" marL="0">
+              <a:lnSpc>
+                <a:spcPts val="2100"/>
+              </a:lnSpc>
+              <a:buNone/>
+            </a:pPr>
+            <a:r>
+              <a:rPr lang="en-US" sz="1550" i="1" dirty="0">
                 <a:solidFill>
                   <a:srgbClr val="4A6B5D"/>
                 </a:solidFill>
@@ -4433,9 +4598,9 @@
                 <a:ea typeface="Georgia" pitchFamily="34" charset="-122"/>
                 <a:cs typeface="Georgia" pitchFamily="34" charset="-120"/>
               </a:rPr>
-              <a:t>Carries forward: the Component 3 music-promotion and documentary briefs in Grade 12 live or die on sound, and every C3 video task carries a mix.</a:t>
-            </a:r>
-            <a:endParaRPr lang="en-US" sz="1650" dirty="0"/>
+              <a:t>In Grade 12, the Component 3 music and documentary briefs depend on sound. Every video task carries a mix.</a:t>
+            </a:r>
+            <a:endParaRPr lang="en-US" sz="1350" dirty="0"/>
           </a:p>
         </p:txBody>
       </p:sp>
@@ -5323,7 +5488,7 @@
                 <a:ea typeface="Georgia" pitchFamily="34" charset="-122"/>
                 <a:cs typeface="Georgia" pitchFamily="34" charset="-120"/>
               </a:rPr>
-              <a:t>Screen black. Write down every sound you hear. Every one, including the ones you would normally call nothing.</a:t>
+              <a:t>Screen black. Write down every sound you hear. Include the small sounds you usually ignore.</a:t>
             </a:r>
             <a:endParaRPr lang="en-US" sz="1550" dirty="0"/>
           </a:p>
@@ -5466,7 +5631,7 @@
                 <a:ea typeface="Georgia" pitchFamily="34" charset="-122"/>
                 <a:cs typeface="Georgia" pitchFamily="34" charset="-120"/>
               </a:rPr>
-              <a:t>Same audio. Now write what you think is happening, and what the visuals will show. Commit to it.</a:t>
+              <a:t>Same audio. Now write what you think is happening and what the picture will show. Commit to your guess.</a:t>
             </a:r>
             <a:endParaRPr lang="en-US" sz="1550" dirty="0"/>
           </a:p>
@@ -5647,23 +5812,43 @@
         <p:spPr>
           <a:xfrm>
             <a:off x="822960" y="5413248"/>
-            <a:ext cx="10424160" cy="548640"/>
-          </a:xfrm>
-          <a:prstGeom prst="rect">
-            <a:avLst/>
-          </a:prstGeom>
-          <a:noFill/>
-          <a:ln/>
-        </p:spPr>
-        <p:txBody>
-          <a:bodyPr wrap="square" lIns="0" tIns="0" rIns="0" bIns="0" rtlCol="0" anchor="ctr"/>
-          <a:lstStyle/>
-          <a:p>
-            <a:pPr indent="0" marL="0">
-              <a:buNone/>
-            </a:pPr>
-            <a:r>
-              <a:rPr lang="en-US" sz="1700" i="1" dirty="0">
+            <a:ext cx="10424160" cy="411480"/>
+          </a:xfrm>
+          <a:prstGeom prst="rect">
+            <a:avLst/>
+          </a:prstGeom>
+          <a:noFill/>
+          <a:ln/>
+        </p:spPr>
+        <p:txBody>
+          <a:bodyPr wrap="square" lIns="0" tIns="0" rIns="0" bIns="0" rtlCol="0" anchor="t"/>
+          <a:lstStyle/>
+          <a:p>
+            <a:pPr indent="0" marL="0">
+              <a:lnSpc>
+                <a:spcPts val="2100"/>
+              </a:lnSpc>
+              <a:buNone/>
+            </a:pPr>
+            <a:r>
+              <a:rPr lang="en-US" sz="1400" b="1" spc="100" kern="0" dirty="0">
+                <a:solidFill>
+                  <a:srgbClr val="4A6B5D"/>
+                </a:solidFill>
+                <a:latin typeface="Arial" pitchFamily="34" charset="0"/>
+                <a:ea typeface="Arial" pitchFamily="34" charset="-122"/>
+                <a:cs typeface="Arial" pitchFamily="34" charset="-120"/>
+              </a:rPr>
+              <a:t>KEY POINT   </a:t>
+            </a:r>
+            <a:pPr indent="0" marL="0">
+              <a:lnSpc>
+                <a:spcPts val="2100"/>
+              </a:lnSpc>
+              <a:buNone/>
+            </a:pPr>
+            <a:r>
+              <a:rPr lang="en-US" sz="1600" i="1" dirty="0">
                 <a:solidFill>
                   <a:srgbClr val="4A6B5D"/>
                 </a:solidFill>
@@ -5671,9 +5856,9 @@
                 <a:ea typeface="Georgia" pitchFamily="34" charset="-122"/>
                 <a:cs typeface="Georgia" pitchFamily="34" charset="-120"/>
               </a:rPr>
-              <a:t>You built a whole scene out of audio. That is how much work sound was doing while you were watching the pictures.</a:t>
-            </a:r>
-            <a:endParaRPr lang="en-US" sz="1700" dirty="0"/>
+              <a:t>You built a whole scene from audio alone. Sound was doing that work all along, unnoticed.</a:t>
+            </a:r>
+            <a:endParaRPr lang="en-US" sz="1400" dirty="0"/>
           </a:p>
         </p:txBody>
       </p:sp>
@@ -5953,6 +6138,65 @@
           </a:p>
         </p:txBody>
       </p:sp>
+      <p:sp>
+        <p:nvSpPr>
+          <p:cNvPr id="6" name="Text 4"/>
+          <p:cNvSpPr/>
+          <p:nvPr/>
+        </p:nvSpPr>
+        <p:spPr>
+          <a:xfrm>
+            <a:off x="822960" y="5806440"/>
+            <a:ext cx="10424160" cy="640080"/>
+          </a:xfrm>
+          <a:prstGeom prst="rect">
+            <a:avLst/>
+          </a:prstGeom>
+          <a:noFill/>
+          <a:ln/>
+        </p:spPr>
+        <p:txBody>
+          <a:bodyPr wrap="square" lIns="0" tIns="0" rIns="0" bIns="0" rtlCol="0" anchor="t"/>
+          <a:lstStyle/>
+          <a:p>
+            <a:pPr indent="0" marL="0">
+              <a:lnSpc>
+                <a:spcPts val="1900"/>
+              </a:lnSpc>
+              <a:buNone/>
+            </a:pPr>
+            <a:r>
+              <a:rPr lang="en-US" sz="1200" b="1" spc="100" kern="0" dirty="0">
+                <a:solidFill>
+                  <a:srgbClr val="7A7F72"/>
+                </a:solidFill>
+                <a:latin typeface="Arial" pitchFamily="34" charset="0"/>
+                <a:ea typeface="Arial" pitchFamily="34" charset="-122"/>
+                <a:cs typeface="Arial" pitchFamily="34" charset="-120"/>
+              </a:rPr>
+              <a:t>IN PLAIN WORDS   </a:t>
+            </a:r>
+            <a:pPr indent="0" marL="0">
+              <a:lnSpc>
+                <a:spcPts val="1900"/>
+              </a:lnSpc>
+              <a:buNone/>
+            </a:pPr>
+            <a:r>
+              <a:rPr lang="en-US" sz="1400" i="1" dirty="0">
+                <a:solidFill>
+                  <a:srgbClr val="4A6B5D"/>
+                </a:solidFill>
+                <a:latin typeface="Georgia" pitchFamily="34" charset="0"/>
+                <a:ea typeface="Georgia" pitchFamily="34" charset="-122"/>
+                <a:cs typeface="Georgia" pitchFamily="34" charset="-120"/>
+              </a:rPr>
+              <a:t>Most candidates write very little about sound. Learn the sound terms and you stand out.</a:t>
+            </a:r>
+            <a:endParaRPr lang="en-US" sz="1200" dirty="0"/>
+          </a:p>
+        </p:txBody>
+      </p:sp>
     </p:spTree>
   </p:cSld>
   <p:clrMapOvr>
@@ -6653,7 +6897,7 @@
         <p:spPr>
           <a:xfrm>
             <a:off x="822960" y="5303520"/>
-            <a:ext cx="10424160" cy="640080"/>
+            <a:ext cx="10424160" cy="365760"/>
           </a:xfrm>
           <a:prstGeom prst="rect">
             <a:avLst/>
@@ -6667,12 +6911,12 @@
           <a:p>
             <a:pPr indent="0" marL="0">
               <a:lnSpc>
-                <a:spcPts val="1800"/>
+                <a:spcPts val="1700"/>
               </a:lnSpc>
               <a:buNone/>
             </a:pPr>
             <a:r>
-              <a:rPr lang="en-US" sz="1250" i="1" dirty="0">
+              <a:rPr lang="en-US" sz="1050" b="1" spc="100" kern="0" dirty="0">
                 <a:solidFill>
                   <a:srgbClr val="7A7F72"/>
                 </a:solidFill>
@@ -6680,9 +6924,26 @@
                 <a:ea typeface="Arial" pitchFamily="34" charset="-122"/>
                 <a:cs typeface="Arial" pitchFamily="34" charset="-120"/>
               </a:rPr>
-              <a:t>And the vocabulary Cambridge adds for stretch, rarely seen in scripts and cheap to acquire: harmony, dissonance, discordance, rhythm, crescendo, pitch, timbre.</a:t>
-            </a:r>
-            <a:endParaRPr lang="en-US" sz="1250" dirty="0"/>
+              <a:t>STRETCH TERMS   </a:t>
+            </a:r>
+            <a:pPr indent="0" marL="0">
+              <a:lnSpc>
+                <a:spcPts val="1700"/>
+              </a:lnSpc>
+              <a:buNone/>
+            </a:pPr>
+            <a:r>
+              <a:rPr lang="en-US" sz="1250" dirty="0">
+                <a:solidFill>
+                  <a:srgbClr val="7A7F72"/>
+                </a:solidFill>
+                <a:latin typeface="Georgia" pitchFamily="34" charset="0"/>
+                <a:ea typeface="Georgia" pitchFamily="34" charset="-122"/>
+                <a:cs typeface="Georgia" pitchFamily="34" charset="-120"/>
+              </a:rPr>
+              <a:t>Rare in exam scripts, easy to learn: harmony, dissonance, discordance, rhythm, crescendo, pitch, timbre.</a:t>
+            </a:r>
+            <a:endParaRPr lang="en-US" sz="1050" dirty="0"/>
           </a:p>
         </p:txBody>
       </p:sp>
@@ -7016,8 +7277,8 @@
         </p:nvSpPr>
         <p:spPr>
           <a:xfrm>
-            <a:off x="822960" y="4572000"/>
-            <a:ext cx="10543032" cy="1463040"/>
+            <a:off x="822960" y="4617720"/>
+            <a:ext cx="10543032" cy="868680"/>
           </a:xfrm>
           <a:prstGeom prst="rect">
             <a:avLst/>
@@ -7031,12 +7292,29 @@
           <a:p>
             <a:pPr indent="0" marL="0">
               <a:lnSpc>
-                <a:spcPts val="2300"/>
+                <a:spcPts val="2000"/>
               </a:lnSpc>
               <a:buNone/>
             </a:pPr>
             <a:r>
-              <a:rPr lang="en-US" sz="1600" dirty="0">
+              <a:rPr lang="en-US" sz="1200" b="1" spc="100" kern="0" dirty="0">
+                <a:solidFill>
+                  <a:srgbClr val="4A6B5D"/>
+                </a:solidFill>
+                <a:latin typeface="Arial" pitchFamily="34" charset="0"/>
+                <a:ea typeface="Arial" pitchFamily="34" charset="-122"/>
+                <a:cs typeface="Arial" pitchFamily="34" charset="-120"/>
+              </a:rPr>
+              <a:t>TERM   </a:t>
+            </a:r>
+            <a:pPr indent="0" marL="0">
+              <a:lnSpc>
+                <a:spcPts val="2000"/>
+              </a:lnSpc>
+              <a:buNone/>
+            </a:pPr>
+            <a:r>
+              <a:rPr lang="en-US" sz="1400" dirty="0">
                 <a:solidFill>
                   <a:srgbClr val="24313F"/>
                 </a:solidFill>
@@ -7044,9 +7322,83 @@
                 <a:ea typeface="Georgia" pitchFamily="34" charset="-122"/>
                 <a:cs typeface="Georgia" pitchFamily="34" charset="-120"/>
               </a:rPr>
-              <a:t>Jaws attaches two low notes to the shark, and after the first attack the film never needs to show it again: the motif is the monster. Play the two notes over a calm beach and the audience supplies the dread themselves. That is a sound motif: a recurring sound welded to a character or idea until the sound alone can carry it. The coursebook's own example, and the cheapest tension machine in cinema.</a:t>
-            </a:r>
-            <a:endParaRPr lang="en-US" sz="1600" dirty="0"/>
+              <a:t>Sound motif: a repeated sound attached to a character or idea, until the sound alone carries it.</a:t>
+            </a:r>
+            <a:endParaRPr lang="en-US" sz="1200" dirty="0"/>
+          </a:p>
+          <a:p>
+            <a:pPr indent="0" marL="0">
+              <a:lnSpc>
+                <a:spcPts val="2000"/>
+              </a:lnSpc>
+              <a:buNone/>
+            </a:pPr>
+            <a:r>
+              <a:rPr lang="en-US" sz="1200" b="1" spc="100" kern="0" dirty="0">
+                <a:solidFill>
+                  <a:srgbClr val="4A6B5D"/>
+                </a:solidFill>
+                <a:latin typeface="Arial" pitchFamily="34" charset="0"/>
+                <a:ea typeface="Arial" pitchFamily="34" charset="-122"/>
+                <a:cs typeface="Arial" pitchFamily="34" charset="-120"/>
+              </a:rPr>
+              <a:t>THE CASE   </a:t>
+            </a:r>
+            <a:pPr indent="0" marL="0">
+              <a:lnSpc>
+                <a:spcPts val="2000"/>
+              </a:lnSpc>
+              <a:buNone/>
+            </a:pPr>
+            <a:r>
+              <a:rPr lang="en-US" sz="1400" dirty="0">
+                <a:solidFill>
+                  <a:srgbClr val="24313F"/>
+                </a:solidFill>
+                <a:latin typeface="Georgia" pitchFamily="34" charset="0"/>
+                <a:ea typeface="Georgia" pitchFamily="34" charset="-122"/>
+                <a:cs typeface="Georgia" pitchFamily="34" charset="-120"/>
+              </a:rPr>
+              <a:t>Jaws attaches two low notes to the shark. After the first attack, the notes alone create the fear.</a:t>
+            </a:r>
+            <a:endParaRPr lang="en-US" sz="1200" dirty="0"/>
+          </a:p>
+          <a:p>
+            <a:pPr indent="0" marL="0">
+              <a:lnSpc>
+                <a:spcPts val="2000"/>
+              </a:lnSpc>
+              <a:buNone/>
+            </a:pPr>
+            <a:r>
+              <a:rPr lang="en-US" sz="1200" b="1" spc="100" kern="0" dirty="0">
+                <a:solidFill>
+                  <a:srgbClr val="4A6B5D"/>
+                </a:solidFill>
+                <a:latin typeface="Arial" pitchFamily="34" charset="0"/>
+                <a:ea typeface="Arial" pitchFamily="34" charset="-122"/>
+                <a:cs typeface="Arial" pitchFamily="34" charset="-120"/>
+              </a:rPr>
+              <a:t>EXAM SENTENCE   </a:t>
+            </a:r>
+            <a:pPr indent="0" marL="0">
+              <a:lnSpc>
+                <a:spcPts val="2000"/>
+              </a:lnSpc>
+              <a:buNone/>
+            </a:pPr>
+            <a:r>
+              <a:rPr lang="en-US" sz="1400" i="1" dirty="0">
+                <a:solidFill>
+                  <a:srgbClr val="24313F"/>
+                </a:solidFill>
+                <a:latin typeface="Georgia" pitchFamily="34" charset="0"/>
+                <a:ea typeface="Georgia" pitchFamily="34" charset="-122"/>
+                <a:cs typeface="Georgia" pitchFamily="34" charset="-120"/>
+              </a:rPr>
+              <a:t>“The recurring two-note motif signals the shark's presence before we see it.”</a:t>
+            </a:r>
+            <a:endParaRPr lang="en-US" sz="1200" dirty="0"/>
           </a:p>
         </p:txBody>
       </p:sp>
@@ -7317,7 +7669,7 @@
         <p:spPr>
           <a:xfrm>
             <a:off x="822960" y="2331720"/>
-            <a:ext cx="6400800" cy="3291840"/>
+            <a:ext cx="6400800" cy="3108960"/>
           </a:xfrm>
           <a:prstGeom prst="rect">
             <a:avLst/>
@@ -7336,7 +7688,24 @@
               <a:buNone/>
             </a:pPr>
             <a:r>
-              <a:rPr lang="en-US" sz="1700" dirty="0">
+              <a:rPr lang="en-US" sz="1350" b="1" spc="100" kern="0" dirty="0">
+                <a:solidFill>
+                  <a:srgbClr val="4A6B5D"/>
+                </a:solidFill>
+                <a:latin typeface="Arial" pitchFamily="34" charset="0"/>
+                <a:ea typeface="Arial" pitchFamily="34" charset="-122"/>
+                <a:cs typeface="Arial" pitchFamily="34" charset="-120"/>
+              </a:rPr>
+              <a:t>TERM   </a:t>
+            </a:r>
+            <a:pPr indent="0" marL="0">
+              <a:lnSpc>
+                <a:spcPts val="2400"/>
+              </a:lnSpc>
+              <a:buNone/>
+            </a:pPr>
+            <a:r>
+              <a:rPr lang="en-US" sz="1550" dirty="0">
                 <a:solidFill>
                   <a:srgbClr val="24313F"/>
                 </a:solidFill>
@@ -7344,9 +7713,9 @@
                 <a:ea typeface="Georgia" pitchFamily="34" charset="-122"/>
                 <a:cs typeface="Georgia" pitchFamily="34" charset="-120"/>
               </a:rPr>
-              <a:t>A foley artist, mid-drop. Almost nothing you hear in a finished scene was recorded when the camera rolled: footsteps, cloth, a glass set down, a door eased shut are all performed later, object by object, in a room like this one.</a:t>
-            </a:r>
-            <a:endParaRPr lang="en-US" sz="1700" dirty="0"/>
+              <a:t>Foley: sound effects performed and recorded after filming.</a:t>
+            </a:r>
+            <a:endParaRPr lang="en-US" sz="1350" dirty="0"/>
           </a:p>
           <a:p>
             <a:pPr indent="0" marL="0">
@@ -7355,7 +7724,18 @@
               </a:lnSpc>
               <a:buNone/>
             </a:pPr>
-            <a:endParaRPr lang="en-US" sz="1700" dirty="0"/>
+            <a:r>
+              <a:rPr lang="en-US" sz="1550" dirty="0">
+                <a:solidFill>
+                  <a:srgbClr val="24313F"/>
+                </a:solidFill>
+                <a:latin typeface="Georgia" pitchFamily="34" charset="0"/>
+                <a:ea typeface="Georgia" pitchFamily="34" charset="-122"/>
+                <a:cs typeface="Georgia" pitchFamily="34" charset="-120"/>
+              </a:rPr>
+              <a:t>Almost nothing you hear in a finished scene was recorded on set. Footsteps, cloth, a glass, a door: all performed later, in a room like this.</a:t>
+            </a:r>
+            <a:endParaRPr lang="en-US" sz="1350" dirty="0"/>
           </a:p>
           <a:p>
             <a:pPr indent="0" marL="0">
@@ -7365,7 +7745,24 @@
               <a:buNone/>
             </a:pPr>
             <a:r>
-              <a:rPr lang="en-US" sz="1700" dirty="0">
+              <a:rPr lang="en-US" sz="1350" b="1" spc="100" kern="0" dirty="0">
+                <a:solidFill>
+                  <a:srgbClr val="4A6B5D"/>
+                </a:solidFill>
+                <a:latin typeface="Arial" pitchFamily="34" charset="0"/>
+                <a:ea typeface="Arial" pitchFamily="34" charset="-122"/>
+                <a:cs typeface="Arial" pitchFamily="34" charset="-120"/>
+              </a:rPr>
+              <a:t>KEY POINT   </a:t>
+            </a:r>
+            <a:pPr indent="0" marL="0">
+              <a:lnSpc>
+                <a:spcPts val="2400"/>
+              </a:lnSpc>
+              <a:buNone/>
+            </a:pPr>
+            <a:r>
+              <a:rPr lang="en-US" sz="1550" dirty="0">
                 <a:solidFill>
                   <a:srgbClr val="24313F"/>
                 </a:solidFill>
@@ -7373,9 +7770,9 @@
                 <a:ea typeface="Georgia" pitchFamily="34" charset="-122"/>
                 <a:cs typeface="Georgia" pitchFamily="34" charset="-120"/>
               </a:rPr>
-              <a:t>That is the part of a soundtrack students never hear as a decision. Ambient sound, the bed under the scene, the breath before the line: every one of them was chosen and placed, which is exactly why it is easy to overlook and worth naming.</a:t>
-            </a:r>
-            <a:endParaRPr lang="en-US" sz="1700" dirty="0"/>
+              <a:t>Every sound was chosen and placed. If you can hear it, someone decided you would.</a:t>
+            </a:r>
+            <a:endParaRPr lang="en-US" sz="1350" dirty="0"/>
           </a:p>
         </p:txBody>
       </p:sp>
@@ -7524,7 +7921,7 @@
                 <a:ea typeface="Arial" pitchFamily="34" charset="-122"/>
                 <a:cs typeface="Arial" pitchFamily="34" charset="-120"/>
               </a:rPr>
-              <a:t>THE MOVE THAT EARNS MORE THAN EITHER STATE</a:t>
+              <a:t>NAMING THE CROSSING EARNS THE MOST</a:t>
             </a:r>
             <a:endParaRPr lang="en-US" sz="1100" dirty="0"/>
           </a:p>
@@ -8855,8 +9252,8 @@
         </p:nvSpPr>
         <p:spPr>
           <a:xfrm>
-            <a:off x="822960" y="5440680"/>
-            <a:ext cx="10543032" cy="548640"/>
+            <a:off x="822960" y="5486400"/>
+            <a:ext cx="10543032" cy="502920"/>
           </a:xfrm>
           <a:prstGeom prst="rect">
             <a:avLst/>
@@ -8870,12 +9267,29 @@
           <a:p>
             <a:pPr indent="0" marL="0">
               <a:lnSpc>
-                <a:spcPts val="2100"/>
+                <a:spcPts val="1800"/>
               </a:lnSpc>
               <a:buNone/>
             </a:pPr>
             <a:r>
-              <a:rPr lang="en-US" sz="1550" dirty="0">
+              <a:rPr lang="en-US" sz="1150" b="1" spc="100" kern="0" dirty="0">
+                <a:solidFill>
+                  <a:srgbClr val="4A6B5D"/>
+                </a:solidFill>
+                <a:latin typeface="Arial" pitchFamily="34" charset="0"/>
+                <a:ea typeface="Arial" pitchFamily="34" charset="-122"/>
+                <a:cs typeface="Arial" pitchFamily="34" charset="-120"/>
+              </a:rPr>
+              <a:t>TERM   </a:t>
+            </a:r>
+            <a:pPr indent="0" marL="0">
+              <a:lnSpc>
+                <a:spcPts val="1800"/>
+              </a:lnSpc>
+              <a:buNone/>
+            </a:pPr>
+            <a:r>
+              <a:rPr lang="en-US" sz="1350" dirty="0">
                 <a:solidFill>
                   <a:srgbClr val="24313F"/>
                 </a:solidFill>
@@ -8883,9 +9297,46 @@
                 <a:ea typeface="Georgia" pitchFamily="34" charset="-122"/>
                 <a:cs typeface="Georgia" pitchFamily="34" charset="-120"/>
               </a:rPr>
-              <a:t>One song, unbroken, across two worlds: a sound bridge. Naming the crossing is worth more than naming either side, because the crossing is the decision.</a:t>
-            </a:r>
-            <a:endParaRPr lang="en-US" sz="1550" dirty="0"/>
+              <a:t>Sound bridge: one sound continues, unbroken, across a cut.</a:t>
+            </a:r>
+            <a:endParaRPr lang="en-US" sz="1150" dirty="0"/>
+          </a:p>
+          <a:p>
+            <a:pPr indent="0" marL="0">
+              <a:lnSpc>
+                <a:spcPts val="1800"/>
+              </a:lnSpc>
+              <a:buNone/>
+            </a:pPr>
+            <a:r>
+              <a:rPr lang="en-US" sz="1150" b="1" spc="100" kern="0" dirty="0">
+                <a:solidFill>
+                  <a:srgbClr val="4A6B5D"/>
+                </a:solidFill>
+                <a:latin typeface="Arial" pitchFamily="34" charset="0"/>
+                <a:ea typeface="Arial" pitchFamily="34" charset="-122"/>
+                <a:cs typeface="Arial" pitchFamily="34" charset="-120"/>
+              </a:rPr>
+              <a:t>EXAM SENTENCE   </a:t>
+            </a:r>
+            <a:pPr indent="0" marL="0">
+              <a:lnSpc>
+                <a:spcPts val="1800"/>
+              </a:lnSpc>
+              <a:buNone/>
+            </a:pPr>
+            <a:r>
+              <a:rPr lang="en-US" sz="1350" i="1" dirty="0">
+                <a:solidFill>
+                  <a:srgbClr val="24313F"/>
+                </a:solidFill>
+                <a:latin typeface="Georgia" pitchFamily="34" charset="0"/>
+                <a:ea typeface="Georgia" pitchFamily="34" charset="-122"/>
+                <a:cs typeface="Georgia" pitchFamily="34" charset="-120"/>
+              </a:rPr>
+              <a:t>“The sound bridge connects the car and the kitchen, so the two spaces feel like one story.”</a:t>
+            </a:r>
+            <a:endParaRPr lang="en-US" sz="1150" dirty="0"/>
           </a:p>
         </p:txBody>
       </p:sp>
@@ -9117,7 +9568,7 @@
                 <a:ea typeface="Georgia" pitchFamily="34" charset="-122"/>
                 <a:cs typeface="Georgia" pitchFamily="34" charset="-120"/>
               </a:rPr>
-              <a:t>Two music beds.</a:t>
+              <a:t>Different music.</a:t>
             </a:r>
             <a:endParaRPr lang="en-US" sz="5000" dirty="0"/>
           </a:p>
@@ -9202,7 +9653,7 @@
                 <a:ea typeface="Arial" pitchFamily="34" charset="-122"/>
                 <a:cs typeface="Arial" pitchFamily="34" charset="-120"/>
               </a:rPr>
-              <a:t>Watched twice, then one question: which of those choices did the audience make, and which were made for them? The recut trailer is the fastest proof that non-diegetic music is not decoration.</a:t>
+              <a:t>We watch the same scene twice with two soundtracks. The genre changes. That is the proof: non-diegetic music is not decoration. It tells you how to feel.</a:t>
             </a:r>
             <a:endParaRPr lang="en-US" sz="1400" dirty="0"/>
           </a:p>
